--- a/public/lessons/year-6-maths/summer/week-29/choose-efficient-representations/teaching-powerpoint-v1.pptx
+++ b/public/lessons/year-6-maths/summer/week-29/choose-efficient-representations/teaching-powerpoint-v1.pptx
@@ -2,24 +2,24 @@
 <file path=ppt/presentation.xml><?xml version="1.0" encoding="utf-8"?>
 <p:presentation xmlns:p="http://schemas.openxmlformats.org/presentationml/2006/main">
   <p:sldMasterIdLst>
-    <p:sldMasterId xmlns:r="http://schemas.openxmlformats.org/officeDocument/2006/relationships" id="2147483648" r:id="R95cede5eb6f242b0"/>
+    <p:sldMasterId xmlns:r="http://schemas.openxmlformats.org/officeDocument/2006/relationships" id="2147483648" r:id="R0ae002d4dd3b48d6"/>
   </p:sldMasterIdLst>
   <p:notesMasterIdLst>
-    <p:notesMasterId xmlns:r="http://schemas.openxmlformats.org/officeDocument/2006/relationships" r:id="R77e7b116e6454704"/>
+    <p:notesMasterId xmlns:r="http://schemas.openxmlformats.org/officeDocument/2006/relationships" r:id="R5ec3a1e2e22f40ff"/>
   </p:notesMasterIdLst>
   <p:sldIdLst>
-    <p:sldId xmlns:r="http://schemas.openxmlformats.org/officeDocument/2006/relationships" id="256" r:id="R3e67c8d2dad0447c"/>
-    <p:sldId xmlns:r="http://schemas.openxmlformats.org/officeDocument/2006/relationships" id="257" r:id="R38a8ff89cf0443c9"/>
-    <p:sldId xmlns:r="http://schemas.openxmlformats.org/officeDocument/2006/relationships" id="258" r:id="Rfe15d63e32f74bed"/>
-    <p:sldId xmlns:r="http://schemas.openxmlformats.org/officeDocument/2006/relationships" id="259" r:id="R5728357d17584084"/>
-    <p:sldId xmlns:r="http://schemas.openxmlformats.org/officeDocument/2006/relationships" id="260" r:id="Ree4b8b9d2e214d14"/>
-    <p:sldId xmlns:r="http://schemas.openxmlformats.org/officeDocument/2006/relationships" id="261" r:id="R651890483aeb417f"/>
-    <p:sldId xmlns:r="http://schemas.openxmlformats.org/officeDocument/2006/relationships" id="262" r:id="R9885c667882b46c5"/>
-    <p:sldId xmlns:r="http://schemas.openxmlformats.org/officeDocument/2006/relationships" id="263" r:id="R700284ebd70942fa"/>
-    <p:sldId xmlns:r="http://schemas.openxmlformats.org/officeDocument/2006/relationships" id="264" r:id="R01005b4420324832"/>
-    <p:sldId xmlns:r="http://schemas.openxmlformats.org/officeDocument/2006/relationships" id="265" r:id="Re4fc07d21c4f480b"/>
-    <p:sldId xmlns:r="http://schemas.openxmlformats.org/officeDocument/2006/relationships" id="266" r:id="Rae31655e708b4945"/>
-    <p:sldId xmlns:r="http://schemas.openxmlformats.org/officeDocument/2006/relationships" id="267" r:id="Ra2a8301ca4dc4869"/>
+    <p:sldId xmlns:r="http://schemas.openxmlformats.org/officeDocument/2006/relationships" id="256" r:id="R36dccfd7adf74f63"/>
+    <p:sldId xmlns:r="http://schemas.openxmlformats.org/officeDocument/2006/relationships" id="257" r:id="Rf8d4f16d268a4739"/>
+    <p:sldId xmlns:r="http://schemas.openxmlformats.org/officeDocument/2006/relationships" id="258" r:id="R2bb4f38c5c46418d"/>
+    <p:sldId xmlns:r="http://schemas.openxmlformats.org/officeDocument/2006/relationships" id="259" r:id="Rf33467c161ed4de2"/>
+    <p:sldId xmlns:r="http://schemas.openxmlformats.org/officeDocument/2006/relationships" id="260" r:id="R36c12bb987dc4c32"/>
+    <p:sldId xmlns:r="http://schemas.openxmlformats.org/officeDocument/2006/relationships" id="261" r:id="R58cb558178d34dfe"/>
+    <p:sldId xmlns:r="http://schemas.openxmlformats.org/officeDocument/2006/relationships" id="262" r:id="R4f5262e0dccf4b23"/>
+    <p:sldId xmlns:r="http://schemas.openxmlformats.org/officeDocument/2006/relationships" id="263" r:id="R0cf7309fa24f4480"/>
+    <p:sldId xmlns:r="http://schemas.openxmlformats.org/officeDocument/2006/relationships" id="264" r:id="R6ffa5ce4973540c3"/>
+    <p:sldId xmlns:r="http://schemas.openxmlformats.org/officeDocument/2006/relationships" id="265" r:id="Rdf4aba59895b49f6"/>
+    <p:sldId xmlns:r="http://schemas.openxmlformats.org/officeDocument/2006/relationships" id="266" r:id="R380110376bcf4475"/>
+    <p:sldId xmlns:r="http://schemas.openxmlformats.org/officeDocument/2006/relationships" id="267" r:id="R5bf9fff215474f8c"/>
   </p:sldIdLst>
   <p:sldSz cx="12192000" cy="6858000"/>
   <p:notesSz cx="6858000" cy="9144000"/>
@@ -873,7 +873,7 @@
           <a:lstStyle xmlns:a="http://schemas.openxmlformats.org/drawingml/2006/main"/>
           <a:p xmlns:a="http://schemas.openxmlformats.org/drawingml/2006/main">
             <a:r>
-              <a:t>I do. Reveal the question, setup and each calculation stage one click at a time. Pupils watch before copying. Model answer: 244.8.</a:t>
+              <a:t>I do. Reveal the question, then reveal each mathematical change one click at a time. Point to the numbers and operation that changed before moving to the next line. Final answer: 220.8.</a:t>
             </a:r>
           </a:p>
         </p:txBody>
@@ -1291,7 +1291,7 @@
   </p:cSld>
   <p:clrMap bg1="lt1" tx1="dk1" bg2="lt2" tx2="dk2" accent1="accent1" accent2="accent2" accent3="accent3" accent4="accent4" accent5="accent5" accent6="accent6" hlink="hlink" folHlink="folHlink"/>
   <p:sldLayoutIdLst>
-    <p:sldLayoutId xmlns:r="http://schemas.openxmlformats.org/officeDocument/2006/relationships" id="2147483649" r:id="R075e9299f0854de3"/>
+    <p:sldLayoutId xmlns:r="http://schemas.openxmlformats.org/officeDocument/2006/relationships" id="2147483649" r:id="R9a98f8d74afd4f33"/>
   </p:sldLayoutIdLst>
   <p:txStyles>
     <p:titleStyle>
@@ -1842,7 +1842,7 @@
           <p:cNvPr id="12" name="">
             <a:extLst xmlns:a="http://schemas.openxmlformats.org/drawingml/2006/main">
               <a:ext uri="{FF2B5EF4-FFF2-40B4-BE49-F238E27FC236}">
-                <a16:creationId xmlns:a16="http://schemas.microsoft.com/office/drawing/2014/main" id="{C41F7CC2-6CF8-4F3C-AC57-4371D3E72D81}"/>
+                <a16:creationId xmlns:a16="http://schemas.microsoft.com/office/drawing/2014/main" id="{9F7F2AC8-76E2-43EB-8A7F-AAB816E72D61}"/>
               </a:ext>
             </a:extLst>
           </p:cNvPr>
@@ -1874,7 +1874,7 @@
           <p:cNvPr id="2" name="">
             <a:extLst xmlns:a="http://schemas.openxmlformats.org/drawingml/2006/main">
               <a:ext uri="{FF2B5EF4-FFF2-40B4-BE49-F238E27FC236}">
-                <a16:creationId xmlns:a16="http://schemas.microsoft.com/office/drawing/2014/main" id="{80DF8529-3C6B-46B2-BFDC-9BD8BD35880F}"/>
+                <a16:creationId xmlns:a16="http://schemas.microsoft.com/office/drawing/2014/main" id="{68B326F3-40A1-4F28-891F-60E08A9505F0}"/>
               </a:ext>
             </a:extLst>
           </p:cNvPr>
@@ -1931,7 +1931,7 @@
           <p:cNvPr id="3" name="">
             <a:extLst xmlns:a="http://schemas.openxmlformats.org/drawingml/2006/main">
               <a:ext uri="{FF2B5EF4-FFF2-40B4-BE49-F238E27FC236}">
-                <a16:creationId xmlns:a16="http://schemas.microsoft.com/office/drawing/2014/main" id="{50D87C4C-4649-4C96-B230-1CD811A6A4B8}"/>
+                <a16:creationId xmlns:a16="http://schemas.microsoft.com/office/drawing/2014/main" id="{8A20F84E-3D9E-4204-B871-07881DBDF1BD}"/>
               </a:ext>
             </a:extLst>
           </p:cNvPr>
@@ -1965,7 +1965,7 @@
           <p:cNvPr id="4" name="">
             <a:extLst xmlns:a="http://schemas.openxmlformats.org/drawingml/2006/main">
               <a:ext uri="{FF2B5EF4-FFF2-40B4-BE49-F238E27FC236}">
-                <a16:creationId xmlns:a16="http://schemas.microsoft.com/office/drawing/2014/main" id="{BFD4C0C2-D922-474A-953C-2B31DCF5328E}"/>
+                <a16:creationId xmlns:a16="http://schemas.microsoft.com/office/drawing/2014/main" id="{72D6A3DA-B39A-4DF3-A652-AFB8CC513EB3}"/>
               </a:ext>
             </a:extLst>
           </p:cNvPr>
@@ -2022,7 +2022,7 @@
           <p:cNvPr id="5" name="">
             <a:extLst xmlns:a="http://schemas.openxmlformats.org/drawingml/2006/main">
               <a:ext uri="{FF2B5EF4-FFF2-40B4-BE49-F238E27FC236}">
-                <a16:creationId xmlns:a16="http://schemas.microsoft.com/office/drawing/2014/main" id="{3823B721-3C72-43C4-AC6B-F6C0F15A6B8A}"/>
+                <a16:creationId xmlns:a16="http://schemas.microsoft.com/office/drawing/2014/main" id="{CE8FCA4A-4C69-43CA-8D03-76159D4E986C}"/>
               </a:ext>
             </a:extLst>
           </p:cNvPr>
@@ -2079,7 +2079,7 @@
           <p:cNvPr id="6" name="">
             <a:extLst xmlns:a="http://schemas.openxmlformats.org/drawingml/2006/main">
               <a:ext uri="{FF2B5EF4-FFF2-40B4-BE49-F238E27FC236}">
-                <a16:creationId xmlns:a16="http://schemas.microsoft.com/office/drawing/2014/main" id="{38F18938-3EE8-46B7-83AD-35445646EDD1}"/>
+                <a16:creationId xmlns:a16="http://schemas.microsoft.com/office/drawing/2014/main" id="{FA7570C6-3799-45CA-95D3-FAD51547BE9B}"/>
               </a:ext>
             </a:extLst>
           </p:cNvPr>
@@ -2113,7 +2113,7 @@
           <p:cNvPr id="7" name="">
             <a:extLst xmlns:a="http://schemas.openxmlformats.org/drawingml/2006/main">
               <a:ext uri="{FF2B5EF4-FFF2-40B4-BE49-F238E27FC236}">
-                <a16:creationId xmlns:a16="http://schemas.microsoft.com/office/drawing/2014/main" id="{1D0F7FD4-8D3C-47BC-BA9F-559727EF44CA}"/>
+                <a16:creationId xmlns:a16="http://schemas.microsoft.com/office/drawing/2014/main" id="{F2A636D0-4519-47E5-B10B-CC1E93B4DEF0}"/>
               </a:ext>
             </a:extLst>
           </p:cNvPr>
@@ -2170,7 +2170,7 @@
           <p:cNvPr id="8" name="">
             <a:extLst xmlns:a="http://schemas.openxmlformats.org/drawingml/2006/main">
               <a:ext uri="{FF2B5EF4-FFF2-40B4-BE49-F238E27FC236}">
-                <a16:creationId xmlns:a16="http://schemas.microsoft.com/office/drawing/2014/main" id="{05CB366F-94EB-435B-B2B3-E3AA65B637E9}"/>
+                <a16:creationId xmlns:a16="http://schemas.microsoft.com/office/drawing/2014/main" id="{78ECB7E4-EA75-494E-9330-34F7E4DA5CF9}"/>
               </a:ext>
             </a:extLst>
           </p:cNvPr>
@@ -2227,7 +2227,7 @@
           <p:cNvPr id="9" name="">
             <a:extLst xmlns:a="http://schemas.openxmlformats.org/drawingml/2006/main">
               <a:ext uri="{FF2B5EF4-FFF2-40B4-BE49-F238E27FC236}">
-                <a16:creationId xmlns:a16="http://schemas.microsoft.com/office/drawing/2014/main" id="{27B29978-6CA0-4E24-8E88-D533D3935246}"/>
+                <a16:creationId xmlns:a16="http://schemas.microsoft.com/office/drawing/2014/main" id="{37D4E772-793C-49A3-B0DA-F9124342FA6B}"/>
               </a:ext>
             </a:extLst>
           </p:cNvPr>
@@ -2284,7 +2284,7 @@
           <p:cNvPr id="10" name="">
             <a:extLst xmlns:a="http://schemas.openxmlformats.org/drawingml/2006/main">
               <a:ext uri="{FF2B5EF4-FFF2-40B4-BE49-F238E27FC236}">
-                <a16:creationId xmlns:a16="http://schemas.microsoft.com/office/drawing/2014/main" id="{3EC77201-0D4A-40A4-AD60-1053F5B28715}"/>
+                <a16:creationId xmlns:a16="http://schemas.microsoft.com/office/drawing/2014/main" id="{40E56DFE-3B2D-4B1B-9845-E42EC118ED89}"/>
               </a:ext>
             </a:extLst>
           </p:cNvPr>
@@ -2341,7 +2341,7 @@
           <p:cNvPr id="11" name="">
             <a:extLst xmlns:a="http://schemas.openxmlformats.org/drawingml/2006/main">
               <a:ext uri="{FF2B5EF4-FFF2-40B4-BE49-F238E27FC236}">
-                <a16:creationId xmlns:a16="http://schemas.microsoft.com/office/drawing/2014/main" id="{CA323A85-A2B9-4772-A7C9-3119966AA632}"/>
+                <a16:creationId xmlns:a16="http://schemas.microsoft.com/office/drawing/2014/main" id="{02E2155E-AC79-418A-AD49-B9645E590D72}"/>
               </a:ext>
             </a:extLst>
           </p:cNvPr>
@@ -2396,7 +2396,7 @@
     </p:spTree>
     <p:extLst>
       <p:ext uri="{BB962C8B-B14F-4D97-AF65-F5344CB8AC3E}">
-        <p14:creationId xmlns:p14="http://schemas.microsoft.com/office/powerpoint/2010/main" val="2090969799"/>
+        <p14:creationId xmlns:p14="http://schemas.microsoft.com/office/powerpoint/2010/main" val="1041123802"/>
       </p:ext>
     </p:extLst>
   </p:cSld>
@@ -2427,7 +2427,7 @@
           <p:cNvPr id="14" name="">
             <a:extLst xmlns:a="http://schemas.openxmlformats.org/drawingml/2006/main">
               <a:ext uri="{FF2B5EF4-FFF2-40B4-BE49-F238E27FC236}">
-                <a16:creationId xmlns:a16="http://schemas.microsoft.com/office/drawing/2014/main" id="{979A8FA2-28CF-4C2B-9140-FF961009CE28}"/>
+                <a16:creationId xmlns:a16="http://schemas.microsoft.com/office/drawing/2014/main" id="{62D091DA-2CC1-431E-B683-ACE190EB51B7}"/>
               </a:ext>
             </a:extLst>
           </p:cNvPr>
@@ -2459,7 +2459,7 @@
           <p:cNvPr id="2" name="">
             <a:extLst xmlns:a="http://schemas.openxmlformats.org/drawingml/2006/main">
               <a:ext uri="{FF2B5EF4-FFF2-40B4-BE49-F238E27FC236}">
-                <a16:creationId xmlns:a16="http://schemas.microsoft.com/office/drawing/2014/main" id="{14D056EE-7F65-4CB5-AE4A-6DAAF230F789}"/>
+                <a16:creationId xmlns:a16="http://schemas.microsoft.com/office/drawing/2014/main" id="{85F5A925-01B7-43F9-8F46-94668A2A1AE0}"/>
               </a:ext>
             </a:extLst>
           </p:cNvPr>
@@ -2516,7 +2516,7 @@
           <p:cNvPr id="3" name="">
             <a:extLst xmlns:a="http://schemas.openxmlformats.org/drawingml/2006/main">
               <a:ext uri="{FF2B5EF4-FFF2-40B4-BE49-F238E27FC236}">
-                <a16:creationId xmlns:a16="http://schemas.microsoft.com/office/drawing/2014/main" id="{C3789198-9771-4A7C-8890-4C5090D997CD}"/>
+                <a16:creationId xmlns:a16="http://schemas.microsoft.com/office/drawing/2014/main" id="{F387D139-0759-4E1E-BD58-A94655449F73}"/>
               </a:ext>
             </a:extLst>
           </p:cNvPr>
@@ -2548,7 +2548,7 @@
           <p:cNvPr id="4" name="">
             <a:extLst xmlns:a="http://schemas.openxmlformats.org/drawingml/2006/main">
               <a:ext uri="{FF2B5EF4-FFF2-40B4-BE49-F238E27FC236}">
-                <a16:creationId xmlns:a16="http://schemas.microsoft.com/office/drawing/2014/main" id="{F5EEF31C-7D35-4725-9AA9-5780ECFE1227}"/>
+                <a16:creationId xmlns:a16="http://schemas.microsoft.com/office/drawing/2014/main" id="{F2C727AE-AB71-4AA7-B71A-20DEE37D1F2F}"/>
               </a:ext>
             </a:extLst>
           </p:cNvPr>
@@ -2605,7 +2605,7 @@
           <p:cNvPr id="5" name="">
             <a:extLst xmlns:a="http://schemas.openxmlformats.org/drawingml/2006/main">
               <a:ext uri="{FF2B5EF4-FFF2-40B4-BE49-F238E27FC236}">
-                <a16:creationId xmlns:a16="http://schemas.microsoft.com/office/drawing/2014/main" id="{A7FD1E50-1E5B-4F5B-9842-3A328CE16D56}"/>
+                <a16:creationId xmlns:a16="http://schemas.microsoft.com/office/drawing/2014/main" id="{3EF8E993-B85B-40BB-BDB2-6EF22AF5E4D8}"/>
               </a:ext>
             </a:extLst>
           </p:cNvPr>
@@ -2662,7 +2662,7 @@
           <p:cNvPr id="6" name="">
             <a:extLst xmlns:a="http://schemas.openxmlformats.org/drawingml/2006/main">
               <a:ext uri="{FF2B5EF4-FFF2-40B4-BE49-F238E27FC236}">
-                <a16:creationId xmlns:a16="http://schemas.microsoft.com/office/drawing/2014/main" id="{26C67575-DE1E-4C5F-B5FA-C9B66CFBBD91}"/>
+                <a16:creationId xmlns:a16="http://schemas.microsoft.com/office/drawing/2014/main" id="{631491D1-730D-425D-BA2D-50928C5E8857}"/>
               </a:ext>
             </a:extLst>
           </p:cNvPr>
@@ -2719,7 +2719,7 @@
           <p:cNvPr id="7" name="">
             <a:extLst xmlns:a="http://schemas.openxmlformats.org/drawingml/2006/main">
               <a:ext uri="{FF2B5EF4-FFF2-40B4-BE49-F238E27FC236}">
-                <a16:creationId xmlns:a16="http://schemas.microsoft.com/office/drawing/2014/main" id="{6A8E9D58-3C86-4DC0-B329-8DEE18DE827C}"/>
+                <a16:creationId xmlns:a16="http://schemas.microsoft.com/office/drawing/2014/main" id="{1158BD10-E63A-412F-8E66-F808378E9EAE}"/>
               </a:ext>
             </a:extLst>
           </p:cNvPr>
@@ -2751,7 +2751,7 @@
           <p:cNvPr id="8" name="">
             <a:extLst xmlns:a="http://schemas.openxmlformats.org/drawingml/2006/main">
               <a:ext uri="{FF2B5EF4-FFF2-40B4-BE49-F238E27FC236}">
-                <a16:creationId xmlns:a16="http://schemas.microsoft.com/office/drawing/2014/main" id="{8679C5DE-81B5-415A-AF29-642564AAA11B}"/>
+                <a16:creationId xmlns:a16="http://schemas.microsoft.com/office/drawing/2014/main" id="{BC8C796F-E9F3-4BCF-AD45-ADB53142C5BD}"/>
               </a:ext>
             </a:extLst>
           </p:cNvPr>
@@ -2808,7 +2808,7 @@
           <p:cNvPr id="9" name="">
             <a:extLst xmlns:a="http://schemas.openxmlformats.org/drawingml/2006/main">
               <a:ext uri="{FF2B5EF4-FFF2-40B4-BE49-F238E27FC236}">
-                <a16:creationId xmlns:a16="http://schemas.microsoft.com/office/drawing/2014/main" id="{50E31B99-CD38-42FD-908B-FEF908FF8495}"/>
+                <a16:creationId xmlns:a16="http://schemas.microsoft.com/office/drawing/2014/main" id="{9433C622-84FC-470F-B5BE-9C7AC33DE391}"/>
               </a:ext>
             </a:extLst>
           </p:cNvPr>
@@ -2865,7 +2865,7 @@
           <p:cNvPr id="10" name="">
             <a:extLst xmlns:a="http://schemas.openxmlformats.org/drawingml/2006/main">
               <a:ext uri="{FF2B5EF4-FFF2-40B4-BE49-F238E27FC236}">
-                <a16:creationId xmlns:a16="http://schemas.microsoft.com/office/drawing/2014/main" id="{85DBF863-F742-44F2-9467-66B14A92E94A}"/>
+                <a16:creationId xmlns:a16="http://schemas.microsoft.com/office/drawing/2014/main" id="{E760FFC4-D2A3-472F-8CFB-36373E8D02CC}"/>
               </a:ext>
             </a:extLst>
           </p:cNvPr>
@@ -2922,7 +2922,7 @@
           <p:cNvPr id="11" name="">
             <a:extLst xmlns:a="http://schemas.openxmlformats.org/drawingml/2006/main">
               <a:ext uri="{FF2B5EF4-FFF2-40B4-BE49-F238E27FC236}">
-                <a16:creationId xmlns:a16="http://schemas.microsoft.com/office/drawing/2014/main" id="{065873A3-1DAB-4648-8801-0ED91DAA1B9C}"/>
+                <a16:creationId xmlns:a16="http://schemas.microsoft.com/office/drawing/2014/main" id="{C107FA95-B883-46FF-91E8-D1DA7B734DBC}"/>
               </a:ext>
             </a:extLst>
           </p:cNvPr>
@@ -2979,7 +2979,7 @@
           <p:cNvPr id="12" name="">
             <a:extLst xmlns:a="http://schemas.openxmlformats.org/drawingml/2006/main">
               <a:ext uri="{FF2B5EF4-FFF2-40B4-BE49-F238E27FC236}">
-                <a16:creationId xmlns:a16="http://schemas.microsoft.com/office/drawing/2014/main" id="{B8DB4363-8483-45F4-8B85-1627C94D84C5}"/>
+                <a16:creationId xmlns:a16="http://schemas.microsoft.com/office/drawing/2014/main" id="{891E02D2-376E-4BA2-8F1D-449D1CE04DF6}"/>
               </a:ext>
             </a:extLst>
           </p:cNvPr>
@@ -3036,7 +3036,7 @@
           <p:cNvPr id="13" name="">
             <a:extLst xmlns:a="http://schemas.openxmlformats.org/drawingml/2006/main">
               <a:ext uri="{FF2B5EF4-FFF2-40B4-BE49-F238E27FC236}">
-                <a16:creationId xmlns:a16="http://schemas.microsoft.com/office/drawing/2014/main" id="{0ED48F99-0036-44BD-9B7B-2E5F6E2E02B2}"/>
+                <a16:creationId xmlns:a16="http://schemas.microsoft.com/office/drawing/2014/main" id="{2D1C20B6-7E96-41A8-B601-F57A118D3839}"/>
               </a:ext>
             </a:extLst>
           </p:cNvPr>
@@ -3091,7 +3091,7 @@
     </p:spTree>
     <p:extLst>
       <p:ext uri="{BB962C8B-B14F-4D97-AF65-F5344CB8AC3E}">
-        <p14:creationId xmlns:p14="http://schemas.microsoft.com/office/powerpoint/2010/main" val="600289423"/>
+        <p14:creationId xmlns:p14="http://schemas.microsoft.com/office/powerpoint/2010/main" val="1317662468"/>
       </p:ext>
     </p:extLst>
   </p:cSld>
@@ -3292,7 +3292,7 @@
           <p:cNvPr id="19" name="">
             <a:extLst xmlns:a="http://schemas.openxmlformats.org/drawingml/2006/main">
               <a:ext uri="{FF2B5EF4-FFF2-40B4-BE49-F238E27FC236}">
-                <a16:creationId xmlns:a16="http://schemas.microsoft.com/office/drawing/2014/main" id="{6FBE1694-0BDD-4D65-A2BF-5D812F4F707F}"/>
+                <a16:creationId xmlns:a16="http://schemas.microsoft.com/office/drawing/2014/main" id="{67E04BC4-B1C2-4C25-A610-BA9C653915E4}"/>
               </a:ext>
             </a:extLst>
           </p:cNvPr>
@@ -3324,7 +3324,7 @@
           <p:cNvPr id="2" name="">
             <a:extLst xmlns:a="http://schemas.openxmlformats.org/drawingml/2006/main">
               <a:ext uri="{FF2B5EF4-FFF2-40B4-BE49-F238E27FC236}">
-                <a16:creationId xmlns:a16="http://schemas.microsoft.com/office/drawing/2014/main" id="{BC84EE91-E428-43AD-8E6B-5E2AF68E2667}"/>
+                <a16:creationId xmlns:a16="http://schemas.microsoft.com/office/drawing/2014/main" id="{A9D07040-D597-4BFE-A431-395E477FD137}"/>
               </a:ext>
             </a:extLst>
           </p:cNvPr>
@@ -3381,7 +3381,7 @@
           <p:cNvPr id="3" name="">
             <a:extLst xmlns:a="http://schemas.openxmlformats.org/drawingml/2006/main">
               <a:ext uri="{FF2B5EF4-FFF2-40B4-BE49-F238E27FC236}">
-                <a16:creationId xmlns:a16="http://schemas.microsoft.com/office/drawing/2014/main" id="{7E22E747-2A2B-458F-8BF0-47B18B1F7F55}"/>
+                <a16:creationId xmlns:a16="http://schemas.microsoft.com/office/drawing/2014/main" id="{456F9293-5716-421D-B632-79E41FE2ECB5}"/>
               </a:ext>
             </a:extLst>
           </p:cNvPr>
@@ -3413,7 +3413,7 @@
           <p:cNvPr id="4" name="">
             <a:extLst xmlns:a="http://schemas.openxmlformats.org/drawingml/2006/main">
               <a:ext uri="{FF2B5EF4-FFF2-40B4-BE49-F238E27FC236}">
-                <a16:creationId xmlns:a16="http://schemas.microsoft.com/office/drawing/2014/main" id="{10606609-FF8C-4D9C-A635-92EB6D80A501}"/>
+                <a16:creationId xmlns:a16="http://schemas.microsoft.com/office/drawing/2014/main" id="{C9129E25-DDB7-478D-9D58-4A465B231F4C}"/>
               </a:ext>
             </a:extLst>
           </p:cNvPr>
@@ -3470,7 +3470,7 @@
           <p:cNvPr id="5" name="">
             <a:extLst xmlns:a="http://schemas.openxmlformats.org/drawingml/2006/main">
               <a:ext uri="{FF2B5EF4-FFF2-40B4-BE49-F238E27FC236}">
-                <a16:creationId xmlns:a16="http://schemas.microsoft.com/office/drawing/2014/main" id="{3F4327D9-3949-48EC-9BA7-23538E28F734}"/>
+                <a16:creationId xmlns:a16="http://schemas.microsoft.com/office/drawing/2014/main" id="{985EB56E-3A70-416B-9CFC-C52284222C67}"/>
               </a:ext>
             </a:extLst>
           </p:cNvPr>
@@ -3527,7 +3527,7 @@
           <p:cNvPr id="6" name="">
             <a:extLst xmlns:a="http://schemas.openxmlformats.org/drawingml/2006/main">
               <a:ext uri="{FF2B5EF4-FFF2-40B4-BE49-F238E27FC236}">
-                <a16:creationId xmlns:a16="http://schemas.microsoft.com/office/drawing/2014/main" id="{F144959E-07CA-44B6-9154-58949FE307E1}"/>
+                <a16:creationId xmlns:a16="http://schemas.microsoft.com/office/drawing/2014/main" id="{84F920F3-A017-482F-B758-989F8C245621}"/>
               </a:ext>
             </a:extLst>
           </p:cNvPr>
@@ -3584,7 +3584,7 @@
           <p:cNvPr id="7" name="">
             <a:extLst xmlns:a="http://schemas.openxmlformats.org/drawingml/2006/main">
               <a:ext uri="{FF2B5EF4-FFF2-40B4-BE49-F238E27FC236}">
-                <a16:creationId xmlns:a16="http://schemas.microsoft.com/office/drawing/2014/main" id="{0DFFF2D0-99C9-4ECB-A9A8-3CD2EAB99CF2}"/>
+                <a16:creationId xmlns:a16="http://schemas.microsoft.com/office/drawing/2014/main" id="{4F888EC7-B56A-4AC2-8058-728D4E5F3A40}"/>
               </a:ext>
             </a:extLst>
           </p:cNvPr>
@@ -3616,7 +3616,7 @@
           <p:cNvPr id="8" name="">
             <a:extLst xmlns:a="http://schemas.openxmlformats.org/drawingml/2006/main">
               <a:ext uri="{FF2B5EF4-FFF2-40B4-BE49-F238E27FC236}">
-                <a16:creationId xmlns:a16="http://schemas.microsoft.com/office/drawing/2014/main" id="{58E26C14-1671-42C6-B4E0-FED58F8BDE6A}"/>
+                <a16:creationId xmlns:a16="http://schemas.microsoft.com/office/drawing/2014/main" id="{88D0ED54-358B-4754-BB42-5AB0C80A7EB7}"/>
               </a:ext>
             </a:extLst>
           </p:cNvPr>
@@ -3673,7 +3673,7 @@
           <p:cNvPr id="9" name="">
             <a:extLst xmlns:a="http://schemas.openxmlformats.org/drawingml/2006/main">
               <a:ext uri="{FF2B5EF4-FFF2-40B4-BE49-F238E27FC236}">
-                <a16:creationId xmlns:a16="http://schemas.microsoft.com/office/drawing/2014/main" id="{962D6F1A-682F-476D-AC1B-042D1D00D99F}"/>
+                <a16:creationId xmlns:a16="http://schemas.microsoft.com/office/drawing/2014/main" id="{FA2EB48C-7335-448D-A3A6-BC83BCEB33FC}"/>
               </a:ext>
             </a:extLst>
           </p:cNvPr>
@@ -3730,7 +3730,7 @@
           <p:cNvPr id="10" name="">
             <a:extLst xmlns:a="http://schemas.openxmlformats.org/drawingml/2006/main">
               <a:ext uri="{FF2B5EF4-FFF2-40B4-BE49-F238E27FC236}">
-                <a16:creationId xmlns:a16="http://schemas.microsoft.com/office/drawing/2014/main" id="{84FBB7BD-F95C-4084-8037-92F2531BC0BC}"/>
+                <a16:creationId xmlns:a16="http://schemas.microsoft.com/office/drawing/2014/main" id="{DA7898B6-3775-4067-9DE3-816FD43536CA}"/>
               </a:ext>
             </a:extLst>
           </p:cNvPr>
@@ -3787,7 +3787,7 @@
           <p:cNvPr id="11" name="">
             <a:extLst xmlns:a="http://schemas.openxmlformats.org/drawingml/2006/main">
               <a:ext uri="{FF2B5EF4-FFF2-40B4-BE49-F238E27FC236}">
-                <a16:creationId xmlns:a16="http://schemas.microsoft.com/office/drawing/2014/main" id="{A0F65919-C508-4A97-AEFD-87C61D8C3D9D}"/>
+                <a16:creationId xmlns:a16="http://schemas.microsoft.com/office/drawing/2014/main" id="{9062FED5-1965-4D33-A05E-F734BD0D59BA}"/>
               </a:ext>
             </a:extLst>
           </p:cNvPr>
@@ -3821,7 +3821,7 @@
           <p:cNvPr id="12" name="">
             <a:extLst xmlns:a="http://schemas.openxmlformats.org/drawingml/2006/main">
               <a:ext uri="{FF2B5EF4-FFF2-40B4-BE49-F238E27FC236}">
-                <a16:creationId xmlns:a16="http://schemas.microsoft.com/office/drawing/2014/main" id="{EDE04ADC-765A-4E60-BFB3-435AABAA6F8A}"/>
+                <a16:creationId xmlns:a16="http://schemas.microsoft.com/office/drawing/2014/main" id="{FE9BBCB1-39A3-4C1D-A6C2-9821E388D242}"/>
               </a:ext>
             </a:extLst>
           </p:cNvPr>
@@ -3878,7 +3878,7 @@
           <p:cNvPr id="13" name="">
             <a:extLst xmlns:a="http://schemas.openxmlformats.org/drawingml/2006/main">
               <a:ext uri="{FF2B5EF4-FFF2-40B4-BE49-F238E27FC236}">
-                <a16:creationId xmlns:a16="http://schemas.microsoft.com/office/drawing/2014/main" id="{C18BAA72-3F3C-4C50-B17F-BD4F519CC182}"/>
+                <a16:creationId xmlns:a16="http://schemas.microsoft.com/office/drawing/2014/main" id="{8AED2168-B185-4D20-99FD-11E613B717BA}"/>
               </a:ext>
             </a:extLst>
           </p:cNvPr>
@@ -3935,7 +3935,7 @@
           <p:cNvPr id="14" name="">
             <a:extLst xmlns:a="http://schemas.openxmlformats.org/drawingml/2006/main">
               <a:ext uri="{FF2B5EF4-FFF2-40B4-BE49-F238E27FC236}">
-                <a16:creationId xmlns:a16="http://schemas.microsoft.com/office/drawing/2014/main" id="{ABB644A4-C149-4ACB-9779-4961FD7CAEE5}"/>
+                <a16:creationId xmlns:a16="http://schemas.microsoft.com/office/drawing/2014/main" id="{B5264700-9A52-4312-9382-8F4EB13C1A02}"/>
               </a:ext>
             </a:extLst>
           </p:cNvPr>
@@ -3992,7 +3992,7 @@
           <p:cNvPr id="15" name="">
             <a:extLst xmlns:a="http://schemas.openxmlformats.org/drawingml/2006/main">
               <a:ext uri="{FF2B5EF4-FFF2-40B4-BE49-F238E27FC236}">
-                <a16:creationId xmlns:a16="http://schemas.microsoft.com/office/drawing/2014/main" id="{3F1C4B3C-8894-4D77-B44E-6861F17153CF}"/>
+                <a16:creationId xmlns:a16="http://schemas.microsoft.com/office/drawing/2014/main" id="{3A3F72D8-9CE5-4E0B-AE0C-AC08B47EC151}"/>
               </a:ext>
             </a:extLst>
           </p:cNvPr>
@@ -4026,7 +4026,7 @@
           <p:cNvPr id="16" name="">
             <a:extLst xmlns:a="http://schemas.openxmlformats.org/drawingml/2006/main">
               <a:ext uri="{FF2B5EF4-FFF2-40B4-BE49-F238E27FC236}">
-                <a16:creationId xmlns:a16="http://schemas.microsoft.com/office/drawing/2014/main" id="{0AE0BB2F-022D-423A-9F4F-E0F40DB73B63}"/>
+                <a16:creationId xmlns:a16="http://schemas.microsoft.com/office/drawing/2014/main" id="{6C507624-7484-404B-B707-11132B3719A1}"/>
               </a:ext>
             </a:extLst>
           </p:cNvPr>
@@ -4083,7 +4083,7 @@
           <p:cNvPr id="17" name="">
             <a:extLst xmlns:a="http://schemas.openxmlformats.org/drawingml/2006/main">
               <a:ext uri="{FF2B5EF4-FFF2-40B4-BE49-F238E27FC236}">
-                <a16:creationId xmlns:a16="http://schemas.microsoft.com/office/drawing/2014/main" id="{5BB3C5C2-EE60-4E5E-8E15-5E86B7CF9AC9}"/>
+                <a16:creationId xmlns:a16="http://schemas.microsoft.com/office/drawing/2014/main" id="{F715A7B0-B7ED-45E6-AF2B-B99E668D2D14}"/>
               </a:ext>
             </a:extLst>
           </p:cNvPr>
@@ -4140,7 +4140,7 @@
           <p:cNvPr id="18" name="">
             <a:extLst xmlns:a="http://schemas.openxmlformats.org/drawingml/2006/main">
               <a:ext uri="{FF2B5EF4-FFF2-40B4-BE49-F238E27FC236}">
-                <a16:creationId xmlns:a16="http://schemas.microsoft.com/office/drawing/2014/main" id="{63E9DDFD-D603-4CA0-98F4-226E66489785}"/>
+                <a16:creationId xmlns:a16="http://schemas.microsoft.com/office/drawing/2014/main" id="{136045B5-0A11-42F7-B332-3CBDA89DB036}"/>
               </a:ext>
             </a:extLst>
           </p:cNvPr>
@@ -4195,7 +4195,7 @@
     </p:spTree>
     <p:extLst>
       <p:ext uri="{BB962C8B-B14F-4D97-AF65-F5344CB8AC3E}">
-        <p14:creationId xmlns:p14="http://schemas.microsoft.com/office/powerpoint/2010/main" val="77399679"/>
+        <p14:creationId xmlns:p14="http://schemas.microsoft.com/office/powerpoint/2010/main" val="1090101510"/>
       </p:ext>
     </p:extLst>
   </p:cSld>
@@ -4350,7 +4350,7 @@
           <p:cNvPr id="23" name="">
             <a:extLst xmlns:a="http://schemas.openxmlformats.org/drawingml/2006/main">
               <a:ext uri="{FF2B5EF4-FFF2-40B4-BE49-F238E27FC236}">
-                <a16:creationId xmlns:a16="http://schemas.microsoft.com/office/drawing/2014/main" id="{4AEFBFFD-2726-466B-B5E0-BBE444D13ED9}"/>
+                <a16:creationId xmlns:a16="http://schemas.microsoft.com/office/drawing/2014/main" id="{DFBF96E7-51A9-4F25-AADE-8EE2301B6F01}"/>
               </a:ext>
             </a:extLst>
           </p:cNvPr>
@@ -4382,7 +4382,7 @@
           <p:cNvPr id="2" name="">
             <a:extLst xmlns:a="http://schemas.openxmlformats.org/drawingml/2006/main">
               <a:ext uri="{FF2B5EF4-FFF2-40B4-BE49-F238E27FC236}">
-                <a16:creationId xmlns:a16="http://schemas.microsoft.com/office/drawing/2014/main" id="{4F578B40-F4E6-4B0C-BCA7-C9201BAC4921}"/>
+                <a16:creationId xmlns:a16="http://schemas.microsoft.com/office/drawing/2014/main" id="{776F843B-5AD9-4B87-A1BE-FDE35FFB1FAA}"/>
               </a:ext>
             </a:extLst>
           </p:cNvPr>
@@ -4439,7 +4439,7 @@
           <p:cNvPr id="3" name="">
             <a:extLst xmlns:a="http://schemas.openxmlformats.org/drawingml/2006/main">
               <a:ext uri="{FF2B5EF4-FFF2-40B4-BE49-F238E27FC236}">
-                <a16:creationId xmlns:a16="http://schemas.microsoft.com/office/drawing/2014/main" id="{15D68B0A-D072-4E9A-AC15-D07FE3DC38C3}"/>
+                <a16:creationId xmlns:a16="http://schemas.microsoft.com/office/drawing/2014/main" id="{61C9F805-DC6D-48F6-834D-51587AB01B34}"/>
               </a:ext>
             </a:extLst>
           </p:cNvPr>
@@ -4471,7 +4471,7 @@
           <p:cNvPr id="4" name="">
             <a:extLst xmlns:a="http://schemas.openxmlformats.org/drawingml/2006/main">
               <a:ext uri="{FF2B5EF4-FFF2-40B4-BE49-F238E27FC236}">
-                <a16:creationId xmlns:a16="http://schemas.microsoft.com/office/drawing/2014/main" id="{7B48799B-05A8-43D4-8302-692FAB704125}"/>
+                <a16:creationId xmlns:a16="http://schemas.microsoft.com/office/drawing/2014/main" id="{A6AE445C-5A05-4922-ACBB-0FB46031B513}"/>
               </a:ext>
             </a:extLst>
           </p:cNvPr>
@@ -4528,7 +4528,7 @@
           <p:cNvPr id="5" name="">
             <a:extLst xmlns:a="http://schemas.openxmlformats.org/drawingml/2006/main">
               <a:ext uri="{FF2B5EF4-FFF2-40B4-BE49-F238E27FC236}">
-                <a16:creationId xmlns:a16="http://schemas.microsoft.com/office/drawing/2014/main" id="{3D84F916-68C2-4F46-8E6E-ECD06811FC8C}"/>
+                <a16:creationId xmlns:a16="http://schemas.microsoft.com/office/drawing/2014/main" id="{4047084B-289F-4EEC-BA78-33C15B485930}"/>
               </a:ext>
             </a:extLst>
           </p:cNvPr>
@@ -4585,7 +4585,7 @@
           <p:cNvPr id="6" name="">
             <a:extLst xmlns:a="http://schemas.openxmlformats.org/drawingml/2006/main">
               <a:ext uri="{FF2B5EF4-FFF2-40B4-BE49-F238E27FC236}">
-                <a16:creationId xmlns:a16="http://schemas.microsoft.com/office/drawing/2014/main" id="{F44DE93D-5085-4CF8-B0E0-70AD69634E74}"/>
+                <a16:creationId xmlns:a16="http://schemas.microsoft.com/office/drawing/2014/main" id="{8D749351-67CB-4224-BD2D-92B43EA3B1C6}"/>
               </a:ext>
             </a:extLst>
           </p:cNvPr>
@@ -4642,7 +4642,7 @@
           <p:cNvPr id="7" name="">
             <a:extLst xmlns:a="http://schemas.openxmlformats.org/drawingml/2006/main">
               <a:ext uri="{FF2B5EF4-FFF2-40B4-BE49-F238E27FC236}">
-                <a16:creationId xmlns:a16="http://schemas.microsoft.com/office/drawing/2014/main" id="{1E8739BD-7B59-49D8-9C2A-707ACD34280A}"/>
+                <a16:creationId xmlns:a16="http://schemas.microsoft.com/office/drawing/2014/main" id="{17988E84-684B-4E02-A946-238D443C4452}"/>
               </a:ext>
             </a:extLst>
           </p:cNvPr>
@@ -4674,7 +4674,7 @@
           <p:cNvPr id="8" name="">
             <a:extLst xmlns:a="http://schemas.openxmlformats.org/drawingml/2006/main">
               <a:ext uri="{FF2B5EF4-FFF2-40B4-BE49-F238E27FC236}">
-                <a16:creationId xmlns:a16="http://schemas.microsoft.com/office/drawing/2014/main" id="{E92A5637-8F9F-4B0E-B93A-7C9F505C9914}"/>
+                <a16:creationId xmlns:a16="http://schemas.microsoft.com/office/drawing/2014/main" id="{5EB8C5D7-7396-4F4E-AAFF-1939B16CAAD0}"/>
               </a:ext>
             </a:extLst>
           </p:cNvPr>
@@ -4731,7 +4731,7 @@
           <p:cNvPr id="9" name="">
             <a:extLst xmlns:a="http://schemas.openxmlformats.org/drawingml/2006/main">
               <a:ext uri="{FF2B5EF4-FFF2-40B4-BE49-F238E27FC236}">
-                <a16:creationId xmlns:a16="http://schemas.microsoft.com/office/drawing/2014/main" id="{4F977625-B4E3-409D-8D42-708516ECFA75}"/>
+                <a16:creationId xmlns:a16="http://schemas.microsoft.com/office/drawing/2014/main" id="{F6D16CCF-5251-4C84-BFD4-D38EC16067BA}"/>
               </a:ext>
             </a:extLst>
           </p:cNvPr>
@@ -4788,7 +4788,7 @@
           <p:cNvPr id="10" name="">
             <a:extLst xmlns:a="http://schemas.openxmlformats.org/drawingml/2006/main">
               <a:ext uri="{FF2B5EF4-FFF2-40B4-BE49-F238E27FC236}">
-                <a16:creationId xmlns:a16="http://schemas.microsoft.com/office/drawing/2014/main" id="{79042285-B6DB-4CB7-A774-C1D2418E57C2}"/>
+                <a16:creationId xmlns:a16="http://schemas.microsoft.com/office/drawing/2014/main" id="{DD09AC64-0AC7-455A-9E0E-06570C411DC1}"/>
               </a:ext>
             </a:extLst>
           </p:cNvPr>
@@ -4822,7 +4822,7 @@
           <p:cNvPr id="11" name="">
             <a:extLst xmlns:a="http://schemas.openxmlformats.org/drawingml/2006/main">
               <a:ext uri="{FF2B5EF4-FFF2-40B4-BE49-F238E27FC236}">
-                <a16:creationId xmlns:a16="http://schemas.microsoft.com/office/drawing/2014/main" id="{FF37BDF0-9A58-4251-8782-64EF9309DDBD}"/>
+                <a16:creationId xmlns:a16="http://schemas.microsoft.com/office/drawing/2014/main" id="{23A35E7A-AA3F-4A37-B1DF-33FDC3575E39}"/>
               </a:ext>
             </a:extLst>
           </p:cNvPr>
@@ -4854,7 +4854,7 @@
           <p:cNvPr id="12" name="">
             <a:extLst xmlns:a="http://schemas.openxmlformats.org/drawingml/2006/main">
               <a:ext uri="{FF2B5EF4-FFF2-40B4-BE49-F238E27FC236}">
-                <a16:creationId xmlns:a16="http://schemas.microsoft.com/office/drawing/2014/main" id="{3F344B1C-265B-410C-9A3E-9E86152C26F6}"/>
+                <a16:creationId xmlns:a16="http://schemas.microsoft.com/office/drawing/2014/main" id="{2F9DEE6C-3D3C-4BD4-96B0-8F4E50BCE044}"/>
               </a:ext>
             </a:extLst>
           </p:cNvPr>
@@ -4911,7 +4911,7 @@
           <p:cNvPr id="13" name="">
             <a:extLst xmlns:a="http://schemas.openxmlformats.org/drawingml/2006/main">
               <a:ext uri="{FF2B5EF4-FFF2-40B4-BE49-F238E27FC236}">
-                <a16:creationId xmlns:a16="http://schemas.microsoft.com/office/drawing/2014/main" id="{C1F91CBB-8FAD-4274-B6C1-CAC053460F93}"/>
+                <a16:creationId xmlns:a16="http://schemas.microsoft.com/office/drawing/2014/main" id="{42AD8C0E-0555-4962-BC8E-5E8C9A9A8759}"/>
               </a:ext>
             </a:extLst>
           </p:cNvPr>
@@ -4968,7 +4968,7 @@
           <p:cNvPr id="14" name="">
             <a:extLst xmlns:a="http://schemas.openxmlformats.org/drawingml/2006/main">
               <a:ext uri="{FF2B5EF4-FFF2-40B4-BE49-F238E27FC236}">
-                <a16:creationId xmlns:a16="http://schemas.microsoft.com/office/drawing/2014/main" id="{3E344D42-CB90-4DEB-AE31-EA23F2B572EC}"/>
+                <a16:creationId xmlns:a16="http://schemas.microsoft.com/office/drawing/2014/main" id="{FD33ED5A-34ED-4CF7-9FAA-C2E865FE3DDF}"/>
               </a:ext>
             </a:extLst>
           </p:cNvPr>
@@ -5002,7 +5002,7 @@
           <p:cNvPr id="15" name="">
             <a:extLst xmlns:a="http://schemas.openxmlformats.org/drawingml/2006/main">
               <a:ext uri="{FF2B5EF4-FFF2-40B4-BE49-F238E27FC236}">
-                <a16:creationId xmlns:a16="http://schemas.microsoft.com/office/drawing/2014/main" id="{F4F98CA5-5385-455A-A76D-F5D2F4FD081F}"/>
+                <a16:creationId xmlns:a16="http://schemas.microsoft.com/office/drawing/2014/main" id="{CDEC84A5-A718-4207-8B4D-1632EDA16C7C}"/>
               </a:ext>
             </a:extLst>
           </p:cNvPr>
@@ -5034,7 +5034,7 @@
           <p:cNvPr id="16" name="">
             <a:extLst xmlns:a="http://schemas.openxmlformats.org/drawingml/2006/main">
               <a:ext uri="{FF2B5EF4-FFF2-40B4-BE49-F238E27FC236}">
-                <a16:creationId xmlns:a16="http://schemas.microsoft.com/office/drawing/2014/main" id="{ED332012-5349-4A65-8CE8-B991C82E8951}"/>
+                <a16:creationId xmlns:a16="http://schemas.microsoft.com/office/drawing/2014/main" id="{2642F207-CEEE-42CE-A143-F8FE145E5D81}"/>
               </a:ext>
             </a:extLst>
           </p:cNvPr>
@@ -5091,7 +5091,7 @@
           <p:cNvPr id="17" name="">
             <a:extLst xmlns:a="http://schemas.openxmlformats.org/drawingml/2006/main">
               <a:ext uri="{FF2B5EF4-FFF2-40B4-BE49-F238E27FC236}">
-                <a16:creationId xmlns:a16="http://schemas.microsoft.com/office/drawing/2014/main" id="{2BC97BB2-FC0B-47A4-ADB9-B4D3275775C3}"/>
+                <a16:creationId xmlns:a16="http://schemas.microsoft.com/office/drawing/2014/main" id="{7482F553-E602-4433-8BC7-BF93C77A0FAE}"/>
               </a:ext>
             </a:extLst>
           </p:cNvPr>
@@ -5148,7 +5148,7 @@
           <p:cNvPr id="18" name="">
             <a:extLst xmlns:a="http://schemas.openxmlformats.org/drawingml/2006/main">
               <a:ext uri="{FF2B5EF4-FFF2-40B4-BE49-F238E27FC236}">
-                <a16:creationId xmlns:a16="http://schemas.microsoft.com/office/drawing/2014/main" id="{554D1D9E-2B35-498E-A690-1B7C73C8DFD5}"/>
+                <a16:creationId xmlns:a16="http://schemas.microsoft.com/office/drawing/2014/main" id="{CC34EE65-E3D9-45CB-AD71-E013EC50E720}"/>
               </a:ext>
             </a:extLst>
           </p:cNvPr>
@@ -5182,7 +5182,7 @@
           <p:cNvPr id="19" name="">
             <a:extLst xmlns:a="http://schemas.openxmlformats.org/drawingml/2006/main">
               <a:ext uri="{FF2B5EF4-FFF2-40B4-BE49-F238E27FC236}">
-                <a16:creationId xmlns:a16="http://schemas.microsoft.com/office/drawing/2014/main" id="{E567AAC8-355C-4B7B-A70C-F852D730CCCD}"/>
+                <a16:creationId xmlns:a16="http://schemas.microsoft.com/office/drawing/2014/main" id="{3441DCD3-64F2-48D6-A749-E76FE464CB83}"/>
               </a:ext>
             </a:extLst>
           </p:cNvPr>
@@ -5214,7 +5214,7 @@
           <p:cNvPr id="20" name="">
             <a:extLst xmlns:a="http://schemas.openxmlformats.org/drawingml/2006/main">
               <a:ext uri="{FF2B5EF4-FFF2-40B4-BE49-F238E27FC236}">
-                <a16:creationId xmlns:a16="http://schemas.microsoft.com/office/drawing/2014/main" id="{28F1D11E-DAF2-481D-99C2-F1335E5F828B}"/>
+                <a16:creationId xmlns:a16="http://schemas.microsoft.com/office/drawing/2014/main" id="{4F8E9CBB-697F-4C32-904A-EF86F52E8528}"/>
               </a:ext>
             </a:extLst>
           </p:cNvPr>
@@ -5271,7 +5271,7 @@
           <p:cNvPr id="21" name="">
             <a:extLst xmlns:a="http://schemas.openxmlformats.org/drawingml/2006/main">
               <a:ext uri="{FF2B5EF4-FFF2-40B4-BE49-F238E27FC236}">
-                <a16:creationId xmlns:a16="http://schemas.microsoft.com/office/drawing/2014/main" id="{02DA4AFF-D11F-4C16-A868-13A6348B0B94}"/>
+                <a16:creationId xmlns:a16="http://schemas.microsoft.com/office/drawing/2014/main" id="{0699CCD5-B900-42A3-8AF6-E2D96C74FF37}"/>
               </a:ext>
             </a:extLst>
           </p:cNvPr>
@@ -5328,7 +5328,7 @@
           <p:cNvPr id="22" name="">
             <a:extLst xmlns:a="http://schemas.openxmlformats.org/drawingml/2006/main">
               <a:ext uri="{FF2B5EF4-FFF2-40B4-BE49-F238E27FC236}">
-                <a16:creationId xmlns:a16="http://schemas.microsoft.com/office/drawing/2014/main" id="{C6B5E4E5-0014-4C81-B80B-3268FD7F8A39}"/>
+                <a16:creationId xmlns:a16="http://schemas.microsoft.com/office/drawing/2014/main" id="{2E217038-9F2D-4A12-B2DA-04D5468BFFDD}"/>
               </a:ext>
             </a:extLst>
           </p:cNvPr>
@@ -5383,7 +5383,7 @@
     </p:spTree>
     <p:extLst>
       <p:ext uri="{BB962C8B-B14F-4D97-AF65-F5344CB8AC3E}">
-        <p14:creationId xmlns:p14="http://schemas.microsoft.com/office/powerpoint/2010/main" val="271361646"/>
+        <p14:creationId xmlns:p14="http://schemas.microsoft.com/office/powerpoint/2010/main" val="1518171815"/>
       </p:ext>
     </p:extLst>
   </p:cSld>
@@ -5584,7 +5584,7 @@
           <p:cNvPr id="23" name="">
             <a:extLst xmlns:a="http://schemas.openxmlformats.org/drawingml/2006/main">
               <a:ext uri="{FF2B5EF4-FFF2-40B4-BE49-F238E27FC236}">
-                <a16:creationId xmlns:a16="http://schemas.microsoft.com/office/drawing/2014/main" id="{4B572B07-C2DF-44A8-846F-5DDD3477E4B5}"/>
+                <a16:creationId xmlns:a16="http://schemas.microsoft.com/office/drawing/2014/main" id="{2252AA32-3A1D-433B-BF6A-398EB99338C5}"/>
               </a:ext>
             </a:extLst>
           </p:cNvPr>
@@ -5616,7 +5616,7 @@
           <p:cNvPr id="2" name="">
             <a:extLst xmlns:a="http://schemas.openxmlformats.org/drawingml/2006/main">
               <a:ext uri="{FF2B5EF4-FFF2-40B4-BE49-F238E27FC236}">
-                <a16:creationId xmlns:a16="http://schemas.microsoft.com/office/drawing/2014/main" id="{F3099A18-4471-44A1-A9CD-DA7A7F0A6A8D}"/>
+                <a16:creationId xmlns:a16="http://schemas.microsoft.com/office/drawing/2014/main" id="{B8639D4A-8EBF-4CFB-A556-DFC19DF5C6C2}"/>
               </a:ext>
             </a:extLst>
           </p:cNvPr>
@@ -5673,7 +5673,7 @@
           <p:cNvPr id="3" name="">
             <a:extLst xmlns:a="http://schemas.openxmlformats.org/drawingml/2006/main">
               <a:ext uri="{FF2B5EF4-FFF2-40B4-BE49-F238E27FC236}">
-                <a16:creationId xmlns:a16="http://schemas.microsoft.com/office/drawing/2014/main" id="{8DCB39F2-EC46-43E8-9310-E9EB25138BF4}"/>
+                <a16:creationId xmlns:a16="http://schemas.microsoft.com/office/drawing/2014/main" id="{B805C91E-32ED-4752-B4F2-047940C8319A}"/>
               </a:ext>
             </a:extLst>
           </p:cNvPr>
@@ -5705,7 +5705,7 @@
           <p:cNvPr id="4" name="">
             <a:extLst xmlns:a="http://schemas.openxmlformats.org/drawingml/2006/main">
               <a:ext uri="{FF2B5EF4-FFF2-40B4-BE49-F238E27FC236}">
-                <a16:creationId xmlns:a16="http://schemas.microsoft.com/office/drawing/2014/main" id="{1AE22663-7A8C-4FA0-93E6-BE60A5C58C9A}"/>
+                <a16:creationId xmlns:a16="http://schemas.microsoft.com/office/drawing/2014/main" id="{8ECB0931-D2A9-49E0-B6C7-D251105D74F7}"/>
               </a:ext>
             </a:extLst>
           </p:cNvPr>
@@ -5762,7 +5762,7 @@
           <p:cNvPr id="5" name="">
             <a:extLst xmlns:a="http://schemas.openxmlformats.org/drawingml/2006/main">
               <a:ext uri="{FF2B5EF4-FFF2-40B4-BE49-F238E27FC236}">
-                <a16:creationId xmlns:a16="http://schemas.microsoft.com/office/drawing/2014/main" id="{E4B3A209-9084-4251-96A7-DDEC90C78521}"/>
+                <a16:creationId xmlns:a16="http://schemas.microsoft.com/office/drawing/2014/main" id="{22E1F84E-E3E0-430B-92D0-6C198043542E}"/>
               </a:ext>
             </a:extLst>
           </p:cNvPr>
@@ -5819,7 +5819,7 @@
           <p:cNvPr id="6" name="">
             <a:extLst xmlns:a="http://schemas.openxmlformats.org/drawingml/2006/main">
               <a:ext uri="{FF2B5EF4-FFF2-40B4-BE49-F238E27FC236}">
-                <a16:creationId xmlns:a16="http://schemas.microsoft.com/office/drawing/2014/main" id="{5D592C08-0C91-4E86-B178-94FF8069B257}"/>
+                <a16:creationId xmlns:a16="http://schemas.microsoft.com/office/drawing/2014/main" id="{583ED5F5-8937-4281-8D0E-E3D3EBE10BEE}"/>
               </a:ext>
             </a:extLst>
           </p:cNvPr>
@@ -5876,7 +5876,7 @@
           <p:cNvPr id="7" name="">
             <a:extLst xmlns:a="http://schemas.openxmlformats.org/drawingml/2006/main">
               <a:ext uri="{FF2B5EF4-FFF2-40B4-BE49-F238E27FC236}">
-                <a16:creationId xmlns:a16="http://schemas.microsoft.com/office/drawing/2014/main" id="{1BF42A25-DF2D-4EBB-A2E6-71F551BF38EF}"/>
+                <a16:creationId xmlns:a16="http://schemas.microsoft.com/office/drawing/2014/main" id="{8A96EBE7-9867-431B-837A-40A461A208AE}"/>
               </a:ext>
             </a:extLst>
           </p:cNvPr>
@@ -5908,7 +5908,7 @@
           <p:cNvPr id="8" name="">
             <a:extLst xmlns:a="http://schemas.openxmlformats.org/drawingml/2006/main">
               <a:ext uri="{FF2B5EF4-FFF2-40B4-BE49-F238E27FC236}">
-                <a16:creationId xmlns:a16="http://schemas.microsoft.com/office/drawing/2014/main" id="{1A1DC1CF-8F66-4BE9-BA0C-C6DD1A729596}"/>
+                <a16:creationId xmlns:a16="http://schemas.microsoft.com/office/drawing/2014/main" id="{84BDB076-B5AD-4474-BFAE-CDE97F9A3E04}"/>
               </a:ext>
             </a:extLst>
           </p:cNvPr>
@@ -5965,7 +5965,7 @@
           <p:cNvPr id="9" name="">
             <a:extLst xmlns:a="http://schemas.openxmlformats.org/drawingml/2006/main">
               <a:ext uri="{FF2B5EF4-FFF2-40B4-BE49-F238E27FC236}">
-                <a16:creationId xmlns:a16="http://schemas.microsoft.com/office/drawing/2014/main" id="{CE593FDA-189C-419B-8057-647E8F6A68D7}"/>
+                <a16:creationId xmlns:a16="http://schemas.microsoft.com/office/drawing/2014/main" id="{4E03CBC8-14A9-473D-8A80-186B0C72D521}"/>
               </a:ext>
             </a:extLst>
           </p:cNvPr>
@@ -6022,7 +6022,7 @@
           <p:cNvPr id="10" name="">
             <a:extLst xmlns:a="http://schemas.openxmlformats.org/drawingml/2006/main">
               <a:ext uri="{FF2B5EF4-FFF2-40B4-BE49-F238E27FC236}">
-                <a16:creationId xmlns:a16="http://schemas.microsoft.com/office/drawing/2014/main" id="{8A3ADD56-A6B1-4368-A4EC-F847B4DF0A3A}"/>
+                <a16:creationId xmlns:a16="http://schemas.microsoft.com/office/drawing/2014/main" id="{EE8324F9-964B-4A1B-8B76-0C6FFC41C64E}"/>
               </a:ext>
             </a:extLst>
           </p:cNvPr>
@@ -6056,7 +6056,7 @@
           <p:cNvPr id="11" name="">
             <a:extLst xmlns:a="http://schemas.openxmlformats.org/drawingml/2006/main">
               <a:ext uri="{FF2B5EF4-FFF2-40B4-BE49-F238E27FC236}">
-                <a16:creationId xmlns:a16="http://schemas.microsoft.com/office/drawing/2014/main" id="{9D42CFB1-AAA5-4411-9688-EEFF187FCEB0}"/>
+                <a16:creationId xmlns:a16="http://schemas.microsoft.com/office/drawing/2014/main" id="{6C12F817-D922-4EFB-993F-157874785CFD}"/>
               </a:ext>
             </a:extLst>
           </p:cNvPr>
@@ -6088,7 +6088,7 @@
           <p:cNvPr id="12" name="">
             <a:extLst xmlns:a="http://schemas.openxmlformats.org/drawingml/2006/main">
               <a:ext uri="{FF2B5EF4-FFF2-40B4-BE49-F238E27FC236}">
-                <a16:creationId xmlns:a16="http://schemas.microsoft.com/office/drawing/2014/main" id="{D89FB2B3-0CF3-4366-B341-FB208E4E7450}"/>
+                <a16:creationId xmlns:a16="http://schemas.microsoft.com/office/drawing/2014/main" id="{987860F5-177D-4EF9-9B0D-5200F6661AE2}"/>
               </a:ext>
             </a:extLst>
           </p:cNvPr>
@@ -6145,7 +6145,7 @@
           <p:cNvPr id="13" name="">
             <a:extLst xmlns:a="http://schemas.openxmlformats.org/drawingml/2006/main">
               <a:ext uri="{FF2B5EF4-FFF2-40B4-BE49-F238E27FC236}">
-                <a16:creationId xmlns:a16="http://schemas.microsoft.com/office/drawing/2014/main" id="{91E8FB68-B93F-4AA9-954B-FBC2F145AC28}"/>
+                <a16:creationId xmlns:a16="http://schemas.microsoft.com/office/drawing/2014/main" id="{76B6AC44-6E5C-484C-BC7B-D4870C83DE54}"/>
               </a:ext>
             </a:extLst>
           </p:cNvPr>
@@ -6202,7 +6202,7 @@
           <p:cNvPr id="14" name="">
             <a:extLst xmlns:a="http://schemas.openxmlformats.org/drawingml/2006/main">
               <a:ext uri="{FF2B5EF4-FFF2-40B4-BE49-F238E27FC236}">
-                <a16:creationId xmlns:a16="http://schemas.microsoft.com/office/drawing/2014/main" id="{D416E25C-F129-4227-8AF6-D702C9DCF116}"/>
+                <a16:creationId xmlns:a16="http://schemas.microsoft.com/office/drawing/2014/main" id="{281C23BE-1EF8-40A7-8A40-0A6A3114AD6B}"/>
               </a:ext>
             </a:extLst>
           </p:cNvPr>
@@ -6236,7 +6236,7 @@
           <p:cNvPr id="15" name="">
             <a:extLst xmlns:a="http://schemas.openxmlformats.org/drawingml/2006/main">
               <a:ext uri="{FF2B5EF4-FFF2-40B4-BE49-F238E27FC236}">
-                <a16:creationId xmlns:a16="http://schemas.microsoft.com/office/drawing/2014/main" id="{4066C995-F13E-450E-A659-BC2C04A0C95C}"/>
+                <a16:creationId xmlns:a16="http://schemas.microsoft.com/office/drawing/2014/main" id="{4AD1E616-F467-4DDC-BC01-5AD7E715AC0B}"/>
               </a:ext>
             </a:extLst>
           </p:cNvPr>
@@ -6268,7 +6268,7 @@
           <p:cNvPr id="16" name="">
             <a:extLst xmlns:a="http://schemas.openxmlformats.org/drawingml/2006/main">
               <a:ext uri="{FF2B5EF4-FFF2-40B4-BE49-F238E27FC236}">
-                <a16:creationId xmlns:a16="http://schemas.microsoft.com/office/drawing/2014/main" id="{480C8D61-CA8F-4DE0-9E5D-BDF11C1D2069}"/>
+                <a16:creationId xmlns:a16="http://schemas.microsoft.com/office/drawing/2014/main" id="{0E18DDEB-C3D9-443B-A160-591D0E3CAF9D}"/>
               </a:ext>
             </a:extLst>
           </p:cNvPr>
@@ -6325,7 +6325,7 @@
           <p:cNvPr id="17" name="">
             <a:extLst xmlns:a="http://schemas.openxmlformats.org/drawingml/2006/main">
               <a:ext uri="{FF2B5EF4-FFF2-40B4-BE49-F238E27FC236}">
-                <a16:creationId xmlns:a16="http://schemas.microsoft.com/office/drawing/2014/main" id="{4F141497-580E-4C3C-8B07-BA32C894968C}"/>
+                <a16:creationId xmlns:a16="http://schemas.microsoft.com/office/drawing/2014/main" id="{5852A9A7-C979-4BA6-8D2D-ED0E37BBE324}"/>
               </a:ext>
             </a:extLst>
           </p:cNvPr>
@@ -6382,7 +6382,7 @@
           <p:cNvPr id="18" name="">
             <a:extLst xmlns:a="http://schemas.openxmlformats.org/drawingml/2006/main">
               <a:ext uri="{FF2B5EF4-FFF2-40B4-BE49-F238E27FC236}">
-                <a16:creationId xmlns:a16="http://schemas.microsoft.com/office/drawing/2014/main" id="{DDB8DB6D-9915-4E53-8E68-03CC7F4284D1}"/>
+                <a16:creationId xmlns:a16="http://schemas.microsoft.com/office/drawing/2014/main" id="{6A08D9B4-BE01-4A06-8A6E-1CC04798B672}"/>
               </a:ext>
             </a:extLst>
           </p:cNvPr>
@@ -6416,7 +6416,7 @@
           <p:cNvPr id="19" name="">
             <a:extLst xmlns:a="http://schemas.openxmlformats.org/drawingml/2006/main">
               <a:ext uri="{FF2B5EF4-FFF2-40B4-BE49-F238E27FC236}">
-                <a16:creationId xmlns:a16="http://schemas.microsoft.com/office/drawing/2014/main" id="{8454B1A5-12F2-4B2A-ABA8-4004343C1035}"/>
+                <a16:creationId xmlns:a16="http://schemas.microsoft.com/office/drawing/2014/main" id="{6320E3DB-865B-4C5A-8EE8-C3CC128F921D}"/>
               </a:ext>
             </a:extLst>
           </p:cNvPr>
@@ -6448,7 +6448,7 @@
           <p:cNvPr id="20" name="">
             <a:extLst xmlns:a="http://schemas.openxmlformats.org/drawingml/2006/main">
               <a:ext uri="{FF2B5EF4-FFF2-40B4-BE49-F238E27FC236}">
-                <a16:creationId xmlns:a16="http://schemas.microsoft.com/office/drawing/2014/main" id="{2E865EC1-BADE-4329-8FE1-813BE156EFF3}"/>
+                <a16:creationId xmlns:a16="http://schemas.microsoft.com/office/drawing/2014/main" id="{91BF2471-F21F-4720-8BC8-04003B1BDB5C}"/>
               </a:ext>
             </a:extLst>
           </p:cNvPr>
@@ -6505,7 +6505,7 @@
           <p:cNvPr id="21" name="">
             <a:extLst xmlns:a="http://schemas.openxmlformats.org/drawingml/2006/main">
               <a:ext uri="{FF2B5EF4-FFF2-40B4-BE49-F238E27FC236}">
-                <a16:creationId xmlns:a16="http://schemas.microsoft.com/office/drawing/2014/main" id="{34A2CCD6-7643-4B05-B608-A221994CD9ED}"/>
+                <a16:creationId xmlns:a16="http://schemas.microsoft.com/office/drawing/2014/main" id="{55E357CC-007F-4B5C-89DF-B645752A5785}"/>
               </a:ext>
             </a:extLst>
           </p:cNvPr>
@@ -6562,7 +6562,7 @@
           <p:cNvPr id="22" name="">
             <a:extLst xmlns:a="http://schemas.openxmlformats.org/drawingml/2006/main">
               <a:ext uri="{FF2B5EF4-FFF2-40B4-BE49-F238E27FC236}">
-                <a16:creationId xmlns:a16="http://schemas.microsoft.com/office/drawing/2014/main" id="{01294AAB-1DDA-46E6-94E8-C5974DE733EA}"/>
+                <a16:creationId xmlns:a16="http://schemas.microsoft.com/office/drawing/2014/main" id="{D303FF57-2507-49EE-803B-18BC8EDBC5F2}"/>
               </a:ext>
             </a:extLst>
           </p:cNvPr>
@@ -6617,7 +6617,7 @@
     </p:spTree>
     <p:extLst>
       <p:ext uri="{BB962C8B-B14F-4D97-AF65-F5344CB8AC3E}">
-        <p14:creationId xmlns:p14="http://schemas.microsoft.com/office/powerpoint/2010/main" val="473280168"/>
+        <p14:creationId xmlns:p14="http://schemas.microsoft.com/office/powerpoint/2010/main" val="1483565748"/>
       </p:ext>
     </p:extLst>
   </p:cSld>
@@ -6818,7 +6818,7 @@
           <p:cNvPr id="16" name="">
             <a:extLst xmlns:a="http://schemas.openxmlformats.org/drawingml/2006/main">
               <a:ext uri="{FF2B5EF4-FFF2-40B4-BE49-F238E27FC236}">
-                <a16:creationId xmlns:a16="http://schemas.microsoft.com/office/drawing/2014/main" id="{2EA6C9BE-4A24-4D58-A496-62E40DC9EFC5}"/>
+                <a16:creationId xmlns:a16="http://schemas.microsoft.com/office/drawing/2014/main" id="{ADCABA8A-A549-4B00-BAEE-B0D4D0414146}"/>
               </a:ext>
             </a:extLst>
           </p:cNvPr>
@@ -6850,7 +6850,7 @@
           <p:cNvPr id="2" name="">
             <a:extLst xmlns:a="http://schemas.openxmlformats.org/drawingml/2006/main">
               <a:ext uri="{FF2B5EF4-FFF2-40B4-BE49-F238E27FC236}">
-                <a16:creationId xmlns:a16="http://schemas.microsoft.com/office/drawing/2014/main" id="{95267E76-1447-4FCB-B6ED-FEAAA6C5D91B}"/>
+                <a16:creationId xmlns:a16="http://schemas.microsoft.com/office/drawing/2014/main" id="{D9BD94CC-F212-4B5A-9F95-7468C53D94EB}"/>
               </a:ext>
             </a:extLst>
           </p:cNvPr>
@@ -6907,7 +6907,7 @@
           <p:cNvPr id="3" name="">
             <a:extLst xmlns:a="http://schemas.openxmlformats.org/drawingml/2006/main">
               <a:ext uri="{FF2B5EF4-FFF2-40B4-BE49-F238E27FC236}">
-                <a16:creationId xmlns:a16="http://schemas.microsoft.com/office/drawing/2014/main" id="{805B98AE-CEC1-4EEF-A7A2-962EE5A1F0F0}"/>
+                <a16:creationId xmlns:a16="http://schemas.microsoft.com/office/drawing/2014/main" id="{7DC21EB5-51CF-4A09-BD53-7ECAD5FA96AB}"/>
               </a:ext>
             </a:extLst>
           </p:cNvPr>
@@ -6939,7 +6939,7 @@
           <p:cNvPr id="4" name="">
             <a:extLst xmlns:a="http://schemas.openxmlformats.org/drawingml/2006/main">
               <a:ext uri="{FF2B5EF4-FFF2-40B4-BE49-F238E27FC236}">
-                <a16:creationId xmlns:a16="http://schemas.microsoft.com/office/drawing/2014/main" id="{445A2C7A-B9A3-4BB0-B1C6-E66DB56F58E4}"/>
+                <a16:creationId xmlns:a16="http://schemas.microsoft.com/office/drawing/2014/main" id="{45916D89-883C-4523-B5A3-0891F508C35F}"/>
               </a:ext>
             </a:extLst>
           </p:cNvPr>
@@ -6996,7 +6996,7 @@
           <p:cNvPr id="5" name="">
             <a:extLst xmlns:a="http://schemas.openxmlformats.org/drawingml/2006/main">
               <a:ext uri="{FF2B5EF4-FFF2-40B4-BE49-F238E27FC236}">
-                <a16:creationId xmlns:a16="http://schemas.microsoft.com/office/drawing/2014/main" id="{29FECCA8-8D17-4384-BD8F-2E4B5178E676}"/>
+                <a16:creationId xmlns:a16="http://schemas.microsoft.com/office/drawing/2014/main" id="{9BAA8505-C6FD-466A-970B-E4EF833E6610}"/>
               </a:ext>
             </a:extLst>
           </p:cNvPr>
@@ -7053,7 +7053,7 @@
           <p:cNvPr id="6" name="">
             <a:extLst xmlns:a="http://schemas.openxmlformats.org/drawingml/2006/main">
               <a:ext uri="{FF2B5EF4-FFF2-40B4-BE49-F238E27FC236}">
-                <a16:creationId xmlns:a16="http://schemas.microsoft.com/office/drawing/2014/main" id="{54002E91-D412-4D8E-8EC1-764B8C7FC2D0}"/>
+                <a16:creationId xmlns:a16="http://schemas.microsoft.com/office/drawing/2014/main" id="{AF4DCC78-E905-4B9D-8073-0C1379628358}"/>
               </a:ext>
             </a:extLst>
           </p:cNvPr>
@@ -7110,7 +7110,7 @@
           <p:cNvPr id="7" name="">
             <a:extLst xmlns:a="http://schemas.openxmlformats.org/drawingml/2006/main">
               <a:ext uri="{FF2B5EF4-FFF2-40B4-BE49-F238E27FC236}">
-                <a16:creationId xmlns:a16="http://schemas.microsoft.com/office/drawing/2014/main" id="{1C2B9734-708A-4C26-8FAD-69901D44727C}"/>
+                <a16:creationId xmlns:a16="http://schemas.microsoft.com/office/drawing/2014/main" id="{C705EBA2-4D6D-4567-B628-DE5D783A4A0A}"/>
               </a:ext>
             </a:extLst>
           </p:cNvPr>
@@ -7142,7 +7142,7 @@
           <p:cNvPr id="8" name="">
             <a:extLst xmlns:a="http://schemas.openxmlformats.org/drawingml/2006/main">
               <a:ext uri="{FF2B5EF4-FFF2-40B4-BE49-F238E27FC236}">
-                <a16:creationId xmlns:a16="http://schemas.microsoft.com/office/drawing/2014/main" id="{ACAC66E6-2FED-40B2-9F9F-98CE284412BE}"/>
+                <a16:creationId xmlns:a16="http://schemas.microsoft.com/office/drawing/2014/main" id="{B06D0535-77BC-4E57-AABE-227833CF8B26}"/>
               </a:ext>
             </a:extLst>
           </p:cNvPr>
@@ -7199,7 +7199,7 @@
           <p:cNvPr id="9" name="">
             <a:extLst xmlns:a="http://schemas.openxmlformats.org/drawingml/2006/main">
               <a:ext uri="{FF2B5EF4-FFF2-40B4-BE49-F238E27FC236}">
-                <a16:creationId xmlns:a16="http://schemas.microsoft.com/office/drawing/2014/main" id="{9A9E3BDD-7942-4E33-9C51-8417A385D773}"/>
+                <a16:creationId xmlns:a16="http://schemas.microsoft.com/office/drawing/2014/main" id="{01036A17-6852-4E56-9238-626588166DCE}"/>
               </a:ext>
             </a:extLst>
           </p:cNvPr>
@@ -7256,7 +7256,7 @@
           <p:cNvPr id="10" name="">
             <a:extLst xmlns:a="http://schemas.openxmlformats.org/drawingml/2006/main">
               <a:ext uri="{FF2B5EF4-FFF2-40B4-BE49-F238E27FC236}">
-                <a16:creationId xmlns:a16="http://schemas.microsoft.com/office/drawing/2014/main" id="{C26B28F7-DB32-4B23-8FC4-AA364862C495}"/>
+                <a16:creationId xmlns:a16="http://schemas.microsoft.com/office/drawing/2014/main" id="{FAC19141-1D97-4694-AEF5-B701D98BB444}"/>
               </a:ext>
             </a:extLst>
           </p:cNvPr>
@@ -7313,7 +7313,7 @@
           <p:cNvPr id="11" name="">
             <a:extLst xmlns:a="http://schemas.openxmlformats.org/drawingml/2006/main">
               <a:ext uri="{FF2B5EF4-FFF2-40B4-BE49-F238E27FC236}">
-                <a16:creationId xmlns:a16="http://schemas.microsoft.com/office/drawing/2014/main" id="{F8F9F434-3318-46FD-B9C8-8582D0FE5EE7}"/>
+                <a16:creationId xmlns:a16="http://schemas.microsoft.com/office/drawing/2014/main" id="{6C680F69-4344-458B-B8F6-C8A3B055E3FE}"/>
               </a:ext>
             </a:extLst>
           </p:cNvPr>
@@ -7345,7 +7345,7 @@
           <p:cNvPr id="12" name="">
             <a:extLst xmlns:a="http://schemas.openxmlformats.org/drawingml/2006/main">
               <a:ext uri="{FF2B5EF4-FFF2-40B4-BE49-F238E27FC236}">
-                <a16:creationId xmlns:a16="http://schemas.microsoft.com/office/drawing/2014/main" id="{5E99F5E7-A8CA-4BBF-9D93-9B366BA3351A}"/>
+                <a16:creationId xmlns:a16="http://schemas.microsoft.com/office/drawing/2014/main" id="{16B1C048-87C2-47DF-B9A9-32D3FBEAECB7}"/>
               </a:ext>
             </a:extLst>
           </p:cNvPr>
@@ -7402,7 +7402,7 @@
           <p:cNvPr id="13" name="">
             <a:extLst xmlns:a="http://schemas.openxmlformats.org/drawingml/2006/main">
               <a:ext uri="{FF2B5EF4-FFF2-40B4-BE49-F238E27FC236}">
-                <a16:creationId xmlns:a16="http://schemas.microsoft.com/office/drawing/2014/main" id="{FE0693F4-49E9-408C-99F5-F57F607A0EFE}"/>
+                <a16:creationId xmlns:a16="http://schemas.microsoft.com/office/drawing/2014/main" id="{08AD7B75-6472-47F2-97EA-E373E88757BF}"/>
               </a:ext>
             </a:extLst>
           </p:cNvPr>
@@ -7459,7 +7459,7 @@
           <p:cNvPr id="14" name="">
             <a:extLst xmlns:a="http://schemas.openxmlformats.org/drawingml/2006/main">
               <a:ext uri="{FF2B5EF4-FFF2-40B4-BE49-F238E27FC236}">
-                <a16:creationId xmlns:a16="http://schemas.microsoft.com/office/drawing/2014/main" id="{FE072EAD-E3C7-4FCA-9B8C-8057749CDBCA}"/>
+                <a16:creationId xmlns:a16="http://schemas.microsoft.com/office/drawing/2014/main" id="{A1A53E24-91AF-4A3C-8633-006D1991985B}"/>
               </a:ext>
             </a:extLst>
           </p:cNvPr>
@@ -7516,7 +7516,7 @@
           <p:cNvPr id="15" name="">
             <a:extLst xmlns:a="http://schemas.openxmlformats.org/drawingml/2006/main">
               <a:ext uri="{FF2B5EF4-FFF2-40B4-BE49-F238E27FC236}">
-                <a16:creationId xmlns:a16="http://schemas.microsoft.com/office/drawing/2014/main" id="{4A5AEC1F-E976-4B5A-B4E7-6609E1C7BE46}"/>
+                <a16:creationId xmlns:a16="http://schemas.microsoft.com/office/drawing/2014/main" id="{E16FD17F-590A-46A5-B3B8-6B33A43E2ECB}"/>
               </a:ext>
             </a:extLst>
           </p:cNvPr>
@@ -7571,7 +7571,7 @@
     </p:spTree>
     <p:extLst>
       <p:ext uri="{BB962C8B-B14F-4D97-AF65-F5344CB8AC3E}">
-        <p14:creationId xmlns:p14="http://schemas.microsoft.com/office/powerpoint/2010/main" val="1966715690"/>
+        <p14:creationId xmlns:p14="http://schemas.microsoft.com/office/powerpoint/2010/main" val="1870464273"/>
       </p:ext>
     </p:extLst>
   </p:cSld>
@@ -7769,10 +7769,10 @@
       </p:grpSpPr>
       <p:sp>
         <p:nvSpPr>
-          <p:cNvPr id="23" name="">
-            <a:extLst xmlns:a="http://schemas.openxmlformats.org/drawingml/2006/main">
-              <a:ext uri="{FF2B5EF4-FFF2-40B4-BE49-F238E27FC236}">
-                <a16:creationId xmlns:a16="http://schemas.microsoft.com/office/drawing/2014/main" id="{A116EC1E-DA67-497C-AAF2-3EDC38F88A76}"/>
+          <p:cNvPr id="26" name="">
+            <a:extLst xmlns:a="http://schemas.openxmlformats.org/drawingml/2006/main">
+              <a:ext uri="{FF2B5EF4-FFF2-40B4-BE49-F238E27FC236}">
+                <a16:creationId xmlns:a16="http://schemas.microsoft.com/office/drawing/2014/main" id="{1C6A129E-B6A5-4691-8077-2CC8343DFCE1}"/>
               </a:ext>
             </a:extLst>
           </p:cNvPr>
@@ -7804,7 +7804,7 @@
           <p:cNvPr id="2" name="">
             <a:extLst xmlns:a="http://schemas.openxmlformats.org/drawingml/2006/main">
               <a:ext uri="{FF2B5EF4-FFF2-40B4-BE49-F238E27FC236}">
-                <a16:creationId xmlns:a16="http://schemas.microsoft.com/office/drawing/2014/main" id="{65D3423E-DE80-4C49-A7FF-62C137C4556F}"/>
+                <a16:creationId xmlns:a16="http://schemas.microsoft.com/office/drawing/2014/main" id="{C3A3696E-26BA-413E-94CD-21B0774AF6C0}"/>
               </a:ext>
             </a:extLst>
           </p:cNvPr>
@@ -7861,7 +7861,7 @@
           <p:cNvPr id="3" name="">
             <a:extLst xmlns:a="http://schemas.openxmlformats.org/drawingml/2006/main">
               <a:ext uri="{FF2B5EF4-FFF2-40B4-BE49-F238E27FC236}">
-                <a16:creationId xmlns:a16="http://schemas.microsoft.com/office/drawing/2014/main" id="{AED1041B-E88E-4CFA-B207-6532C27EF2CE}"/>
+                <a16:creationId xmlns:a16="http://schemas.microsoft.com/office/drawing/2014/main" id="{26CDC283-E307-4767-9444-62FB37EE8ADF}"/>
               </a:ext>
             </a:extLst>
           </p:cNvPr>
@@ -7893,7 +7893,7 @@
           <p:cNvPr id="4" name="">
             <a:extLst xmlns:a="http://schemas.openxmlformats.org/drawingml/2006/main">
               <a:ext uri="{FF2B5EF4-FFF2-40B4-BE49-F238E27FC236}">
-                <a16:creationId xmlns:a16="http://schemas.microsoft.com/office/drawing/2014/main" id="{2E7122BA-B86F-4871-A200-9BD8278BEF90}"/>
+                <a16:creationId xmlns:a16="http://schemas.microsoft.com/office/drawing/2014/main" id="{4F6BF4D5-7795-462E-A845-6745A543DE34}"/>
               </a:ext>
             </a:extLst>
           </p:cNvPr>
@@ -7950,7 +7950,7 @@
           <p:cNvPr id="5" name="">
             <a:extLst xmlns:a="http://schemas.openxmlformats.org/drawingml/2006/main">
               <a:ext uri="{FF2B5EF4-FFF2-40B4-BE49-F238E27FC236}">
-                <a16:creationId xmlns:a16="http://schemas.microsoft.com/office/drawing/2014/main" id="{4B3AD694-80D8-4EBC-90A5-24D41B5969A3}"/>
+                <a16:creationId xmlns:a16="http://schemas.microsoft.com/office/drawing/2014/main" id="{22DF9E1C-3B32-4FDF-A2EC-FA440ABA83A6}"/>
               </a:ext>
             </a:extLst>
           </p:cNvPr>
@@ -8007,7 +8007,7 @@
           <p:cNvPr id="6" name="">
             <a:extLst xmlns:a="http://schemas.openxmlformats.org/drawingml/2006/main">
               <a:ext uri="{FF2B5EF4-FFF2-40B4-BE49-F238E27FC236}">
-                <a16:creationId xmlns:a16="http://schemas.microsoft.com/office/drawing/2014/main" id="{ACE0FA6F-FEC0-4C1D-9E66-933D7A7564EA}"/>
+                <a16:creationId xmlns:a16="http://schemas.microsoft.com/office/drawing/2014/main" id="{6BC3B572-D3EF-4F87-914A-B05606F41E12}"/>
               </a:ext>
             </a:extLst>
           </p:cNvPr>
@@ -8064,7 +8064,7 @@
           <p:cNvPr id="7" name="">
             <a:extLst xmlns:a="http://schemas.openxmlformats.org/drawingml/2006/main">
               <a:ext uri="{FF2B5EF4-FFF2-40B4-BE49-F238E27FC236}">
-                <a16:creationId xmlns:a16="http://schemas.microsoft.com/office/drawing/2014/main" id="{EA18702D-0CC7-410A-93EE-E2356C5CD5C5}"/>
+                <a16:creationId xmlns:a16="http://schemas.microsoft.com/office/drawing/2014/main" id="{E60949B8-F644-4646-8F34-CB52AD438088}"/>
               </a:ext>
             </a:extLst>
           </p:cNvPr>
@@ -8096,7 +8096,7 @@
           <p:cNvPr id="8" name="">
             <a:extLst xmlns:a="http://schemas.openxmlformats.org/drawingml/2006/main">
               <a:ext uri="{FF2B5EF4-FFF2-40B4-BE49-F238E27FC236}">
-                <a16:creationId xmlns:a16="http://schemas.microsoft.com/office/drawing/2014/main" id="{323D0067-952B-4DF3-A11A-13DDC507B0FC}"/>
+                <a16:creationId xmlns:a16="http://schemas.microsoft.com/office/drawing/2014/main" id="{52521AB9-0D80-4BF7-AD85-1E9B422A3320}"/>
               </a:ext>
             </a:extLst>
           </p:cNvPr>
@@ -8153,7 +8153,7 @@
           <p:cNvPr id="9" name="">
             <a:extLst xmlns:a="http://schemas.openxmlformats.org/drawingml/2006/main">
               <a:ext uri="{FF2B5EF4-FFF2-40B4-BE49-F238E27FC236}">
-                <a16:creationId xmlns:a16="http://schemas.microsoft.com/office/drawing/2014/main" id="{BDB5D753-C5BF-48E0-88E8-38F62E871CDE}"/>
+                <a16:creationId xmlns:a16="http://schemas.microsoft.com/office/drawing/2014/main" id="{427C5D77-A575-44F9-B175-F01E8CCF0161}"/>
               </a:ext>
             </a:extLst>
           </p:cNvPr>
@@ -8210,19 +8210,19 @@
           <p:cNvPr id="10" name="">
             <a:extLst xmlns:a="http://schemas.openxmlformats.org/drawingml/2006/main">
               <a:ext uri="{FF2B5EF4-FFF2-40B4-BE49-F238E27FC236}">
-                <a16:creationId xmlns:a16="http://schemas.microsoft.com/office/drawing/2014/main" id="{E2194752-91BA-424D-97B0-334EFB8A2281}"/>
-              </a:ext>
-            </a:extLst>
-          </p:cNvPr>
-          <p:cNvSpPr>
-            <a:spLocks xmlns:a="http://schemas.openxmlformats.org/drawingml/2006/main" noGrp="1"/>
-          </p:cNvSpPr>
-          <p:nvPr/>
-        </p:nvSpPr>
-        <p:spPr>
-          <a:xfrm xmlns:a="http://schemas.openxmlformats.org/drawingml/2006/main">
-            <a:off x="914400" y="1257300"/>
-            <a:ext cx="10363200" cy="781050"/>
+                <a16:creationId xmlns:a16="http://schemas.microsoft.com/office/drawing/2014/main" id="{A071AE6E-11F1-4867-B7E3-69F2C5ED61B5}"/>
+              </a:ext>
+            </a:extLst>
+          </p:cNvPr>
+          <p:cNvSpPr>
+            <a:spLocks xmlns:a="http://schemas.openxmlformats.org/drawingml/2006/main" noGrp="1"/>
+          </p:cNvSpPr>
+          <p:nvPr/>
+        </p:nvSpPr>
+        <p:spPr>
+          <a:xfrm xmlns:a="http://schemas.openxmlformats.org/drawingml/2006/main">
+            <a:off x="857250" y="1219200"/>
+            <a:ext cx="10477500" cy="742950"/>
           </a:xfrm>
           <a:prstGeom xmlns:a="http://schemas.openxmlformats.org/drawingml/2006/main" prst="rect">
             <a:avLst/>
@@ -8239,7 +8239,7 @@
           <a:lstStyle xmlns:a="http://schemas.openxmlformats.org/drawingml/2006/main"/>
           <a:p xmlns:a="http://schemas.openxmlformats.org/drawingml/2006/main">
             <a:pPr algn="ctr">
-              <a:defRPr sz="2175" b="1">
+              <a:defRPr sz="2100" b="1">
                 <a:solidFill>
                   <a:srgbClr val="17253A"/>
                 </a:solidFill>
@@ -8249,7 +8249,7 @@
               </a:defRPr>
             </a:pPr>
             <a:r>
-              <a:rPr sz="2175" b="1">
+              <a:rPr sz="2100" b="1">
                 <a:solidFill>
                   <a:srgbClr val="17253A"/>
                 </a:solidFill>
@@ -8267,28 +8267,30 @@
           <p:cNvPr id="11" name="">
             <a:extLst xmlns:a="http://schemas.openxmlformats.org/drawingml/2006/main">
               <a:ext uri="{FF2B5EF4-FFF2-40B4-BE49-F238E27FC236}">
-                <a16:creationId xmlns:a16="http://schemas.microsoft.com/office/drawing/2014/main" id="{A37D5F3B-ADEF-471D-961F-AA8DB95C549F}"/>
-              </a:ext>
-            </a:extLst>
-          </p:cNvPr>
-          <p:cNvSpPr>
-            <a:spLocks xmlns:a="http://schemas.openxmlformats.org/drawingml/2006/main" noGrp="1"/>
-          </p:cNvSpPr>
-          <p:nvPr/>
-        </p:nvSpPr>
-        <p:spPr>
-          <a:xfrm xmlns:a="http://schemas.openxmlformats.org/drawingml/2006/main">
-            <a:off x="1000125" y="2247900"/>
-            <a:ext cx="476250" cy="476250"/>
-          </a:xfrm>
-          <a:prstGeom xmlns:a="http://schemas.openxmlformats.org/drawingml/2006/main" prst="ellipse">
+                <a16:creationId xmlns:a16="http://schemas.microsoft.com/office/drawing/2014/main" id="{0E13D83C-B33C-46D4-A915-91DF3163687C}"/>
+              </a:ext>
+            </a:extLst>
+          </p:cNvPr>
+          <p:cNvSpPr>
+            <a:spLocks xmlns:a="http://schemas.openxmlformats.org/drawingml/2006/main" noGrp="1"/>
+          </p:cNvSpPr>
+          <p:nvPr/>
+        </p:nvSpPr>
+        <p:spPr>
+          <a:xfrm xmlns:a="http://schemas.openxmlformats.org/drawingml/2006/main">
+            <a:off x="971550" y="2124075"/>
+            <a:ext cx="38100" cy="3524250"/>
+          </a:xfrm>
+          <a:prstGeom xmlns:a="http://schemas.openxmlformats.org/drawingml/2006/main" prst="rect">
             <a:avLst/>
           </a:prstGeom>
           <a:solidFill xmlns:a="http://schemas.openxmlformats.org/drawingml/2006/main">
-            <a:srgbClr val="18324A"/>
+            <a:srgbClr val="2C6E73"/>
           </a:solidFill>
           <a:ln xmlns:a="http://schemas.openxmlformats.org/drawingml/2006/main" w="0">
-            <a:noFill/>
+            <a:solidFill>
+              <a:srgbClr val="2C6E73"/>
+            </a:solidFill>
           </a:ln>
         </p:spPr>
       </p:sp>
@@ -8297,19 +8299,19 @@
           <p:cNvPr id="12" name="">
             <a:extLst xmlns:a="http://schemas.openxmlformats.org/drawingml/2006/main">
               <a:ext uri="{FF2B5EF4-FFF2-40B4-BE49-F238E27FC236}">
-                <a16:creationId xmlns:a16="http://schemas.microsoft.com/office/drawing/2014/main" id="{8D5DE9E7-C3A2-4148-9FEC-0C5D729B5D5B}"/>
-              </a:ext>
-            </a:extLst>
-          </p:cNvPr>
-          <p:cNvSpPr>
-            <a:spLocks xmlns:a="http://schemas.openxmlformats.org/drawingml/2006/main" noGrp="1"/>
-          </p:cNvSpPr>
-          <p:nvPr/>
-        </p:nvSpPr>
-        <p:spPr>
-          <a:xfrm xmlns:a="http://schemas.openxmlformats.org/drawingml/2006/main">
-            <a:off x="1000125" y="2276475"/>
-            <a:ext cx="476250" cy="419100"/>
+                <a16:creationId xmlns:a16="http://schemas.microsoft.com/office/drawing/2014/main" id="{978C224C-CAE2-4933-8B6C-4220D8A42594}"/>
+              </a:ext>
+            </a:extLst>
+          </p:cNvPr>
+          <p:cNvSpPr>
+            <a:spLocks xmlns:a="http://schemas.openxmlformats.org/drawingml/2006/main" noGrp="1"/>
+          </p:cNvSpPr>
+          <p:nvPr/>
+        </p:nvSpPr>
+        <p:spPr>
+          <a:xfrm xmlns:a="http://schemas.openxmlformats.org/drawingml/2006/main">
+            <a:off x="1162050" y="2200275"/>
+            <a:ext cx="400050" cy="400050"/>
           </a:xfrm>
           <a:prstGeom xmlns:a="http://schemas.openxmlformats.org/drawingml/2006/main" prst="rect">
             <a:avLst/>
@@ -8326,9 +8328,9 @@
           <a:lstStyle xmlns:a="http://schemas.openxmlformats.org/drawingml/2006/main"/>
           <a:p xmlns:a="http://schemas.openxmlformats.org/drawingml/2006/main">
             <a:pPr algn="ctr">
-              <a:defRPr sz="1350" b="1">
-                <a:solidFill>
-                  <a:srgbClr val="FFFFFF"/>
+              <a:defRPr sz="1125" b="1">
+                <a:solidFill>
+                  <a:srgbClr val="2C6E73"/>
                 </a:solidFill>
                 <a:latin typeface="Arial"/>
                 <a:ea typeface="Arial"/>
@@ -8336,9 +8338,9 @@
               </a:defRPr>
             </a:pPr>
             <a:r>
-              <a:rPr sz="1350" b="1">
-                <a:solidFill>
-                  <a:srgbClr val="FFFFFF"/>
+              <a:rPr sz="1125" b="1">
+                <a:solidFill>
+                  <a:srgbClr val="2C6E73"/>
                 </a:solidFill>
                 <a:latin typeface="Arial"/>
                 <a:ea typeface="Arial"/>
@@ -8354,19 +8356,19 @@
           <p:cNvPr id="13" name="">
             <a:extLst xmlns:a="http://schemas.openxmlformats.org/drawingml/2006/main">
               <a:ext uri="{FF2B5EF4-FFF2-40B4-BE49-F238E27FC236}">
-                <a16:creationId xmlns:a16="http://schemas.microsoft.com/office/drawing/2014/main" id="{A4B961EA-711F-4CD7-B652-6A1E18E8A2C4}"/>
-              </a:ext>
-            </a:extLst>
-          </p:cNvPr>
-          <p:cNvSpPr>
-            <a:spLocks xmlns:a="http://schemas.openxmlformats.org/drawingml/2006/main" noGrp="1"/>
-          </p:cNvSpPr>
-          <p:nvPr/>
-        </p:nvSpPr>
-        <p:spPr>
-          <a:xfrm xmlns:a="http://schemas.openxmlformats.org/drawingml/2006/main">
-            <a:off x="1714500" y="2181225"/>
-            <a:ext cx="9429750" cy="609600"/>
+                <a16:creationId xmlns:a16="http://schemas.microsoft.com/office/drawing/2014/main" id="{85C5666D-D3D7-41E7-814D-4CFB1F22EBED}"/>
+              </a:ext>
+            </a:extLst>
+          </p:cNvPr>
+          <p:cNvSpPr>
+            <a:spLocks xmlns:a="http://schemas.openxmlformats.org/drawingml/2006/main" noGrp="1"/>
+          </p:cNvSpPr>
+          <p:nvPr/>
+        </p:nvSpPr>
+        <p:spPr>
+          <a:xfrm xmlns:a="http://schemas.openxmlformats.org/drawingml/2006/main">
+            <a:off x="1714500" y="2114550"/>
+            <a:ext cx="9525000" cy="638175"/>
           </a:xfrm>
           <a:prstGeom xmlns:a="http://schemas.openxmlformats.org/drawingml/2006/main" prst="rect">
             <a:avLst/>
@@ -8383,7 +8385,7 @@
           <a:lstStyle xmlns:a="http://schemas.openxmlformats.org/drawingml/2006/main"/>
           <a:p xmlns:a="http://schemas.openxmlformats.org/drawingml/2006/main">
             <a:pPr algn="l">
-              <a:defRPr sz="1500" b="0">
+              <a:defRPr sz="1575" b="0">
                 <a:solidFill>
                   <a:srgbClr val="17253A"/>
                 </a:solidFill>
@@ -8393,7 +8395,7 @@
               </a:defRPr>
             </a:pPr>
             <a:r>
-              <a:rPr sz="1500" b="0">
+              <a:rPr sz="1575" b="0">
                 <a:solidFill>
                   <a:srgbClr val="17253A"/>
                 </a:solidFill>
@@ -8401,7 +8403,7 @@
                 <a:ea typeface="Arial"/>
                 <a:cs typeface="Arial"/>
               </a:rPr>
-              <a:t>Identify the structure: Identify the goal, constraints and useful information before calculating.</a:t>
+              <a:t>15% of 240 = 36</a:t>
             </a:r>
           </a:p>
         </p:txBody>
@@ -8411,28 +8413,30 @@
           <p:cNvPr id="14" name="">
             <a:extLst xmlns:a="http://schemas.openxmlformats.org/drawingml/2006/main">
               <a:ext uri="{FF2B5EF4-FFF2-40B4-BE49-F238E27FC236}">
-                <a16:creationId xmlns:a16="http://schemas.microsoft.com/office/drawing/2014/main" id="{232A06E4-7768-441F-91AD-5E5526B94239}"/>
-              </a:ext>
-            </a:extLst>
-          </p:cNvPr>
-          <p:cNvSpPr>
-            <a:spLocks xmlns:a="http://schemas.openxmlformats.org/drawingml/2006/main" noGrp="1"/>
-          </p:cNvSpPr>
-          <p:nvPr/>
-        </p:nvSpPr>
-        <p:spPr>
-          <a:xfrm xmlns:a="http://schemas.openxmlformats.org/drawingml/2006/main">
-            <a:off x="1000125" y="2990850"/>
-            <a:ext cx="476250" cy="476250"/>
-          </a:xfrm>
-          <a:prstGeom xmlns:a="http://schemas.openxmlformats.org/drawingml/2006/main" prst="ellipse">
+                <a16:creationId xmlns:a16="http://schemas.microsoft.com/office/drawing/2014/main" id="{B34D7F87-A4A3-426C-A06D-6641DF6AE44C}"/>
+              </a:ext>
+            </a:extLst>
+          </p:cNvPr>
+          <p:cNvSpPr>
+            <a:spLocks xmlns:a="http://schemas.openxmlformats.org/drawingml/2006/main" noGrp="1"/>
+          </p:cNvSpPr>
+          <p:nvPr/>
+        </p:nvSpPr>
+        <p:spPr>
+          <a:xfrm xmlns:a="http://schemas.openxmlformats.org/drawingml/2006/main">
+            <a:off x="1714500" y="2771775"/>
+            <a:ext cx="9334500" cy="9525"/>
+          </a:xfrm>
+          <a:prstGeom xmlns:a="http://schemas.openxmlformats.org/drawingml/2006/main" prst="rect">
             <a:avLst/>
           </a:prstGeom>
           <a:solidFill xmlns:a="http://schemas.openxmlformats.org/drawingml/2006/main">
-            <a:srgbClr val="2C6E73"/>
+            <a:srgbClr val="D9E0E6"/>
           </a:solidFill>
           <a:ln xmlns:a="http://schemas.openxmlformats.org/drawingml/2006/main" w="0">
-            <a:noFill/>
+            <a:solidFill>
+              <a:srgbClr val="D9E0E6"/>
+            </a:solidFill>
           </a:ln>
         </p:spPr>
       </p:sp>
@@ -8441,19 +8445,19 @@
           <p:cNvPr id="15" name="">
             <a:extLst xmlns:a="http://schemas.openxmlformats.org/drawingml/2006/main">
               <a:ext uri="{FF2B5EF4-FFF2-40B4-BE49-F238E27FC236}">
-                <a16:creationId xmlns:a16="http://schemas.microsoft.com/office/drawing/2014/main" id="{1914712B-5B48-41C7-9D81-68458776C780}"/>
-              </a:ext>
-            </a:extLst>
-          </p:cNvPr>
-          <p:cNvSpPr>
-            <a:spLocks xmlns:a="http://schemas.openxmlformats.org/drawingml/2006/main" noGrp="1"/>
-          </p:cNvSpPr>
-          <p:nvPr/>
-        </p:nvSpPr>
-        <p:spPr>
-          <a:xfrm xmlns:a="http://schemas.openxmlformats.org/drawingml/2006/main">
-            <a:off x="1000125" y="3019425"/>
-            <a:ext cx="476250" cy="419100"/>
+                <a16:creationId xmlns:a16="http://schemas.microsoft.com/office/drawing/2014/main" id="{06EC0142-29A7-46D1-ADF2-F816F8BA7A61}"/>
+              </a:ext>
+            </a:extLst>
+          </p:cNvPr>
+          <p:cNvSpPr>
+            <a:spLocks xmlns:a="http://schemas.openxmlformats.org/drawingml/2006/main" noGrp="1"/>
+          </p:cNvSpPr>
+          <p:nvPr/>
+        </p:nvSpPr>
+        <p:spPr>
+          <a:xfrm xmlns:a="http://schemas.openxmlformats.org/drawingml/2006/main">
+            <a:off x="1162050" y="2905125"/>
+            <a:ext cx="400050" cy="400050"/>
           </a:xfrm>
           <a:prstGeom xmlns:a="http://schemas.openxmlformats.org/drawingml/2006/main" prst="rect">
             <a:avLst/>
@@ -8470,9 +8474,9 @@
           <a:lstStyle xmlns:a="http://schemas.openxmlformats.org/drawingml/2006/main"/>
           <a:p xmlns:a="http://schemas.openxmlformats.org/drawingml/2006/main">
             <a:pPr algn="ctr">
-              <a:defRPr sz="1350" b="1">
-                <a:solidFill>
-                  <a:srgbClr val="FFFFFF"/>
+              <a:defRPr sz="1125" b="1">
+                <a:solidFill>
+                  <a:srgbClr val="2C6E73"/>
                 </a:solidFill>
                 <a:latin typeface="Arial"/>
                 <a:ea typeface="Arial"/>
@@ -8480,9 +8484,9 @@
               </a:defRPr>
             </a:pPr>
             <a:r>
-              <a:rPr sz="1350" b="1">
-                <a:solidFill>
-                  <a:srgbClr val="FFFFFF"/>
+              <a:rPr sz="1125" b="1">
+                <a:solidFill>
+                  <a:srgbClr val="2C6E73"/>
                 </a:solidFill>
                 <a:latin typeface="Arial"/>
                 <a:ea typeface="Arial"/>
@@ -8498,19 +8502,19 @@
           <p:cNvPr id="16" name="">
             <a:extLst xmlns:a="http://schemas.openxmlformats.org/drawingml/2006/main">
               <a:ext uri="{FF2B5EF4-FFF2-40B4-BE49-F238E27FC236}">
-                <a16:creationId xmlns:a16="http://schemas.microsoft.com/office/drawing/2014/main" id="{E64B4EDE-873C-4B4F-9794-B1F6EE0215E1}"/>
-              </a:ext>
-            </a:extLst>
-          </p:cNvPr>
-          <p:cNvSpPr>
-            <a:spLocks xmlns:a="http://schemas.openxmlformats.org/drawingml/2006/main" noGrp="1"/>
-          </p:cNvSpPr>
-          <p:nvPr/>
-        </p:nvSpPr>
-        <p:spPr>
-          <a:xfrm xmlns:a="http://schemas.openxmlformats.org/drawingml/2006/main">
-            <a:off x="1714500" y="2924175"/>
-            <a:ext cx="9429750" cy="609600"/>
+                <a16:creationId xmlns:a16="http://schemas.microsoft.com/office/drawing/2014/main" id="{AD766716-35BF-40E2-A5C0-106210A3BF78}"/>
+              </a:ext>
+            </a:extLst>
+          </p:cNvPr>
+          <p:cNvSpPr>
+            <a:spLocks xmlns:a="http://schemas.openxmlformats.org/drawingml/2006/main" noGrp="1"/>
+          </p:cNvSpPr>
+          <p:nvPr/>
+        </p:nvSpPr>
+        <p:spPr>
+          <a:xfrm xmlns:a="http://schemas.openxmlformats.org/drawingml/2006/main">
+            <a:off x="1714500" y="2819400"/>
+            <a:ext cx="9525000" cy="638175"/>
           </a:xfrm>
           <a:prstGeom xmlns:a="http://schemas.openxmlformats.org/drawingml/2006/main" prst="rect">
             <a:avLst/>
@@ -8527,7 +8531,7 @@
           <a:lstStyle xmlns:a="http://schemas.openxmlformats.org/drawingml/2006/main"/>
           <a:p xmlns:a="http://schemas.openxmlformats.org/drawingml/2006/main">
             <a:pPr algn="l">
-              <a:defRPr sz="1500" b="0">
+              <a:defRPr sz="1575" b="0">
                 <a:solidFill>
                   <a:srgbClr val="17253A"/>
                 </a:solidFill>
@@ -8537,7 +8541,7 @@
               </a:defRPr>
             </a:pPr>
             <a:r>
-              <a:rPr sz="1500" b="0">
+              <a:rPr sz="1575" b="0">
                 <a:solidFill>
                   <a:srgbClr val="17253A"/>
                 </a:solidFill>
@@ -8545,7 +8549,7 @@
                 <a:ea typeface="Arial"/>
                 <a:cs typeface="Arial"/>
               </a:rPr>
-              <a:t>Set up the method: Choose a representation and complete each labelled step.</a:t>
+              <a:t>After increase: 240 + 36 = 276</a:t>
             </a:r>
           </a:p>
         </p:txBody>
@@ -8555,28 +8559,30 @@
           <p:cNvPr id="17" name="">
             <a:extLst xmlns:a="http://schemas.openxmlformats.org/drawingml/2006/main">
               <a:ext uri="{FF2B5EF4-FFF2-40B4-BE49-F238E27FC236}">
-                <a16:creationId xmlns:a16="http://schemas.microsoft.com/office/drawing/2014/main" id="{0F8AE049-22EE-4C41-9641-9666F8351E8A}"/>
-              </a:ext>
-            </a:extLst>
-          </p:cNvPr>
-          <p:cNvSpPr>
-            <a:spLocks xmlns:a="http://schemas.openxmlformats.org/drawingml/2006/main" noGrp="1"/>
-          </p:cNvSpPr>
-          <p:nvPr/>
-        </p:nvSpPr>
-        <p:spPr>
-          <a:xfrm xmlns:a="http://schemas.openxmlformats.org/drawingml/2006/main">
-            <a:off x="1000125" y="3733800"/>
-            <a:ext cx="476250" cy="476250"/>
-          </a:xfrm>
-          <a:prstGeom xmlns:a="http://schemas.openxmlformats.org/drawingml/2006/main" prst="ellipse">
+                <a16:creationId xmlns:a16="http://schemas.microsoft.com/office/drawing/2014/main" id="{9532CED1-94D6-4A13-BE4E-69C4C9F3B8F5}"/>
+              </a:ext>
+            </a:extLst>
+          </p:cNvPr>
+          <p:cNvSpPr>
+            <a:spLocks xmlns:a="http://schemas.openxmlformats.org/drawingml/2006/main" noGrp="1"/>
+          </p:cNvSpPr>
+          <p:nvPr/>
+        </p:nvSpPr>
+        <p:spPr>
+          <a:xfrm xmlns:a="http://schemas.openxmlformats.org/drawingml/2006/main">
+            <a:off x="1714500" y="3476625"/>
+            <a:ext cx="9334500" cy="9525"/>
+          </a:xfrm>
+          <a:prstGeom xmlns:a="http://schemas.openxmlformats.org/drawingml/2006/main" prst="rect">
             <a:avLst/>
           </a:prstGeom>
           <a:solidFill xmlns:a="http://schemas.openxmlformats.org/drawingml/2006/main">
-            <a:srgbClr val="2C6E73"/>
+            <a:srgbClr val="D9E0E6"/>
           </a:solidFill>
           <a:ln xmlns:a="http://schemas.openxmlformats.org/drawingml/2006/main" w="0">
-            <a:noFill/>
+            <a:solidFill>
+              <a:srgbClr val="D9E0E6"/>
+            </a:solidFill>
           </a:ln>
         </p:spPr>
       </p:sp>
@@ -8585,19 +8591,19 @@
           <p:cNvPr id="18" name="">
             <a:extLst xmlns:a="http://schemas.openxmlformats.org/drawingml/2006/main">
               <a:ext uri="{FF2B5EF4-FFF2-40B4-BE49-F238E27FC236}">
-                <a16:creationId xmlns:a16="http://schemas.microsoft.com/office/drawing/2014/main" id="{772677E3-C257-413F-B1E6-30E397D680FD}"/>
-              </a:ext>
-            </a:extLst>
-          </p:cNvPr>
-          <p:cNvSpPr>
-            <a:spLocks xmlns:a="http://schemas.openxmlformats.org/drawingml/2006/main" noGrp="1"/>
-          </p:cNvSpPr>
-          <p:nvPr/>
-        </p:nvSpPr>
-        <p:spPr>
-          <a:xfrm xmlns:a="http://schemas.openxmlformats.org/drawingml/2006/main">
-            <a:off x="1000125" y="3762375"/>
-            <a:ext cx="476250" cy="419100"/>
+                <a16:creationId xmlns:a16="http://schemas.microsoft.com/office/drawing/2014/main" id="{0F51A2C6-2858-46CA-A470-DE552A5FB872}"/>
+              </a:ext>
+            </a:extLst>
+          </p:cNvPr>
+          <p:cNvSpPr>
+            <a:spLocks xmlns:a="http://schemas.openxmlformats.org/drawingml/2006/main" noGrp="1"/>
+          </p:cNvSpPr>
+          <p:nvPr/>
+        </p:nvSpPr>
+        <p:spPr>
+          <a:xfrm xmlns:a="http://schemas.openxmlformats.org/drawingml/2006/main">
+            <a:off x="1162050" y="3609975"/>
+            <a:ext cx="400050" cy="400050"/>
           </a:xfrm>
           <a:prstGeom xmlns:a="http://schemas.openxmlformats.org/drawingml/2006/main" prst="rect">
             <a:avLst/>
@@ -8614,9 +8620,9 @@
           <a:lstStyle xmlns:a="http://schemas.openxmlformats.org/drawingml/2006/main"/>
           <a:p xmlns:a="http://schemas.openxmlformats.org/drawingml/2006/main">
             <a:pPr algn="ctr">
-              <a:defRPr sz="1350" b="1">
-                <a:solidFill>
-                  <a:srgbClr val="FFFFFF"/>
+              <a:defRPr sz="1125" b="1">
+                <a:solidFill>
+                  <a:srgbClr val="2C6E73"/>
                 </a:solidFill>
                 <a:latin typeface="Arial"/>
                 <a:ea typeface="Arial"/>
@@ -8624,9 +8630,9 @@
               </a:defRPr>
             </a:pPr>
             <a:r>
-              <a:rPr sz="1350" b="1">
-                <a:solidFill>
-                  <a:srgbClr val="FFFFFF"/>
+              <a:rPr sz="1125" b="1">
+                <a:solidFill>
+                  <a:srgbClr val="2C6E73"/>
                 </a:solidFill>
                 <a:latin typeface="Arial"/>
                 <a:ea typeface="Arial"/>
@@ -8642,19 +8648,19 @@
           <p:cNvPr id="19" name="">
             <a:extLst xmlns:a="http://schemas.openxmlformats.org/drawingml/2006/main">
               <a:ext uri="{FF2B5EF4-FFF2-40B4-BE49-F238E27FC236}">
-                <a16:creationId xmlns:a16="http://schemas.microsoft.com/office/drawing/2014/main" id="{6D2EF436-2CF1-47A8-8B74-4AB30DF53841}"/>
-              </a:ext>
-            </a:extLst>
-          </p:cNvPr>
-          <p:cNvSpPr>
-            <a:spLocks xmlns:a="http://schemas.openxmlformats.org/drawingml/2006/main" noGrp="1"/>
-          </p:cNvSpPr>
-          <p:nvPr/>
-        </p:nvSpPr>
-        <p:spPr>
-          <a:xfrm xmlns:a="http://schemas.openxmlformats.org/drawingml/2006/main">
-            <a:off x="1714500" y="3667125"/>
-            <a:ext cx="9429750" cy="609600"/>
+                <a16:creationId xmlns:a16="http://schemas.microsoft.com/office/drawing/2014/main" id="{C6FD7EA4-076D-4CD4-A9F1-0C5E383C31D9}"/>
+              </a:ext>
+            </a:extLst>
+          </p:cNvPr>
+          <p:cNvSpPr>
+            <a:spLocks xmlns:a="http://schemas.openxmlformats.org/drawingml/2006/main" noGrp="1"/>
+          </p:cNvSpPr>
+          <p:nvPr/>
+        </p:nvSpPr>
+        <p:spPr>
+          <a:xfrm xmlns:a="http://schemas.openxmlformats.org/drawingml/2006/main">
+            <a:off x="1714500" y="3524250"/>
+            <a:ext cx="9525000" cy="638175"/>
           </a:xfrm>
           <a:prstGeom xmlns:a="http://schemas.openxmlformats.org/drawingml/2006/main" prst="rect">
             <a:avLst/>
@@ -8671,7 +8677,7 @@
           <a:lstStyle xmlns:a="http://schemas.openxmlformats.org/drawingml/2006/main"/>
           <a:p xmlns:a="http://schemas.openxmlformats.org/drawingml/2006/main">
             <a:pPr algn="l">
-              <a:defRPr sz="1500" b="0">
+              <a:defRPr sz="1575" b="0">
                 <a:solidFill>
                   <a:srgbClr val="17253A"/>
                 </a:solidFill>
@@ -8681,7 +8687,7 @@
               </a:defRPr>
             </a:pPr>
             <a:r>
-              <a:rPr sz="1500" b="0">
+              <a:rPr sz="1575" b="0">
                 <a:solidFill>
                   <a:srgbClr val="17253A"/>
                 </a:solidFill>
@@ -8689,7 +8695,7 @@
                 <a:ea typeface="Arial"/>
                 <a:cs typeface="Arial"/>
               </a:rPr>
-              <a:t>Complete the calculation: 244.8.</a:t>
+              <a:t>20% of 276 = 55.2</a:t>
             </a:r>
           </a:p>
         </p:txBody>
@@ -8699,28 +8705,30 @@
           <p:cNvPr id="20" name="">
             <a:extLst xmlns:a="http://schemas.openxmlformats.org/drawingml/2006/main">
               <a:ext uri="{FF2B5EF4-FFF2-40B4-BE49-F238E27FC236}">
-                <a16:creationId xmlns:a16="http://schemas.microsoft.com/office/drawing/2014/main" id="{EA12B86C-4220-4646-B2E7-D60AAE73598E}"/>
-              </a:ext>
-            </a:extLst>
-          </p:cNvPr>
-          <p:cNvSpPr>
-            <a:spLocks xmlns:a="http://schemas.openxmlformats.org/drawingml/2006/main" noGrp="1"/>
-          </p:cNvSpPr>
-          <p:nvPr/>
-        </p:nvSpPr>
-        <p:spPr>
-          <a:xfrm xmlns:a="http://schemas.openxmlformats.org/drawingml/2006/main">
-            <a:off x="1000125" y="4476750"/>
-            <a:ext cx="476250" cy="476250"/>
-          </a:xfrm>
-          <a:prstGeom xmlns:a="http://schemas.openxmlformats.org/drawingml/2006/main" prst="ellipse">
+                <a16:creationId xmlns:a16="http://schemas.microsoft.com/office/drawing/2014/main" id="{93B64064-6B5E-44E2-912D-424A43F03390}"/>
+              </a:ext>
+            </a:extLst>
+          </p:cNvPr>
+          <p:cNvSpPr>
+            <a:spLocks xmlns:a="http://schemas.openxmlformats.org/drawingml/2006/main" noGrp="1"/>
+          </p:cNvSpPr>
+          <p:nvPr/>
+        </p:nvSpPr>
+        <p:spPr>
+          <a:xfrm xmlns:a="http://schemas.openxmlformats.org/drawingml/2006/main">
+            <a:off x="1714500" y="4181475"/>
+            <a:ext cx="9334500" cy="9525"/>
+          </a:xfrm>
+          <a:prstGeom xmlns:a="http://schemas.openxmlformats.org/drawingml/2006/main" prst="rect">
             <a:avLst/>
           </a:prstGeom>
           <a:solidFill xmlns:a="http://schemas.openxmlformats.org/drawingml/2006/main">
-            <a:srgbClr val="2C6E73"/>
+            <a:srgbClr val="D9E0E6"/>
           </a:solidFill>
           <a:ln xmlns:a="http://schemas.openxmlformats.org/drawingml/2006/main" w="0">
-            <a:noFill/>
+            <a:solidFill>
+              <a:srgbClr val="D9E0E6"/>
+            </a:solidFill>
           </a:ln>
         </p:spPr>
       </p:sp>
@@ -8729,19 +8737,19 @@
           <p:cNvPr id="21" name="">
             <a:extLst xmlns:a="http://schemas.openxmlformats.org/drawingml/2006/main">
               <a:ext uri="{FF2B5EF4-FFF2-40B4-BE49-F238E27FC236}">
-                <a16:creationId xmlns:a16="http://schemas.microsoft.com/office/drawing/2014/main" id="{7D646612-4AE9-4960-BE61-0FE6CB6DCF7F}"/>
-              </a:ext>
-            </a:extLst>
-          </p:cNvPr>
-          <p:cNvSpPr>
-            <a:spLocks xmlns:a="http://schemas.openxmlformats.org/drawingml/2006/main" noGrp="1"/>
-          </p:cNvSpPr>
-          <p:nvPr/>
-        </p:nvSpPr>
-        <p:spPr>
-          <a:xfrm xmlns:a="http://schemas.openxmlformats.org/drawingml/2006/main">
-            <a:off x="1000125" y="4505325"/>
-            <a:ext cx="476250" cy="419100"/>
+                <a16:creationId xmlns:a16="http://schemas.microsoft.com/office/drawing/2014/main" id="{77F879A5-7199-4D89-9DE4-100A7F51E1E8}"/>
+              </a:ext>
+            </a:extLst>
+          </p:cNvPr>
+          <p:cNvSpPr>
+            <a:spLocks xmlns:a="http://schemas.openxmlformats.org/drawingml/2006/main" noGrp="1"/>
+          </p:cNvSpPr>
+          <p:nvPr/>
+        </p:nvSpPr>
+        <p:spPr>
+          <a:xfrm xmlns:a="http://schemas.openxmlformats.org/drawingml/2006/main">
+            <a:off x="1162050" y="4314825"/>
+            <a:ext cx="400050" cy="400050"/>
           </a:xfrm>
           <a:prstGeom xmlns:a="http://schemas.openxmlformats.org/drawingml/2006/main" prst="rect">
             <a:avLst/>
@@ -8758,9 +8766,9 @@
           <a:lstStyle xmlns:a="http://schemas.openxmlformats.org/drawingml/2006/main"/>
           <a:p xmlns:a="http://schemas.openxmlformats.org/drawingml/2006/main">
             <a:pPr algn="ctr">
-              <a:defRPr sz="1350" b="1">
-                <a:solidFill>
-                  <a:srgbClr val="FFFFFF"/>
+              <a:defRPr sz="1125" b="1">
+                <a:solidFill>
+                  <a:srgbClr val="2C6E73"/>
                 </a:solidFill>
                 <a:latin typeface="Arial"/>
                 <a:ea typeface="Arial"/>
@@ -8768,9 +8776,9 @@
               </a:defRPr>
             </a:pPr>
             <a:r>
-              <a:rPr sz="1350" b="1">
-                <a:solidFill>
-                  <a:srgbClr val="FFFFFF"/>
+              <a:rPr sz="1125" b="1">
+                <a:solidFill>
+                  <a:srgbClr val="2C6E73"/>
                 </a:solidFill>
                 <a:latin typeface="Arial"/>
                 <a:ea typeface="Arial"/>
@@ -8786,19 +8794,19 @@
           <p:cNvPr id="22" name="">
             <a:extLst xmlns:a="http://schemas.openxmlformats.org/drawingml/2006/main">
               <a:ext uri="{FF2B5EF4-FFF2-40B4-BE49-F238E27FC236}">
-                <a16:creationId xmlns:a16="http://schemas.microsoft.com/office/drawing/2014/main" id="{C2C8A4F1-F279-4EC5-8356-C4DCCD4DDACB}"/>
-              </a:ext>
-            </a:extLst>
-          </p:cNvPr>
-          <p:cNvSpPr>
-            <a:spLocks xmlns:a="http://schemas.openxmlformats.org/drawingml/2006/main" noGrp="1"/>
-          </p:cNvSpPr>
-          <p:nvPr/>
-        </p:nvSpPr>
-        <p:spPr>
-          <a:xfrm xmlns:a="http://schemas.openxmlformats.org/drawingml/2006/main">
-            <a:off x="1714500" y="4410075"/>
-            <a:ext cx="9429750" cy="609600"/>
+                <a16:creationId xmlns:a16="http://schemas.microsoft.com/office/drawing/2014/main" id="{90DC43B1-7852-4E08-ACFE-FDC0F990FBC3}"/>
+              </a:ext>
+            </a:extLst>
+          </p:cNvPr>
+          <p:cNvSpPr>
+            <a:spLocks xmlns:a="http://schemas.openxmlformats.org/drawingml/2006/main" noGrp="1"/>
+          </p:cNvSpPr>
+          <p:nvPr/>
+        </p:nvSpPr>
+        <p:spPr>
+          <a:xfrm xmlns:a="http://schemas.openxmlformats.org/drawingml/2006/main">
+            <a:off x="1714500" y="4229100"/>
+            <a:ext cx="9525000" cy="638175"/>
           </a:xfrm>
           <a:prstGeom xmlns:a="http://schemas.openxmlformats.org/drawingml/2006/main" prst="rect">
             <a:avLst/>
@@ -8815,9 +8823,9 @@
           <a:lstStyle xmlns:a="http://schemas.openxmlformats.org/drawingml/2006/main"/>
           <a:p xmlns:a="http://schemas.openxmlformats.org/drawingml/2006/main">
             <a:pPr algn="l">
-              <a:defRPr sz="1500" b="1">
-                <a:solidFill>
-                  <a:srgbClr val="2F785D"/>
+              <a:defRPr sz="1575" b="0">
+                <a:solidFill>
+                  <a:srgbClr val="17253A"/>
                 </a:solidFill>
                 <a:latin typeface="Arial"/>
                 <a:ea typeface="Arial"/>
@@ -8825,15 +8833,161 @@
               </a:defRPr>
             </a:pPr>
             <a:r>
-              <a:rPr sz="1500" b="1">
+              <a:rPr sz="1575" b="0">
+                <a:solidFill>
+                  <a:srgbClr val="17253A"/>
+                </a:solidFill>
+                <a:latin typeface="Arial"/>
+                <a:ea typeface="Arial"/>
+                <a:cs typeface="Arial"/>
+              </a:rPr>
+              <a:t>After decrease: 276 - 55.2</a:t>
+            </a:r>
+          </a:p>
+        </p:txBody>
+      </p:sp>
+      <p:sp>
+        <p:nvSpPr>
+          <p:cNvPr id="23" name="">
+            <a:extLst xmlns:a="http://schemas.openxmlformats.org/drawingml/2006/main">
+              <a:ext uri="{FF2B5EF4-FFF2-40B4-BE49-F238E27FC236}">
+                <a16:creationId xmlns:a16="http://schemas.microsoft.com/office/drawing/2014/main" id="{F8198071-24FD-474C-B813-CA5322BF23D9}"/>
+              </a:ext>
+            </a:extLst>
+          </p:cNvPr>
+          <p:cNvSpPr>
+            <a:spLocks xmlns:a="http://schemas.openxmlformats.org/drawingml/2006/main" noGrp="1"/>
+          </p:cNvSpPr>
+          <p:nvPr/>
+        </p:nvSpPr>
+        <p:spPr>
+          <a:xfrm xmlns:a="http://schemas.openxmlformats.org/drawingml/2006/main">
+            <a:off x="1714500" y="4886325"/>
+            <a:ext cx="9334500" cy="9525"/>
+          </a:xfrm>
+          <a:prstGeom xmlns:a="http://schemas.openxmlformats.org/drawingml/2006/main" prst="rect">
+            <a:avLst/>
+          </a:prstGeom>
+          <a:solidFill xmlns:a="http://schemas.openxmlformats.org/drawingml/2006/main">
+            <a:srgbClr val="D9E0E6"/>
+          </a:solidFill>
+          <a:ln xmlns:a="http://schemas.openxmlformats.org/drawingml/2006/main" w="0">
+            <a:solidFill>
+              <a:srgbClr val="D9E0E6"/>
+            </a:solidFill>
+          </a:ln>
+        </p:spPr>
+      </p:sp>
+      <p:sp>
+        <p:nvSpPr>
+          <p:cNvPr id="24" name="">
+            <a:extLst xmlns:a="http://schemas.openxmlformats.org/drawingml/2006/main">
+              <a:ext uri="{FF2B5EF4-FFF2-40B4-BE49-F238E27FC236}">
+                <a16:creationId xmlns:a16="http://schemas.microsoft.com/office/drawing/2014/main" id="{069CB6CE-53C0-448A-83EF-DE1DBA819024}"/>
+              </a:ext>
+            </a:extLst>
+          </p:cNvPr>
+          <p:cNvSpPr>
+            <a:spLocks xmlns:a="http://schemas.openxmlformats.org/drawingml/2006/main" noGrp="1"/>
+          </p:cNvSpPr>
+          <p:nvPr/>
+        </p:nvSpPr>
+        <p:spPr>
+          <a:xfrm xmlns:a="http://schemas.openxmlformats.org/drawingml/2006/main">
+            <a:off x="1162050" y="5019675"/>
+            <a:ext cx="400050" cy="400050"/>
+          </a:xfrm>
+          <a:prstGeom xmlns:a="http://schemas.openxmlformats.org/drawingml/2006/main" prst="rect">
+            <a:avLst/>
+          </a:prstGeom>
+          <a:noFill xmlns:a="http://schemas.openxmlformats.org/drawingml/2006/main"/>
+          <a:ln xmlns:a="http://schemas.openxmlformats.org/drawingml/2006/main" w="0">
+            <a:noFill/>
+          </a:ln>
+        </p:spPr>
+        <p:txBody>
+          <a:bodyPr xmlns:a="http://schemas.openxmlformats.org/drawingml/2006/main" anchor="ctr">
+            <a:normAutofit fontScale="100000"/>
+          </a:bodyPr>
+          <a:lstStyle xmlns:a="http://schemas.openxmlformats.org/drawingml/2006/main"/>
+          <a:p xmlns:a="http://schemas.openxmlformats.org/drawingml/2006/main">
+            <a:pPr algn="ctr">
+              <a:defRPr sz="1125" b="1">
                 <a:solidFill>
                   <a:srgbClr val="2F785D"/>
                 </a:solidFill>
                 <a:latin typeface="Arial"/>
                 <a:ea typeface="Arial"/>
                 <a:cs typeface="Arial"/>
+              </a:defRPr>
+            </a:pPr>
+            <a:r>
+              <a:rPr sz="1125" b="1">
+                <a:solidFill>
+                  <a:srgbClr val="2F785D"/>
+                </a:solidFill>
+                <a:latin typeface="Arial"/>
+                <a:ea typeface="Arial"/>
+                <a:cs typeface="Arial"/>
               </a:rPr>
-              <a:t>Check the result: Check the solution and explain why it satisfies every condition.</a:t>
+              <a:t>5</a:t>
+            </a:r>
+          </a:p>
+        </p:txBody>
+      </p:sp>
+      <p:sp>
+        <p:nvSpPr>
+          <p:cNvPr id="25" name="">
+            <a:extLst xmlns:a="http://schemas.openxmlformats.org/drawingml/2006/main">
+              <a:ext uri="{FF2B5EF4-FFF2-40B4-BE49-F238E27FC236}">
+                <a16:creationId xmlns:a16="http://schemas.microsoft.com/office/drawing/2014/main" id="{F0811290-1D28-46C6-B389-E5E9E79BF08C}"/>
+              </a:ext>
+            </a:extLst>
+          </p:cNvPr>
+          <p:cNvSpPr>
+            <a:spLocks xmlns:a="http://schemas.openxmlformats.org/drawingml/2006/main" noGrp="1"/>
+          </p:cNvSpPr>
+          <p:nvPr/>
+        </p:nvSpPr>
+        <p:spPr>
+          <a:xfrm xmlns:a="http://schemas.openxmlformats.org/drawingml/2006/main">
+            <a:off x="1714500" y="4933950"/>
+            <a:ext cx="9525000" cy="638175"/>
+          </a:xfrm>
+          <a:prstGeom xmlns:a="http://schemas.openxmlformats.org/drawingml/2006/main" prst="rect">
+            <a:avLst/>
+          </a:prstGeom>
+          <a:noFill xmlns:a="http://schemas.openxmlformats.org/drawingml/2006/main"/>
+          <a:ln xmlns:a="http://schemas.openxmlformats.org/drawingml/2006/main" w="0">
+            <a:noFill/>
+          </a:ln>
+        </p:spPr>
+        <p:txBody>
+          <a:bodyPr xmlns:a="http://schemas.openxmlformats.org/drawingml/2006/main" anchor="ctr">
+            <a:normAutofit fontScale="100000"/>
+          </a:bodyPr>
+          <a:lstStyle xmlns:a="http://schemas.openxmlformats.org/drawingml/2006/main"/>
+          <a:p xmlns:a="http://schemas.openxmlformats.org/drawingml/2006/main">
+            <a:pPr algn="l">
+              <a:defRPr sz="1575" b="1">
+                <a:solidFill>
+                  <a:srgbClr val="2F785D"/>
+                </a:solidFill>
+                <a:latin typeface="Arial"/>
+                <a:ea typeface="Arial"/>
+                <a:cs typeface="Arial"/>
+              </a:defRPr>
+            </a:pPr>
+            <a:r>
+              <a:rPr sz="1575" b="1">
+                <a:solidFill>
+                  <a:srgbClr val="2F785D"/>
+                </a:solidFill>
+                <a:latin typeface="Arial"/>
+                <a:ea typeface="Arial"/>
+                <a:cs typeface="Arial"/>
+              </a:rPr>
+              <a:t>Final quantity = 220.8</a:t>
             </a:r>
           </a:p>
         </p:txBody>
@@ -8841,7 +8995,7 @@
     </p:spTree>
     <p:extLst>
       <p:ext uri="{BB962C8B-B14F-4D97-AF65-F5344CB8AC3E}">
-        <p14:creationId xmlns:p14="http://schemas.microsoft.com/office/powerpoint/2010/main" val="1223411011"/>
+        <p14:creationId xmlns:p14="http://schemas.microsoft.com/office/powerpoint/2010/main" val="1364937675"/>
       </p:ext>
     </p:extLst>
   </p:cSld>
@@ -9078,6 +9232,51 @@
                       </p:childTnLst>
                     </p:cTn>
                   </p:par>
+                  <p:par>
+                    <p:cTn id="23" fill="hold">
+                      <p:stCondLst>
+                        <p:cond delay="indefinite"/>
+                      </p:stCondLst>
+                      <p:childTnLst>
+                        <p:par>
+                          <p:cTn id="24" fill="hold">
+                            <p:stCondLst>
+                              <p:cond delay="0"/>
+                            </p:stCondLst>
+                            <p:childTnLst>
+                              <p:par>
+                                <p:cTn id="25" presetID="1" presetClass="entr" presetSubtype="0" fill="hold" grpId="0" nodeType="clickEffect">
+                                  <p:stCondLst>
+                                    <p:cond delay="0"/>
+                                  </p:stCondLst>
+                                  <p:childTnLst>
+                                    <p:set>
+                                      <p:cBhvr>
+                                        <p:cTn id="26" dur="1" fill="hold">
+                                          <p:stCondLst>
+                                            <p:cond delay="0"/>
+                                          </p:stCondLst>
+                                        </p:cTn>
+                                        <p:tgtEl>
+                                          <p:spTgt spid="25"/>
+                                        </p:tgtEl>
+                                        <p:attrNameLst>
+                                          <p:attrName>style.visibility</p:attrName>
+                                        </p:attrNameLst>
+                                      </p:cBhvr>
+                                      <p:to>
+                                        <p:strVal val="visible"/>
+                                      </p:to>
+                                    </p:set>
+                                  </p:childTnLst>
+                                </p:cTn>
+                              </p:par>
+                            </p:childTnLst>
+                          </p:cTn>
+                        </p:par>
+                      </p:childTnLst>
+                    </p:cTn>
+                  </p:par>
                 </p:childTnLst>
               </p:cTn>
               <p:prevCondLst>
@@ -9105,6 +9304,7 @@
       <p:bldP spid="16" grpId="0"/>
       <p:bldP spid="19" grpId="0"/>
       <p:bldP spid="22" grpId="0"/>
+      <p:bldP spid="25" grpId="0"/>
     </p:bldLst>
   </p:timing>
 </p:sld>
@@ -9134,7 +9334,7 @@
           <p:cNvPr id="15" name="">
             <a:extLst xmlns:a="http://schemas.openxmlformats.org/drawingml/2006/main">
               <a:ext uri="{FF2B5EF4-FFF2-40B4-BE49-F238E27FC236}">
-                <a16:creationId xmlns:a16="http://schemas.microsoft.com/office/drawing/2014/main" id="{46AF11C2-903F-40C6-883E-913DE7D57556}"/>
+                <a16:creationId xmlns:a16="http://schemas.microsoft.com/office/drawing/2014/main" id="{3C774CEF-25BF-4725-A600-96279FC13D16}"/>
               </a:ext>
             </a:extLst>
           </p:cNvPr>
@@ -9166,7 +9366,7 @@
           <p:cNvPr id="2" name="">
             <a:extLst xmlns:a="http://schemas.openxmlformats.org/drawingml/2006/main">
               <a:ext uri="{FF2B5EF4-FFF2-40B4-BE49-F238E27FC236}">
-                <a16:creationId xmlns:a16="http://schemas.microsoft.com/office/drawing/2014/main" id="{62F79D82-3C0B-4025-8261-AB8B3DA92A7E}"/>
+                <a16:creationId xmlns:a16="http://schemas.microsoft.com/office/drawing/2014/main" id="{A6060856-2B43-4D5B-B507-BC3332FEDA0D}"/>
               </a:ext>
             </a:extLst>
           </p:cNvPr>
@@ -9223,7 +9423,7 @@
           <p:cNvPr id="3" name="">
             <a:extLst xmlns:a="http://schemas.openxmlformats.org/drawingml/2006/main">
               <a:ext uri="{FF2B5EF4-FFF2-40B4-BE49-F238E27FC236}">
-                <a16:creationId xmlns:a16="http://schemas.microsoft.com/office/drawing/2014/main" id="{9041A2B5-2270-4FAA-8417-81858B30ED3D}"/>
+                <a16:creationId xmlns:a16="http://schemas.microsoft.com/office/drawing/2014/main" id="{94D18353-FED1-4F64-901F-1ED8A0FFAB8C}"/>
               </a:ext>
             </a:extLst>
           </p:cNvPr>
@@ -9255,7 +9455,7 @@
           <p:cNvPr id="4" name="">
             <a:extLst xmlns:a="http://schemas.openxmlformats.org/drawingml/2006/main">
               <a:ext uri="{FF2B5EF4-FFF2-40B4-BE49-F238E27FC236}">
-                <a16:creationId xmlns:a16="http://schemas.microsoft.com/office/drawing/2014/main" id="{EF686224-53C4-493F-B1A8-A0E7D8E77489}"/>
+                <a16:creationId xmlns:a16="http://schemas.microsoft.com/office/drawing/2014/main" id="{A5E4C556-3B5C-4015-8935-75594B94AED7}"/>
               </a:ext>
             </a:extLst>
           </p:cNvPr>
@@ -9312,7 +9512,7 @@
           <p:cNvPr id="5" name="">
             <a:extLst xmlns:a="http://schemas.openxmlformats.org/drawingml/2006/main">
               <a:ext uri="{FF2B5EF4-FFF2-40B4-BE49-F238E27FC236}">
-                <a16:creationId xmlns:a16="http://schemas.microsoft.com/office/drawing/2014/main" id="{293A7153-6E95-4AC0-9A45-8871DD187C9C}"/>
+                <a16:creationId xmlns:a16="http://schemas.microsoft.com/office/drawing/2014/main" id="{0D196C75-5D0B-460D-8C00-C08E9194BFC2}"/>
               </a:ext>
             </a:extLst>
           </p:cNvPr>
@@ -9369,7 +9569,7 @@
           <p:cNvPr id="6" name="">
             <a:extLst xmlns:a="http://schemas.openxmlformats.org/drawingml/2006/main">
               <a:ext uri="{FF2B5EF4-FFF2-40B4-BE49-F238E27FC236}">
-                <a16:creationId xmlns:a16="http://schemas.microsoft.com/office/drawing/2014/main" id="{E6FD56BE-FC46-47FE-B485-2E15AFB5AA15}"/>
+                <a16:creationId xmlns:a16="http://schemas.microsoft.com/office/drawing/2014/main" id="{55D7F032-BE09-41A3-B711-7345257CC592}"/>
               </a:ext>
             </a:extLst>
           </p:cNvPr>
@@ -9426,7 +9626,7 @@
           <p:cNvPr id="7" name="">
             <a:extLst xmlns:a="http://schemas.openxmlformats.org/drawingml/2006/main">
               <a:ext uri="{FF2B5EF4-FFF2-40B4-BE49-F238E27FC236}">
-                <a16:creationId xmlns:a16="http://schemas.microsoft.com/office/drawing/2014/main" id="{2EBD1535-EE84-4A03-888E-7D41C03387A3}"/>
+                <a16:creationId xmlns:a16="http://schemas.microsoft.com/office/drawing/2014/main" id="{A2A41265-A707-41AF-8E94-A1955A380B4C}"/>
               </a:ext>
             </a:extLst>
           </p:cNvPr>
@@ -9458,7 +9658,7 @@
           <p:cNvPr id="8" name="">
             <a:extLst xmlns:a="http://schemas.openxmlformats.org/drawingml/2006/main">
               <a:ext uri="{FF2B5EF4-FFF2-40B4-BE49-F238E27FC236}">
-                <a16:creationId xmlns:a16="http://schemas.microsoft.com/office/drawing/2014/main" id="{3A957436-C09D-4CDC-91BD-C45325DED25F}"/>
+                <a16:creationId xmlns:a16="http://schemas.microsoft.com/office/drawing/2014/main" id="{2717D3AA-FF12-477B-ABEA-28FB883C6A0B}"/>
               </a:ext>
             </a:extLst>
           </p:cNvPr>
@@ -9515,7 +9715,7 @@
           <p:cNvPr id="9" name="">
             <a:extLst xmlns:a="http://schemas.openxmlformats.org/drawingml/2006/main">
               <a:ext uri="{FF2B5EF4-FFF2-40B4-BE49-F238E27FC236}">
-                <a16:creationId xmlns:a16="http://schemas.microsoft.com/office/drawing/2014/main" id="{EDAB06C0-87CA-4C01-BF6E-0DF01DE0DC3F}"/>
+                <a16:creationId xmlns:a16="http://schemas.microsoft.com/office/drawing/2014/main" id="{3B459351-F319-4756-AB11-DDF267AD27D2}"/>
               </a:ext>
             </a:extLst>
           </p:cNvPr>
@@ -9572,7 +9772,7 @@
           <p:cNvPr id="10" name="">
             <a:extLst xmlns:a="http://schemas.openxmlformats.org/drawingml/2006/main">
               <a:ext uri="{FF2B5EF4-FFF2-40B4-BE49-F238E27FC236}">
-                <a16:creationId xmlns:a16="http://schemas.microsoft.com/office/drawing/2014/main" id="{73330572-828E-4224-A73D-65337B61048A}"/>
+                <a16:creationId xmlns:a16="http://schemas.microsoft.com/office/drawing/2014/main" id="{532EFC81-BD4A-482B-B3C3-B69A9FAEA54A}"/>
               </a:ext>
             </a:extLst>
           </p:cNvPr>
@@ -9629,7 +9829,7 @@
           <p:cNvPr id="11" name="">
             <a:extLst xmlns:a="http://schemas.openxmlformats.org/drawingml/2006/main">
               <a:ext uri="{FF2B5EF4-FFF2-40B4-BE49-F238E27FC236}">
-                <a16:creationId xmlns:a16="http://schemas.microsoft.com/office/drawing/2014/main" id="{2D91047B-CAEC-4309-969A-78D4C5BDD809}"/>
+                <a16:creationId xmlns:a16="http://schemas.microsoft.com/office/drawing/2014/main" id="{FF8224AD-7C3C-49ED-BF94-3D78BF3EC19B}"/>
               </a:ext>
             </a:extLst>
           </p:cNvPr>
@@ -9676,7 +9876,7 @@
                 <a:ea typeface="Arial"/>
                 <a:cs typeface="Arial"/>
               </a:rPr>
-              <a:t>244.8.</a:t>
+              <a:t>220.8.</a:t>
             </a:r>
           </a:p>
         </p:txBody>
@@ -9686,7 +9886,7 @@
           <p:cNvPr id="12" name="">
             <a:extLst xmlns:a="http://schemas.openxmlformats.org/drawingml/2006/main">
               <a:ext uri="{FF2B5EF4-FFF2-40B4-BE49-F238E27FC236}">
-                <a16:creationId xmlns:a16="http://schemas.microsoft.com/office/drawing/2014/main" id="{C791AE27-B5CF-4487-AB27-E57F5F31394E}"/>
+                <a16:creationId xmlns:a16="http://schemas.microsoft.com/office/drawing/2014/main" id="{6C996ACC-675E-41CF-AC59-60E45808867E}"/>
               </a:ext>
             </a:extLst>
           </p:cNvPr>
@@ -9718,7 +9918,7 @@
           <p:cNvPr id="13" name="">
             <a:extLst xmlns:a="http://schemas.openxmlformats.org/drawingml/2006/main">
               <a:ext uri="{FF2B5EF4-FFF2-40B4-BE49-F238E27FC236}">
-                <a16:creationId xmlns:a16="http://schemas.microsoft.com/office/drawing/2014/main" id="{AD4756B7-07EE-485F-8492-24CAB037BFB5}"/>
+                <a16:creationId xmlns:a16="http://schemas.microsoft.com/office/drawing/2014/main" id="{1961CDCB-1438-4D70-8240-11AF6B15B5E8}"/>
               </a:ext>
             </a:extLst>
           </p:cNvPr>
@@ -9775,7 +9975,7 @@
           <p:cNvPr id="14" name="">
             <a:extLst xmlns:a="http://schemas.openxmlformats.org/drawingml/2006/main">
               <a:ext uri="{FF2B5EF4-FFF2-40B4-BE49-F238E27FC236}">
-                <a16:creationId xmlns:a16="http://schemas.microsoft.com/office/drawing/2014/main" id="{3D0206D6-8FDA-412F-91FE-5C8584EF568D}"/>
+                <a16:creationId xmlns:a16="http://schemas.microsoft.com/office/drawing/2014/main" id="{C945823F-FA47-4BCD-BC55-E0ECA64A5F2D}"/>
               </a:ext>
             </a:extLst>
           </p:cNvPr>
@@ -9830,7 +10030,7 @@
     </p:spTree>
     <p:extLst>
       <p:ext uri="{BB962C8B-B14F-4D97-AF65-F5344CB8AC3E}">
-        <p14:creationId xmlns:p14="http://schemas.microsoft.com/office/powerpoint/2010/main" val="2110406527"/>
+        <p14:creationId xmlns:p14="http://schemas.microsoft.com/office/powerpoint/2010/main" val="90399862"/>
       </p:ext>
     </p:extLst>
   </p:cSld>
@@ -10031,7 +10231,7 @@
           <p:cNvPr id="16" name="">
             <a:extLst xmlns:a="http://schemas.openxmlformats.org/drawingml/2006/main">
               <a:ext uri="{FF2B5EF4-FFF2-40B4-BE49-F238E27FC236}">
-                <a16:creationId xmlns:a16="http://schemas.microsoft.com/office/drawing/2014/main" id="{7F758B7B-B856-4709-B86D-71E80A2FF165}"/>
+                <a16:creationId xmlns:a16="http://schemas.microsoft.com/office/drawing/2014/main" id="{06291538-ED98-40DA-B7D9-56A03E34D1CB}"/>
               </a:ext>
             </a:extLst>
           </p:cNvPr>
@@ -10063,7 +10263,7 @@
           <p:cNvPr id="2" name="">
             <a:extLst xmlns:a="http://schemas.openxmlformats.org/drawingml/2006/main">
               <a:ext uri="{FF2B5EF4-FFF2-40B4-BE49-F238E27FC236}">
-                <a16:creationId xmlns:a16="http://schemas.microsoft.com/office/drawing/2014/main" id="{4879B301-57F9-4F67-8535-0DB5D38B0BFC}"/>
+                <a16:creationId xmlns:a16="http://schemas.microsoft.com/office/drawing/2014/main" id="{71DFCA0C-CC4C-4B1B-B376-702EFDA05825}"/>
               </a:ext>
             </a:extLst>
           </p:cNvPr>
@@ -10120,7 +10320,7 @@
           <p:cNvPr id="3" name="">
             <a:extLst xmlns:a="http://schemas.openxmlformats.org/drawingml/2006/main">
               <a:ext uri="{FF2B5EF4-FFF2-40B4-BE49-F238E27FC236}">
-                <a16:creationId xmlns:a16="http://schemas.microsoft.com/office/drawing/2014/main" id="{CF6CF541-88FD-4429-A55D-2755CDB21E39}"/>
+                <a16:creationId xmlns:a16="http://schemas.microsoft.com/office/drawing/2014/main" id="{DC92F505-823B-4F7B-8326-A3DA72A244F1}"/>
               </a:ext>
             </a:extLst>
           </p:cNvPr>
@@ -10152,7 +10352,7 @@
           <p:cNvPr id="4" name="">
             <a:extLst xmlns:a="http://schemas.openxmlformats.org/drawingml/2006/main">
               <a:ext uri="{FF2B5EF4-FFF2-40B4-BE49-F238E27FC236}">
-                <a16:creationId xmlns:a16="http://schemas.microsoft.com/office/drawing/2014/main" id="{A5F67232-AB6D-4C42-B171-FDBB4605B596}"/>
+                <a16:creationId xmlns:a16="http://schemas.microsoft.com/office/drawing/2014/main" id="{854117AC-9CAE-4F65-B36A-7D732C26BBBE}"/>
               </a:ext>
             </a:extLst>
           </p:cNvPr>
@@ -10209,7 +10409,7 @@
           <p:cNvPr id="5" name="">
             <a:extLst xmlns:a="http://schemas.openxmlformats.org/drawingml/2006/main">
               <a:ext uri="{FF2B5EF4-FFF2-40B4-BE49-F238E27FC236}">
-                <a16:creationId xmlns:a16="http://schemas.microsoft.com/office/drawing/2014/main" id="{E9ACA3AE-14A9-43D6-8EB4-1A985E7F6892}"/>
+                <a16:creationId xmlns:a16="http://schemas.microsoft.com/office/drawing/2014/main" id="{3D011ADF-7B47-4596-A832-553434FF90F8}"/>
               </a:ext>
             </a:extLst>
           </p:cNvPr>
@@ -10266,7 +10466,7 @@
           <p:cNvPr id="6" name="">
             <a:extLst xmlns:a="http://schemas.openxmlformats.org/drawingml/2006/main">
               <a:ext uri="{FF2B5EF4-FFF2-40B4-BE49-F238E27FC236}">
-                <a16:creationId xmlns:a16="http://schemas.microsoft.com/office/drawing/2014/main" id="{CF0424C5-D77A-4BF3-8831-1653BE7BBDB1}"/>
+                <a16:creationId xmlns:a16="http://schemas.microsoft.com/office/drawing/2014/main" id="{23FE61D4-26C0-46EF-B116-CD0D95BDFFAA}"/>
               </a:ext>
             </a:extLst>
           </p:cNvPr>
@@ -10323,7 +10523,7 @@
           <p:cNvPr id="7" name="">
             <a:extLst xmlns:a="http://schemas.openxmlformats.org/drawingml/2006/main">
               <a:ext uri="{FF2B5EF4-FFF2-40B4-BE49-F238E27FC236}">
-                <a16:creationId xmlns:a16="http://schemas.microsoft.com/office/drawing/2014/main" id="{940F04F1-E6D1-4B09-AA52-0C9A34B968EE}"/>
+                <a16:creationId xmlns:a16="http://schemas.microsoft.com/office/drawing/2014/main" id="{F2F6766B-9D79-48B1-9B7E-7F9F863D619E}"/>
               </a:ext>
             </a:extLst>
           </p:cNvPr>
@@ -10355,7 +10555,7 @@
           <p:cNvPr id="8" name="">
             <a:extLst xmlns:a="http://schemas.openxmlformats.org/drawingml/2006/main">
               <a:ext uri="{FF2B5EF4-FFF2-40B4-BE49-F238E27FC236}">
-                <a16:creationId xmlns:a16="http://schemas.microsoft.com/office/drawing/2014/main" id="{B9FC7DFB-0733-4003-A2B6-B312B110182F}"/>
+                <a16:creationId xmlns:a16="http://schemas.microsoft.com/office/drawing/2014/main" id="{EDA24589-3116-4E57-92AF-C867368EB4AD}"/>
               </a:ext>
             </a:extLst>
           </p:cNvPr>
@@ -10412,7 +10612,7 @@
           <p:cNvPr id="9" name="">
             <a:extLst xmlns:a="http://schemas.openxmlformats.org/drawingml/2006/main">
               <a:ext uri="{FF2B5EF4-FFF2-40B4-BE49-F238E27FC236}">
-                <a16:creationId xmlns:a16="http://schemas.microsoft.com/office/drawing/2014/main" id="{94ACCEEE-ED4F-45C0-ACE1-53D17518E905}"/>
+                <a16:creationId xmlns:a16="http://schemas.microsoft.com/office/drawing/2014/main" id="{D6C74992-87C3-40FE-8897-C169A2FB6F66}"/>
               </a:ext>
             </a:extLst>
           </p:cNvPr>
@@ -10469,7 +10669,7 @@
           <p:cNvPr id="10" name="">
             <a:extLst xmlns:a="http://schemas.openxmlformats.org/drawingml/2006/main">
               <a:ext uri="{FF2B5EF4-FFF2-40B4-BE49-F238E27FC236}">
-                <a16:creationId xmlns:a16="http://schemas.microsoft.com/office/drawing/2014/main" id="{0A1436C2-4557-426A-99AF-BBF65DE1AD8F}"/>
+                <a16:creationId xmlns:a16="http://schemas.microsoft.com/office/drawing/2014/main" id="{9333FFA7-BB3A-44EB-B73E-A13B1424B103}"/>
               </a:ext>
             </a:extLst>
           </p:cNvPr>
@@ -10526,7 +10726,7 @@
           <p:cNvPr id="11" name="">
             <a:extLst xmlns:a="http://schemas.openxmlformats.org/drawingml/2006/main">
               <a:ext uri="{FF2B5EF4-FFF2-40B4-BE49-F238E27FC236}">
-                <a16:creationId xmlns:a16="http://schemas.microsoft.com/office/drawing/2014/main" id="{8F50A757-5C00-4972-BECD-49FB437DACC6}"/>
+                <a16:creationId xmlns:a16="http://schemas.microsoft.com/office/drawing/2014/main" id="{D090F813-FBB2-4313-AE9A-C3A15C644080}"/>
               </a:ext>
             </a:extLst>
           </p:cNvPr>
@@ -10583,7 +10783,7 @@
           <p:cNvPr id="12" name="">
             <a:extLst xmlns:a="http://schemas.openxmlformats.org/drawingml/2006/main">
               <a:ext uri="{FF2B5EF4-FFF2-40B4-BE49-F238E27FC236}">
-                <a16:creationId xmlns:a16="http://schemas.microsoft.com/office/drawing/2014/main" id="{DB970F75-DB09-40CB-A835-93B14085452B}"/>
+                <a16:creationId xmlns:a16="http://schemas.microsoft.com/office/drawing/2014/main" id="{FCA93629-39D6-4607-8A13-3FDE57D329E4}"/>
               </a:ext>
             </a:extLst>
           </p:cNvPr>
@@ -10640,7 +10840,7 @@
           <p:cNvPr id="13" name="">
             <a:extLst xmlns:a="http://schemas.openxmlformats.org/drawingml/2006/main">
               <a:ext uri="{FF2B5EF4-FFF2-40B4-BE49-F238E27FC236}">
-                <a16:creationId xmlns:a16="http://schemas.microsoft.com/office/drawing/2014/main" id="{D8DCEC92-4D19-4254-8433-F07DA669AFEB}"/>
+                <a16:creationId xmlns:a16="http://schemas.microsoft.com/office/drawing/2014/main" id="{41AFD7BB-2CA3-4273-850E-DBF35EDAC915}"/>
               </a:ext>
             </a:extLst>
           </p:cNvPr>
@@ -10697,7 +10897,7 @@
           <p:cNvPr id="14" name="">
             <a:extLst xmlns:a="http://schemas.openxmlformats.org/drawingml/2006/main">
               <a:ext uri="{FF2B5EF4-FFF2-40B4-BE49-F238E27FC236}">
-                <a16:creationId xmlns:a16="http://schemas.microsoft.com/office/drawing/2014/main" id="{AF8D7F43-DFBB-454E-8FC2-9205E7E22364}"/>
+                <a16:creationId xmlns:a16="http://schemas.microsoft.com/office/drawing/2014/main" id="{56754710-B337-44AC-BCC6-B8D3EAFA2AC3}"/>
               </a:ext>
             </a:extLst>
           </p:cNvPr>
@@ -10754,7 +10954,7 @@
           <p:cNvPr id="15" name="">
             <a:extLst xmlns:a="http://schemas.openxmlformats.org/drawingml/2006/main">
               <a:ext uri="{FF2B5EF4-FFF2-40B4-BE49-F238E27FC236}">
-                <a16:creationId xmlns:a16="http://schemas.microsoft.com/office/drawing/2014/main" id="{CE6DA8F5-0685-488A-8D48-DF03411C563E}"/>
+                <a16:creationId xmlns:a16="http://schemas.microsoft.com/office/drawing/2014/main" id="{CE5F6CF4-3C2C-4A74-ACF0-91B7E554F1DF}"/>
               </a:ext>
             </a:extLst>
           </p:cNvPr>
@@ -10809,7 +11009,7 @@
     </p:spTree>
     <p:extLst>
       <p:ext uri="{BB962C8B-B14F-4D97-AF65-F5344CB8AC3E}">
-        <p14:creationId xmlns:p14="http://schemas.microsoft.com/office/powerpoint/2010/main" val="1086975979"/>
+        <p14:creationId xmlns:p14="http://schemas.microsoft.com/office/powerpoint/2010/main" val="62622382"/>
       </p:ext>
     </p:extLst>
   </p:cSld>
@@ -10964,7 +11164,7 @@
           <p:cNvPr id="16" name="">
             <a:extLst xmlns:a="http://schemas.openxmlformats.org/drawingml/2006/main">
               <a:ext uri="{FF2B5EF4-FFF2-40B4-BE49-F238E27FC236}">
-                <a16:creationId xmlns:a16="http://schemas.microsoft.com/office/drawing/2014/main" id="{D90ACD5B-81AD-4AD2-B08B-7D3A8EE607A6}"/>
+                <a16:creationId xmlns:a16="http://schemas.microsoft.com/office/drawing/2014/main" id="{A3268ADA-4571-42BA-8896-F0835EA203D9}"/>
               </a:ext>
             </a:extLst>
           </p:cNvPr>
@@ -10996,7 +11196,7 @@
           <p:cNvPr id="2" name="">
             <a:extLst xmlns:a="http://schemas.openxmlformats.org/drawingml/2006/main">
               <a:ext uri="{FF2B5EF4-FFF2-40B4-BE49-F238E27FC236}">
-                <a16:creationId xmlns:a16="http://schemas.microsoft.com/office/drawing/2014/main" id="{9C8F4723-0F33-4561-AFD5-1F2E4711E76A}"/>
+                <a16:creationId xmlns:a16="http://schemas.microsoft.com/office/drawing/2014/main" id="{BDF8080A-8611-4A0F-A47E-FC70ABF8BF52}"/>
               </a:ext>
             </a:extLst>
           </p:cNvPr>
@@ -11053,7 +11253,7 @@
           <p:cNvPr id="3" name="">
             <a:extLst xmlns:a="http://schemas.openxmlformats.org/drawingml/2006/main">
               <a:ext uri="{FF2B5EF4-FFF2-40B4-BE49-F238E27FC236}">
-                <a16:creationId xmlns:a16="http://schemas.microsoft.com/office/drawing/2014/main" id="{168B3BA0-2E45-4EDC-985F-3AB2D3A4CCAB}"/>
+                <a16:creationId xmlns:a16="http://schemas.microsoft.com/office/drawing/2014/main" id="{FED79C9D-5D2B-4F30-AF3F-A3A04DAA6E04}"/>
               </a:ext>
             </a:extLst>
           </p:cNvPr>
@@ -11085,7 +11285,7 @@
           <p:cNvPr id="4" name="">
             <a:extLst xmlns:a="http://schemas.openxmlformats.org/drawingml/2006/main">
               <a:ext uri="{FF2B5EF4-FFF2-40B4-BE49-F238E27FC236}">
-                <a16:creationId xmlns:a16="http://schemas.microsoft.com/office/drawing/2014/main" id="{E25650E7-8C8D-4CDF-8607-47AC520A382C}"/>
+                <a16:creationId xmlns:a16="http://schemas.microsoft.com/office/drawing/2014/main" id="{91A20EA1-4344-4AE2-AB16-B7649204DB00}"/>
               </a:ext>
             </a:extLst>
           </p:cNvPr>
@@ -11142,7 +11342,7 @@
           <p:cNvPr id="5" name="">
             <a:extLst xmlns:a="http://schemas.openxmlformats.org/drawingml/2006/main">
               <a:ext uri="{FF2B5EF4-FFF2-40B4-BE49-F238E27FC236}">
-                <a16:creationId xmlns:a16="http://schemas.microsoft.com/office/drawing/2014/main" id="{9ECB1B3D-21E2-4D95-B354-B267043740FD}"/>
+                <a16:creationId xmlns:a16="http://schemas.microsoft.com/office/drawing/2014/main" id="{6025F09D-F525-43A8-8517-A6DC0552947B}"/>
               </a:ext>
             </a:extLst>
           </p:cNvPr>
@@ -11199,7 +11399,7 @@
           <p:cNvPr id="6" name="">
             <a:extLst xmlns:a="http://schemas.openxmlformats.org/drawingml/2006/main">
               <a:ext uri="{FF2B5EF4-FFF2-40B4-BE49-F238E27FC236}">
-                <a16:creationId xmlns:a16="http://schemas.microsoft.com/office/drawing/2014/main" id="{31372D76-EF77-4424-BFFF-A3EE33DCC603}"/>
+                <a16:creationId xmlns:a16="http://schemas.microsoft.com/office/drawing/2014/main" id="{4370BE5F-42FB-465D-A9C6-FDF9AD4FE974}"/>
               </a:ext>
             </a:extLst>
           </p:cNvPr>
@@ -11256,7 +11456,7 @@
           <p:cNvPr id="7" name="">
             <a:extLst xmlns:a="http://schemas.openxmlformats.org/drawingml/2006/main">
               <a:ext uri="{FF2B5EF4-FFF2-40B4-BE49-F238E27FC236}">
-                <a16:creationId xmlns:a16="http://schemas.microsoft.com/office/drawing/2014/main" id="{F3047195-0724-46FB-ACBA-C75143538572}"/>
+                <a16:creationId xmlns:a16="http://schemas.microsoft.com/office/drawing/2014/main" id="{2B4AED10-8962-419E-9741-2094C96E871F}"/>
               </a:ext>
             </a:extLst>
           </p:cNvPr>
@@ -11288,7 +11488,7 @@
           <p:cNvPr id="8" name="">
             <a:extLst xmlns:a="http://schemas.openxmlformats.org/drawingml/2006/main">
               <a:ext uri="{FF2B5EF4-FFF2-40B4-BE49-F238E27FC236}">
-                <a16:creationId xmlns:a16="http://schemas.microsoft.com/office/drawing/2014/main" id="{498C365F-4A3F-480A-930A-806BF3A08111}"/>
+                <a16:creationId xmlns:a16="http://schemas.microsoft.com/office/drawing/2014/main" id="{A8EA5562-23EA-45E2-ADB5-A2475C13F05D}"/>
               </a:ext>
             </a:extLst>
           </p:cNvPr>
@@ -11345,7 +11545,7 @@
           <p:cNvPr id="9" name="">
             <a:extLst xmlns:a="http://schemas.openxmlformats.org/drawingml/2006/main">
               <a:ext uri="{FF2B5EF4-FFF2-40B4-BE49-F238E27FC236}">
-                <a16:creationId xmlns:a16="http://schemas.microsoft.com/office/drawing/2014/main" id="{117CDDFA-9126-41EA-9C64-EFDAEB08CE24}"/>
+                <a16:creationId xmlns:a16="http://schemas.microsoft.com/office/drawing/2014/main" id="{D2722FAC-581D-42AA-9B1C-7813019077B8}"/>
               </a:ext>
             </a:extLst>
           </p:cNvPr>
@@ -11406,7 +11606,7 @@
           <p:nvPr/>
         </p:nvPicPr>
         <p:blipFill>
-          <a:blip xmlns:r="http://schemas.openxmlformats.org/officeDocument/2006/relationships" xmlns:a="http://schemas.openxmlformats.org/drawingml/2006/main" r:embed="Re45bd661b6c24c55"/>
+          <a:blip xmlns:r="http://schemas.openxmlformats.org/officeDocument/2006/relationships" xmlns:a="http://schemas.openxmlformats.org/drawingml/2006/main" r:embed="R7757ba8dadd24fd5"/>
           <a:stretch xmlns:a="http://schemas.openxmlformats.org/drawingml/2006/main"/>
         </p:blipFill>
         <p:spPr>
@@ -11424,7 +11624,7 @@
           <p:cNvPr id="11" name="">
             <a:extLst xmlns:a="http://schemas.openxmlformats.org/drawingml/2006/main">
               <a:ext uri="{FF2B5EF4-FFF2-40B4-BE49-F238E27FC236}">
-                <a16:creationId xmlns:a16="http://schemas.microsoft.com/office/drawing/2014/main" id="{86264DE8-B40B-47F1-B888-CB0B74D1505D}"/>
+                <a16:creationId xmlns:a16="http://schemas.microsoft.com/office/drawing/2014/main" id="{FF264550-C70E-40F6-A593-832925AB074B}"/>
               </a:ext>
             </a:extLst>
           </p:cNvPr>
@@ -11481,7 +11681,7 @@
           <p:cNvPr id="12" name="">
             <a:extLst xmlns:a="http://schemas.openxmlformats.org/drawingml/2006/main">
               <a:ext uri="{FF2B5EF4-FFF2-40B4-BE49-F238E27FC236}">
-                <a16:creationId xmlns:a16="http://schemas.microsoft.com/office/drawing/2014/main" id="{03B4F6B6-E0EE-4563-B1E6-8682E7E1B9AD}"/>
+                <a16:creationId xmlns:a16="http://schemas.microsoft.com/office/drawing/2014/main" id="{1D1731C7-81D0-43EB-A536-2D578CA04DB2}"/>
               </a:ext>
             </a:extLst>
           </p:cNvPr>
@@ -11538,7 +11738,7 @@
           <p:cNvPr id="13" name="">
             <a:extLst xmlns:a="http://schemas.openxmlformats.org/drawingml/2006/main">
               <a:ext uri="{FF2B5EF4-FFF2-40B4-BE49-F238E27FC236}">
-                <a16:creationId xmlns:a16="http://schemas.microsoft.com/office/drawing/2014/main" id="{AB586678-B953-4343-A241-1148C7D4D7EE}"/>
+                <a16:creationId xmlns:a16="http://schemas.microsoft.com/office/drawing/2014/main" id="{CEA5BB4D-2C0F-4C7A-8D2E-5F112907A60C}"/>
               </a:ext>
             </a:extLst>
           </p:cNvPr>
@@ -11570,7 +11770,7 @@
           <p:cNvPr id="14" name="">
             <a:extLst xmlns:a="http://schemas.openxmlformats.org/drawingml/2006/main">
               <a:ext uri="{FF2B5EF4-FFF2-40B4-BE49-F238E27FC236}">
-                <a16:creationId xmlns:a16="http://schemas.microsoft.com/office/drawing/2014/main" id="{3E304C48-A8C4-4198-8272-C1A730C45B9F}"/>
+                <a16:creationId xmlns:a16="http://schemas.microsoft.com/office/drawing/2014/main" id="{200911F0-730F-48D3-8630-D4BD4DB295EC}"/>
               </a:ext>
             </a:extLst>
           </p:cNvPr>
@@ -11627,7 +11827,7 @@
           <p:cNvPr id="15" name="">
             <a:extLst xmlns:a="http://schemas.openxmlformats.org/drawingml/2006/main">
               <a:ext uri="{FF2B5EF4-FFF2-40B4-BE49-F238E27FC236}">
-                <a16:creationId xmlns:a16="http://schemas.microsoft.com/office/drawing/2014/main" id="{CA841CA2-4CC6-4BCD-A0AF-1E3771203A98}"/>
+                <a16:creationId xmlns:a16="http://schemas.microsoft.com/office/drawing/2014/main" id="{20FF2811-5DCE-458D-8FCB-C0DAF84D0960}"/>
               </a:ext>
             </a:extLst>
           </p:cNvPr>
@@ -11682,7 +11882,7 @@
     </p:spTree>
     <p:extLst>
       <p:ext uri="{BB962C8B-B14F-4D97-AF65-F5344CB8AC3E}">
-        <p14:creationId xmlns:p14="http://schemas.microsoft.com/office/powerpoint/2010/main" val="571569469"/>
+        <p14:creationId xmlns:p14="http://schemas.microsoft.com/office/powerpoint/2010/main" val="126094082"/>
       </p:ext>
     </p:extLst>
   </p:cSld>
@@ -11837,7 +12037,7 @@
           <p:cNvPr id="23" name="">
             <a:extLst xmlns:a="http://schemas.openxmlformats.org/drawingml/2006/main">
               <a:ext uri="{FF2B5EF4-FFF2-40B4-BE49-F238E27FC236}">
-                <a16:creationId xmlns:a16="http://schemas.microsoft.com/office/drawing/2014/main" id="{589DD6CB-06F4-484D-9D1E-01070853704C}"/>
+                <a16:creationId xmlns:a16="http://schemas.microsoft.com/office/drawing/2014/main" id="{95CBEECF-43B9-447E-8DB7-7314B60C609D}"/>
               </a:ext>
             </a:extLst>
           </p:cNvPr>
@@ -11869,7 +12069,7 @@
           <p:cNvPr id="2" name="">
             <a:extLst xmlns:a="http://schemas.openxmlformats.org/drawingml/2006/main">
               <a:ext uri="{FF2B5EF4-FFF2-40B4-BE49-F238E27FC236}">
-                <a16:creationId xmlns:a16="http://schemas.microsoft.com/office/drawing/2014/main" id="{FE5F7F45-FDEF-4956-903E-835CAD5706B3}"/>
+                <a16:creationId xmlns:a16="http://schemas.microsoft.com/office/drawing/2014/main" id="{A8735159-B56F-4D2A-9D01-F84EA6DB4ACF}"/>
               </a:ext>
             </a:extLst>
           </p:cNvPr>
@@ -11926,7 +12126,7 @@
           <p:cNvPr id="3" name="">
             <a:extLst xmlns:a="http://schemas.openxmlformats.org/drawingml/2006/main">
               <a:ext uri="{FF2B5EF4-FFF2-40B4-BE49-F238E27FC236}">
-                <a16:creationId xmlns:a16="http://schemas.microsoft.com/office/drawing/2014/main" id="{2FCE1248-F7B3-410B-887C-9A87DCEF6758}"/>
+                <a16:creationId xmlns:a16="http://schemas.microsoft.com/office/drawing/2014/main" id="{4B138860-1AFE-4B56-B9BF-D6B2F96CE283}"/>
               </a:ext>
             </a:extLst>
           </p:cNvPr>
@@ -11958,7 +12158,7 @@
           <p:cNvPr id="4" name="">
             <a:extLst xmlns:a="http://schemas.openxmlformats.org/drawingml/2006/main">
               <a:ext uri="{FF2B5EF4-FFF2-40B4-BE49-F238E27FC236}">
-                <a16:creationId xmlns:a16="http://schemas.microsoft.com/office/drawing/2014/main" id="{108C1352-91E7-48CF-8E85-0E6EA5BCF666}"/>
+                <a16:creationId xmlns:a16="http://schemas.microsoft.com/office/drawing/2014/main" id="{5035E8B4-34FB-4A88-9548-E1BD176A0B6D}"/>
               </a:ext>
             </a:extLst>
           </p:cNvPr>
@@ -12015,7 +12215,7 @@
           <p:cNvPr id="5" name="">
             <a:extLst xmlns:a="http://schemas.openxmlformats.org/drawingml/2006/main">
               <a:ext uri="{FF2B5EF4-FFF2-40B4-BE49-F238E27FC236}">
-                <a16:creationId xmlns:a16="http://schemas.microsoft.com/office/drawing/2014/main" id="{6D194A15-0AE3-4918-ADEF-52DF52D1C754}"/>
+                <a16:creationId xmlns:a16="http://schemas.microsoft.com/office/drawing/2014/main" id="{8916299D-EA1D-4AF1-930F-9183128A5C42}"/>
               </a:ext>
             </a:extLst>
           </p:cNvPr>
@@ -12072,7 +12272,7 @@
           <p:cNvPr id="6" name="">
             <a:extLst xmlns:a="http://schemas.openxmlformats.org/drawingml/2006/main">
               <a:ext uri="{FF2B5EF4-FFF2-40B4-BE49-F238E27FC236}">
-                <a16:creationId xmlns:a16="http://schemas.microsoft.com/office/drawing/2014/main" id="{CEC382E1-9D94-45E1-B771-67359267498E}"/>
+                <a16:creationId xmlns:a16="http://schemas.microsoft.com/office/drawing/2014/main" id="{5C2696D4-9000-4FA4-BC8D-6B3AA8FE4102}"/>
               </a:ext>
             </a:extLst>
           </p:cNvPr>
@@ -12129,7 +12329,7 @@
           <p:cNvPr id="7" name="">
             <a:extLst xmlns:a="http://schemas.openxmlformats.org/drawingml/2006/main">
               <a:ext uri="{FF2B5EF4-FFF2-40B4-BE49-F238E27FC236}">
-                <a16:creationId xmlns:a16="http://schemas.microsoft.com/office/drawing/2014/main" id="{C2E15A56-C9E7-4BE1-A355-2D7EF98C611D}"/>
+                <a16:creationId xmlns:a16="http://schemas.microsoft.com/office/drawing/2014/main" id="{AD1976F6-1782-4A3C-B65A-93097C9C96A9}"/>
               </a:ext>
             </a:extLst>
           </p:cNvPr>
@@ -12161,7 +12361,7 @@
           <p:cNvPr id="8" name="">
             <a:extLst xmlns:a="http://schemas.openxmlformats.org/drawingml/2006/main">
               <a:ext uri="{FF2B5EF4-FFF2-40B4-BE49-F238E27FC236}">
-                <a16:creationId xmlns:a16="http://schemas.microsoft.com/office/drawing/2014/main" id="{8BC6084E-37A8-4F8F-81A4-2D33DCF77D4E}"/>
+                <a16:creationId xmlns:a16="http://schemas.microsoft.com/office/drawing/2014/main" id="{4CC2D796-0540-414C-8644-77825F5BF8D7}"/>
               </a:ext>
             </a:extLst>
           </p:cNvPr>
@@ -12218,7 +12418,7 @@
           <p:cNvPr id="9" name="">
             <a:extLst xmlns:a="http://schemas.openxmlformats.org/drawingml/2006/main">
               <a:ext uri="{FF2B5EF4-FFF2-40B4-BE49-F238E27FC236}">
-                <a16:creationId xmlns:a16="http://schemas.microsoft.com/office/drawing/2014/main" id="{3AADD6DD-4D56-4BDB-AACB-227E83874A9F}"/>
+                <a16:creationId xmlns:a16="http://schemas.microsoft.com/office/drawing/2014/main" id="{86E283A6-FE53-4D04-9D8B-289E8F70B4DA}"/>
               </a:ext>
             </a:extLst>
           </p:cNvPr>
@@ -12275,7 +12475,7 @@
           <p:cNvPr id="10" name="">
             <a:extLst xmlns:a="http://schemas.openxmlformats.org/drawingml/2006/main">
               <a:ext uri="{FF2B5EF4-FFF2-40B4-BE49-F238E27FC236}">
-                <a16:creationId xmlns:a16="http://schemas.microsoft.com/office/drawing/2014/main" id="{233E0AE7-E84D-4ABB-80C6-6B6C4735636A}"/>
+                <a16:creationId xmlns:a16="http://schemas.microsoft.com/office/drawing/2014/main" id="{5589AD37-CEB0-4C86-A8C8-6C705499AEAE}"/>
               </a:ext>
             </a:extLst>
           </p:cNvPr>
@@ -12309,7 +12509,7 @@
           <p:cNvPr id="11" name="">
             <a:extLst xmlns:a="http://schemas.openxmlformats.org/drawingml/2006/main">
               <a:ext uri="{FF2B5EF4-FFF2-40B4-BE49-F238E27FC236}">
-                <a16:creationId xmlns:a16="http://schemas.microsoft.com/office/drawing/2014/main" id="{91ADE8CD-CE03-4BE6-9600-8AC8FB9256B5}"/>
+                <a16:creationId xmlns:a16="http://schemas.microsoft.com/office/drawing/2014/main" id="{E8E7E335-B6C9-4E5D-A8D0-BF208C7F5066}"/>
               </a:ext>
             </a:extLst>
           </p:cNvPr>
@@ -12341,7 +12541,7 @@
           <p:cNvPr id="12" name="">
             <a:extLst xmlns:a="http://schemas.openxmlformats.org/drawingml/2006/main">
               <a:ext uri="{FF2B5EF4-FFF2-40B4-BE49-F238E27FC236}">
-                <a16:creationId xmlns:a16="http://schemas.microsoft.com/office/drawing/2014/main" id="{E4DE3DBB-820D-4E27-86E3-0DBEF9D2D95D}"/>
+                <a16:creationId xmlns:a16="http://schemas.microsoft.com/office/drawing/2014/main" id="{E2B3741B-29F7-4DD6-A05E-C9B3CE2C2B4B}"/>
               </a:ext>
             </a:extLst>
           </p:cNvPr>
@@ -12398,7 +12598,7 @@
           <p:cNvPr id="13" name="">
             <a:extLst xmlns:a="http://schemas.openxmlformats.org/drawingml/2006/main">
               <a:ext uri="{FF2B5EF4-FFF2-40B4-BE49-F238E27FC236}">
-                <a16:creationId xmlns:a16="http://schemas.microsoft.com/office/drawing/2014/main" id="{5CAA96E5-5579-4BDC-A0A6-FAD54EC84BFA}"/>
+                <a16:creationId xmlns:a16="http://schemas.microsoft.com/office/drawing/2014/main" id="{232C6338-AD3A-4405-A2F5-5B6E7E49C715}"/>
               </a:ext>
             </a:extLst>
           </p:cNvPr>
@@ -12455,7 +12655,7 @@
           <p:cNvPr id="14" name="">
             <a:extLst xmlns:a="http://schemas.openxmlformats.org/drawingml/2006/main">
               <a:ext uri="{FF2B5EF4-FFF2-40B4-BE49-F238E27FC236}">
-                <a16:creationId xmlns:a16="http://schemas.microsoft.com/office/drawing/2014/main" id="{4748F8C6-E3FF-464E-BB29-3594133BEC08}"/>
+                <a16:creationId xmlns:a16="http://schemas.microsoft.com/office/drawing/2014/main" id="{DE991F30-9B20-4A77-8BD8-94A3C8377453}"/>
               </a:ext>
             </a:extLst>
           </p:cNvPr>
@@ -12489,7 +12689,7 @@
           <p:cNvPr id="15" name="">
             <a:extLst xmlns:a="http://schemas.openxmlformats.org/drawingml/2006/main">
               <a:ext uri="{FF2B5EF4-FFF2-40B4-BE49-F238E27FC236}">
-                <a16:creationId xmlns:a16="http://schemas.microsoft.com/office/drawing/2014/main" id="{947B552E-0E60-4FA7-A126-B3C658F73FD8}"/>
+                <a16:creationId xmlns:a16="http://schemas.microsoft.com/office/drawing/2014/main" id="{C9D8892F-2F66-4CC9-A8A9-C54883F5BF47}"/>
               </a:ext>
             </a:extLst>
           </p:cNvPr>
@@ -12521,7 +12721,7 @@
           <p:cNvPr id="16" name="">
             <a:extLst xmlns:a="http://schemas.openxmlformats.org/drawingml/2006/main">
               <a:ext uri="{FF2B5EF4-FFF2-40B4-BE49-F238E27FC236}">
-                <a16:creationId xmlns:a16="http://schemas.microsoft.com/office/drawing/2014/main" id="{7BD02071-47B0-4711-BE83-94C1BD2C2B63}"/>
+                <a16:creationId xmlns:a16="http://schemas.microsoft.com/office/drawing/2014/main" id="{32A71809-D37F-41B9-A782-0D45F61553E1}"/>
               </a:ext>
             </a:extLst>
           </p:cNvPr>
@@ -12578,7 +12778,7 @@
           <p:cNvPr id="17" name="">
             <a:extLst xmlns:a="http://schemas.openxmlformats.org/drawingml/2006/main">
               <a:ext uri="{FF2B5EF4-FFF2-40B4-BE49-F238E27FC236}">
-                <a16:creationId xmlns:a16="http://schemas.microsoft.com/office/drawing/2014/main" id="{65693789-75E6-4D67-BE80-484BFFA96754}"/>
+                <a16:creationId xmlns:a16="http://schemas.microsoft.com/office/drawing/2014/main" id="{9A50F538-BAF9-4077-93B5-E178785D0673}"/>
               </a:ext>
             </a:extLst>
           </p:cNvPr>
@@ -12635,7 +12835,7 @@
           <p:cNvPr id="18" name="">
             <a:extLst xmlns:a="http://schemas.openxmlformats.org/drawingml/2006/main">
               <a:ext uri="{FF2B5EF4-FFF2-40B4-BE49-F238E27FC236}">
-                <a16:creationId xmlns:a16="http://schemas.microsoft.com/office/drawing/2014/main" id="{C8048C4F-3810-4DAF-9192-1867519E908A}"/>
+                <a16:creationId xmlns:a16="http://schemas.microsoft.com/office/drawing/2014/main" id="{1003B729-402F-4219-BAAD-CB40B8689D2E}"/>
               </a:ext>
             </a:extLst>
           </p:cNvPr>
@@ -12669,7 +12869,7 @@
           <p:cNvPr id="19" name="">
             <a:extLst xmlns:a="http://schemas.openxmlformats.org/drawingml/2006/main">
               <a:ext uri="{FF2B5EF4-FFF2-40B4-BE49-F238E27FC236}">
-                <a16:creationId xmlns:a16="http://schemas.microsoft.com/office/drawing/2014/main" id="{385EA64E-D69F-4CAC-9F60-577680CF7327}"/>
+                <a16:creationId xmlns:a16="http://schemas.microsoft.com/office/drawing/2014/main" id="{AF6EE1C3-6658-4349-9927-DBC36CBF9CC2}"/>
               </a:ext>
             </a:extLst>
           </p:cNvPr>
@@ -12701,7 +12901,7 @@
           <p:cNvPr id="20" name="">
             <a:extLst xmlns:a="http://schemas.openxmlformats.org/drawingml/2006/main">
               <a:ext uri="{FF2B5EF4-FFF2-40B4-BE49-F238E27FC236}">
-                <a16:creationId xmlns:a16="http://schemas.microsoft.com/office/drawing/2014/main" id="{0EA00FE0-20B9-4D3F-B2EA-73C907F00004}"/>
+                <a16:creationId xmlns:a16="http://schemas.microsoft.com/office/drawing/2014/main" id="{DB5CAC9B-61DC-4363-B486-2650315B5FFC}"/>
               </a:ext>
             </a:extLst>
           </p:cNvPr>
@@ -12758,7 +12958,7 @@
           <p:cNvPr id="21" name="">
             <a:extLst xmlns:a="http://schemas.openxmlformats.org/drawingml/2006/main">
               <a:ext uri="{FF2B5EF4-FFF2-40B4-BE49-F238E27FC236}">
-                <a16:creationId xmlns:a16="http://schemas.microsoft.com/office/drawing/2014/main" id="{1E036F1E-4EB9-4D01-9252-6E04E6975796}"/>
+                <a16:creationId xmlns:a16="http://schemas.microsoft.com/office/drawing/2014/main" id="{ADCA0C4E-07D6-4032-A044-CA0EBE3B4939}"/>
               </a:ext>
             </a:extLst>
           </p:cNvPr>
@@ -12815,7 +13015,7 @@
           <p:cNvPr id="22" name="">
             <a:extLst xmlns:a="http://schemas.openxmlformats.org/drawingml/2006/main">
               <a:ext uri="{FF2B5EF4-FFF2-40B4-BE49-F238E27FC236}">
-                <a16:creationId xmlns:a16="http://schemas.microsoft.com/office/drawing/2014/main" id="{CB390AC4-ADDB-4B91-A818-9ECDC26F078D}"/>
+                <a16:creationId xmlns:a16="http://schemas.microsoft.com/office/drawing/2014/main" id="{2883C2EA-672D-429F-8DAA-F29362653E5C}"/>
               </a:ext>
             </a:extLst>
           </p:cNvPr>
@@ -12870,7 +13070,7 @@
     </p:spTree>
     <p:extLst>
       <p:ext uri="{BB962C8B-B14F-4D97-AF65-F5344CB8AC3E}">
-        <p14:creationId xmlns:p14="http://schemas.microsoft.com/office/powerpoint/2010/main" val="2095824187"/>
+        <p14:creationId xmlns:p14="http://schemas.microsoft.com/office/powerpoint/2010/main" val="1106036619"/>
       </p:ext>
     </p:extLst>
   </p:cSld>
@@ -13071,7 +13271,7 @@
           <p:cNvPr id="22" name="">
             <a:extLst xmlns:a="http://schemas.openxmlformats.org/drawingml/2006/main">
               <a:ext uri="{FF2B5EF4-FFF2-40B4-BE49-F238E27FC236}">
-                <a16:creationId xmlns:a16="http://schemas.microsoft.com/office/drawing/2014/main" id="{4A29BA30-DFDB-44FF-B86B-94991A460A17}"/>
+                <a16:creationId xmlns:a16="http://schemas.microsoft.com/office/drawing/2014/main" id="{18A5746F-D596-4CD4-9007-992A5356ED27}"/>
               </a:ext>
             </a:extLst>
           </p:cNvPr>
@@ -13103,7 +13303,7 @@
           <p:cNvPr id="2" name="">
             <a:extLst xmlns:a="http://schemas.openxmlformats.org/drawingml/2006/main">
               <a:ext uri="{FF2B5EF4-FFF2-40B4-BE49-F238E27FC236}">
-                <a16:creationId xmlns:a16="http://schemas.microsoft.com/office/drawing/2014/main" id="{3B03254F-5824-4D04-83D2-33257CF663AE}"/>
+                <a16:creationId xmlns:a16="http://schemas.microsoft.com/office/drawing/2014/main" id="{74A89106-89FF-4434-AF49-46A8672CCA81}"/>
               </a:ext>
             </a:extLst>
           </p:cNvPr>
@@ -13160,7 +13360,7 @@
           <p:cNvPr id="3" name="">
             <a:extLst xmlns:a="http://schemas.openxmlformats.org/drawingml/2006/main">
               <a:ext uri="{FF2B5EF4-FFF2-40B4-BE49-F238E27FC236}">
-                <a16:creationId xmlns:a16="http://schemas.microsoft.com/office/drawing/2014/main" id="{71EF1475-E07D-43A9-B487-4C0C0C046CC9}"/>
+                <a16:creationId xmlns:a16="http://schemas.microsoft.com/office/drawing/2014/main" id="{0DD5146A-0FFA-4388-B7ED-894854FEAB9B}"/>
               </a:ext>
             </a:extLst>
           </p:cNvPr>
@@ -13192,7 +13392,7 @@
           <p:cNvPr id="4" name="">
             <a:extLst xmlns:a="http://schemas.openxmlformats.org/drawingml/2006/main">
               <a:ext uri="{FF2B5EF4-FFF2-40B4-BE49-F238E27FC236}">
-                <a16:creationId xmlns:a16="http://schemas.microsoft.com/office/drawing/2014/main" id="{144ED7A9-1460-486C-B5C1-1D84B06D942B}"/>
+                <a16:creationId xmlns:a16="http://schemas.microsoft.com/office/drawing/2014/main" id="{BE28B283-D3E3-4786-AB78-A382099DFD0C}"/>
               </a:ext>
             </a:extLst>
           </p:cNvPr>
@@ -13249,7 +13449,7 @@
           <p:cNvPr id="5" name="">
             <a:extLst xmlns:a="http://schemas.openxmlformats.org/drawingml/2006/main">
               <a:ext uri="{FF2B5EF4-FFF2-40B4-BE49-F238E27FC236}">
-                <a16:creationId xmlns:a16="http://schemas.microsoft.com/office/drawing/2014/main" id="{81BCA2D9-6489-4624-B16E-24D1C5D22149}"/>
+                <a16:creationId xmlns:a16="http://schemas.microsoft.com/office/drawing/2014/main" id="{49C709DE-6BF4-4D00-B791-121DBEA6C93C}"/>
               </a:ext>
             </a:extLst>
           </p:cNvPr>
@@ -13306,7 +13506,7 @@
           <p:cNvPr id="6" name="">
             <a:extLst xmlns:a="http://schemas.openxmlformats.org/drawingml/2006/main">
               <a:ext uri="{FF2B5EF4-FFF2-40B4-BE49-F238E27FC236}">
-                <a16:creationId xmlns:a16="http://schemas.microsoft.com/office/drawing/2014/main" id="{31D49D35-731F-48B8-944D-EB9820B40848}"/>
+                <a16:creationId xmlns:a16="http://schemas.microsoft.com/office/drawing/2014/main" id="{DD89FD24-530A-4105-A862-49438A367253}"/>
               </a:ext>
             </a:extLst>
           </p:cNvPr>
@@ -13363,7 +13563,7 @@
           <p:cNvPr id="7" name="">
             <a:extLst xmlns:a="http://schemas.openxmlformats.org/drawingml/2006/main">
               <a:ext uri="{FF2B5EF4-FFF2-40B4-BE49-F238E27FC236}">
-                <a16:creationId xmlns:a16="http://schemas.microsoft.com/office/drawing/2014/main" id="{4A8E879A-C39B-4CBE-AF8D-783A8B09DA9A}"/>
+                <a16:creationId xmlns:a16="http://schemas.microsoft.com/office/drawing/2014/main" id="{EAFE27A0-12C6-4101-8C1F-15A299E93794}"/>
               </a:ext>
             </a:extLst>
           </p:cNvPr>
@@ -13395,7 +13595,7 @@
           <p:cNvPr id="8" name="">
             <a:extLst xmlns:a="http://schemas.openxmlformats.org/drawingml/2006/main">
               <a:ext uri="{FF2B5EF4-FFF2-40B4-BE49-F238E27FC236}">
-                <a16:creationId xmlns:a16="http://schemas.microsoft.com/office/drawing/2014/main" id="{6E356C9A-9B43-4B2B-A481-8B46D962F120}"/>
+                <a16:creationId xmlns:a16="http://schemas.microsoft.com/office/drawing/2014/main" id="{ECC67A5F-559B-47F6-B9D4-5B7C4E0CB974}"/>
               </a:ext>
             </a:extLst>
           </p:cNvPr>
@@ -13452,7 +13652,7 @@
           <p:cNvPr id="9" name="">
             <a:extLst xmlns:a="http://schemas.openxmlformats.org/drawingml/2006/main">
               <a:ext uri="{FF2B5EF4-FFF2-40B4-BE49-F238E27FC236}">
-                <a16:creationId xmlns:a16="http://schemas.microsoft.com/office/drawing/2014/main" id="{511C87B8-494E-4BA2-B339-2D6D0BFB3030}"/>
+                <a16:creationId xmlns:a16="http://schemas.microsoft.com/office/drawing/2014/main" id="{36F6E2F3-AD76-4DF6-8277-B8158589909C}"/>
               </a:ext>
             </a:extLst>
           </p:cNvPr>
@@ -13509,7 +13709,7 @@
           <p:cNvPr id="10" name="">
             <a:extLst xmlns:a="http://schemas.openxmlformats.org/drawingml/2006/main">
               <a:ext uri="{FF2B5EF4-FFF2-40B4-BE49-F238E27FC236}">
-                <a16:creationId xmlns:a16="http://schemas.microsoft.com/office/drawing/2014/main" id="{3F3E309A-58A3-47A3-83F2-DC42C78D68CB}"/>
+                <a16:creationId xmlns:a16="http://schemas.microsoft.com/office/drawing/2014/main" id="{1BCCB212-0D52-401F-89E9-40AA121560C4}"/>
               </a:ext>
             </a:extLst>
           </p:cNvPr>
@@ -13543,7 +13743,7 @@
           <p:cNvPr id="11" name="">
             <a:extLst xmlns:a="http://schemas.openxmlformats.org/drawingml/2006/main">
               <a:ext uri="{FF2B5EF4-FFF2-40B4-BE49-F238E27FC236}">
-                <a16:creationId xmlns:a16="http://schemas.microsoft.com/office/drawing/2014/main" id="{38A16D48-F304-4BC4-B34F-6467F12C35F2}"/>
+                <a16:creationId xmlns:a16="http://schemas.microsoft.com/office/drawing/2014/main" id="{BF84092B-3146-450C-8BBB-9C352AD350B6}"/>
               </a:ext>
             </a:extLst>
           </p:cNvPr>
@@ -13575,7 +13775,7 @@
           <p:cNvPr id="12" name="">
             <a:extLst xmlns:a="http://schemas.openxmlformats.org/drawingml/2006/main">
               <a:ext uri="{FF2B5EF4-FFF2-40B4-BE49-F238E27FC236}">
-                <a16:creationId xmlns:a16="http://schemas.microsoft.com/office/drawing/2014/main" id="{DE6E3A42-E79E-4B11-A99B-FA2092F5C230}"/>
+                <a16:creationId xmlns:a16="http://schemas.microsoft.com/office/drawing/2014/main" id="{6DC0665A-4885-42D1-82D4-F9E89B67019C}"/>
               </a:ext>
             </a:extLst>
           </p:cNvPr>
@@ -13632,7 +13832,7 @@
           <p:cNvPr id="13" name="">
             <a:extLst xmlns:a="http://schemas.openxmlformats.org/drawingml/2006/main">
               <a:ext uri="{FF2B5EF4-FFF2-40B4-BE49-F238E27FC236}">
-                <a16:creationId xmlns:a16="http://schemas.microsoft.com/office/drawing/2014/main" id="{A302D26D-3638-46C5-9207-20121D7DA95B}"/>
+                <a16:creationId xmlns:a16="http://schemas.microsoft.com/office/drawing/2014/main" id="{02D73B68-A8ED-48F5-97E1-B2083F4D5411}"/>
               </a:ext>
             </a:extLst>
           </p:cNvPr>
@@ -13689,7 +13889,7 @@
           <p:cNvPr id="14" name="">
             <a:extLst xmlns:a="http://schemas.openxmlformats.org/drawingml/2006/main">
               <a:ext uri="{FF2B5EF4-FFF2-40B4-BE49-F238E27FC236}">
-                <a16:creationId xmlns:a16="http://schemas.microsoft.com/office/drawing/2014/main" id="{95EC1F8D-2532-4712-BE48-E4F94CF78783}"/>
+                <a16:creationId xmlns:a16="http://schemas.microsoft.com/office/drawing/2014/main" id="{B290D3CB-AB0A-41EA-8BEA-83E34BB6F23D}"/>
               </a:ext>
             </a:extLst>
           </p:cNvPr>
@@ -13723,7 +13923,7 @@
           <p:cNvPr id="15" name="">
             <a:extLst xmlns:a="http://schemas.openxmlformats.org/drawingml/2006/main">
               <a:ext uri="{FF2B5EF4-FFF2-40B4-BE49-F238E27FC236}">
-                <a16:creationId xmlns:a16="http://schemas.microsoft.com/office/drawing/2014/main" id="{604BC991-646C-4FF9-98C4-7BE867025648}"/>
+                <a16:creationId xmlns:a16="http://schemas.microsoft.com/office/drawing/2014/main" id="{3F81BE32-6600-4A1C-8467-13D17FFB7670}"/>
               </a:ext>
             </a:extLst>
           </p:cNvPr>
@@ -13755,7 +13955,7 @@
           <p:cNvPr id="16" name="">
             <a:extLst xmlns:a="http://schemas.openxmlformats.org/drawingml/2006/main">
               <a:ext uri="{FF2B5EF4-FFF2-40B4-BE49-F238E27FC236}">
-                <a16:creationId xmlns:a16="http://schemas.microsoft.com/office/drawing/2014/main" id="{C20C2D7F-F779-4001-BDE6-73F920C3FE44}"/>
+                <a16:creationId xmlns:a16="http://schemas.microsoft.com/office/drawing/2014/main" id="{37BE28E1-1AE0-41DD-A20E-A5C3AB3522F7}"/>
               </a:ext>
             </a:extLst>
           </p:cNvPr>
@@ -13812,7 +14012,7 @@
           <p:cNvPr id="17" name="">
             <a:extLst xmlns:a="http://schemas.openxmlformats.org/drawingml/2006/main">
               <a:ext uri="{FF2B5EF4-FFF2-40B4-BE49-F238E27FC236}">
-                <a16:creationId xmlns:a16="http://schemas.microsoft.com/office/drawing/2014/main" id="{396D8501-72F5-4723-BFB8-79BB508AA1E6}"/>
+                <a16:creationId xmlns:a16="http://schemas.microsoft.com/office/drawing/2014/main" id="{4E5D021C-F045-4C44-9D67-F4192D5F4040}"/>
               </a:ext>
             </a:extLst>
           </p:cNvPr>
@@ -13869,7 +14069,7 @@
           <p:cNvPr id="18" name="">
             <a:extLst xmlns:a="http://schemas.openxmlformats.org/drawingml/2006/main">
               <a:ext uri="{FF2B5EF4-FFF2-40B4-BE49-F238E27FC236}">
-                <a16:creationId xmlns:a16="http://schemas.microsoft.com/office/drawing/2014/main" id="{6923C85F-0F49-4B13-8771-D10883A380FA}"/>
+                <a16:creationId xmlns:a16="http://schemas.microsoft.com/office/drawing/2014/main" id="{46DD1212-C705-455D-9ED2-EE34EDF2E944}"/>
               </a:ext>
             </a:extLst>
           </p:cNvPr>
@@ -13903,7 +14103,7 @@
           <p:cNvPr id="19" name="">
             <a:extLst xmlns:a="http://schemas.openxmlformats.org/drawingml/2006/main">
               <a:ext uri="{FF2B5EF4-FFF2-40B4-BE49-F238E27FC236}">
-                <a16:creationId xmlns:a16="http://schemas.microsoft.com/office/drawing/2014/main" id="{6641DF85-ABB2-433A-829B-C54D47775DE5}"/>
+                <a16:creationId xmlns:a16="http://schemas.microsoft.com/office/drawing/2014/main" id="{7669797F-B232-487D-AAA1-7963686109D0}"/>
               </a:ext>
             </a:extLst>
           </p:cNvPr>
@@ -13935,7 +14135,7 @@
           <p:cNvPr id="20" name="">
             <a:extLst xmlns:a="http://schemas.openxmlformats.org/drawingml/2006/main">
               <a:ext uri="{FF2B5EF4-FFF2-40B4-BE49-F238E27FC236}">
-                <a16:creationId xmlns:a16="http://schemas.microsoft.com/office/drawing/2014/main" id="{40C7BF71-FE66-46FA-BF1A-BE0A3B8DF1F5}"/>
+                <a16:creationId xmlns:a16="http://schemas.microsoft.com/office/drawing/2014/main" id="{7FF7EAEB-D9BD-44B2-9B65-8B24E9399BCF}"/>
               </a:ext>
             </a:extLst>
           </p:cNvPr>
@@ -13992,7 +14192,7 @@
           <p:cNvPr id="21" name="">
             <a:extLst xmlns:a="http://schemas.openxmlformats.org/drawingml/2006/main">
               <a:ext uri="{FF2B5EF4-FFF2-40B4-BE49-F238E27FC236}">
-                <a16:creationId xmlns:a16="http://schemas.microsoft.com/office/drawing/2014/main" id="{2A35BB1F-0578-4A0F-8ACB-947534849D51}"/>
+                <a16:creationId xmlns:a16="http://schemas.microsoft.com/office/drawing/2014/main" id="{6C3E0D4F-44F7-4293-A3D8-A6165A912228}"/>
               </a:ext>
             </a:extLst>
           </p:cNvPr>
@@ -14047,7 +14247,7 @@
     </p:spTree>
     <p:extLst>
       <p:ext uri="{BB962C8B-B14F-4D97-AF65-F5344CB8AC3E}">
-        <p14:creationId xmlns:p14="http://schemas.microsoft.com/office/powerpoint/2010/main" val="416294284"/>
+        <p14:creationId xmlns:p14="http://schemas.microsoft.com/office/powerpoint/2010/main" val="233119383"/>
       </p:ext>
     </p:extLst>
   </p:cSld>

--- a/public/lessons/year-6-maths/summer/week-29/choose-efficient-representations/teaching-powerpoint-v1.pptx
+++ b/public/lessons/year-6-maths/summer/week-29/choose-efficient-representations/teaching-powerpoint-v1.pptx
@@ -1556,7 +1556,7 @@
           <p:cNvPr id="7" name="object-1">
             <a:extLst>
               <a:ext uri="{FF2B5EF4-FFF2-40B4-BE49-F238E27FC236}">
-                <a16:creationId xmlns:a16="http://schemas.microsoft.com/office/drawing/2014/main" id="{0606C7AB-6D50-49E8-B09C-BF9BA1D1B291}"/>
+                <a16:creationId xmlns:a16="http://schemas.microsoft.com/office/drawing/2014/main" id="{36434F53-4553-4F50-A972-46B61FFDF4D5}"/>
               </a:ext>
             </a:extLst>
           </p:cNvPr>
@@ -1613,7 +1613,7 @@
           <p:cNvPr id="2" name="object-2">
             <a:extLst>
               <a:ext uri="{FF2B5EF4-FFF2-40B4-BE49-F238E27FC236}">
-                <a16:creationId xmlns:a16="http://schemas.microsoft.com/office/drawing/2014/main" id="{B6AC93D6-EC7E-4220-A3AE-610DA56544A5}"/>
+                <a16:creationId xmlns:a16="http://schemas.microsoft.com/office/drawing/2014/main" id="{1A143B4D-2A66-4D11-B578-D85641EE9541}"/>
               </a:ext>
             </a:extLst>
           </p:cNvPr>
@@ -1670,7 +1670,7 @@
           <p:cNvPr id="3" name="object-3">
             <a:extLst>
               <a:ext uri="{FF2B5EF4-FFF2-40B4-BE49-F238E27FC236}">
-                <a16:creationId xmlns:a16="http://schemas.microsoft.com/office/drawing/2014/main" id="{DEFC9C1A-C9A6-455F-B174-6FE993497EAD}"/>
+                <a16:creationId xmlns:a16="http://schemas.microsoft.com/office/drawing/2014/main" id="{29C56922-6F8D-40BA-9636-9B3509968272}"/>
               </a:ext>
             </a:extLst>
           </p:cNvPr>
@@ -1700,7 +1700,7 @@
           <p:cNvPr id="4" name="object-4">
             <a:extLst>
               <a:ext uri="{FF2B5EF4-FFF2-40B4-BE49-F238E27FC236}">
-                <a16:creationId xmlns:a16="http://schemas.microsoft.com/office/drawing/2014/main" id="{C2311A81-DB95-4DF9-A624-46F371D1FBF4}"/>
+                <a16:creationId xmlns:a16="http://schemas.microsoft.com/office/drawing/2014/main" id="{992EB2B3-72B5-400B-86E0-5C36F6B91196}"/>
               </a:ext>
             </a:extLst>
           </p:cNvPr>
@@ -1757,7 +1757,7 @@
           <p:cNvPr id="5" name="object-5">
             <a:extLst>
               <a:ext uri="{FF2B5EF4-FFF2-40B4-BE49-F238E27FC236}">
-                <a16:creationId xmlns:a16="http://schemas.microsoft.com/office/drawing/2014/main" id="{54B64D8A-4849-4013-99F0-4FEFD4A19414}"/>
+                <a16:creationId xmlns:a16="http://schemas.microsoft.com/office/drawing/2014/main" id="{6BF48273-B963-40DA-BC37-BC358925CFE6}"/>
               </a:ext>
             </a:extLst>
           </p:cNvPr>
@@ -1814,7 +1814,7 @@
           <p:cNvPr id="6" name="object-6">
             <a:extLst>
               <a:ext uri="{FF2B5EF4-FFF2-40B4-BE49-F238E27FC236}">
-                <a16:creationId xmlns:a16="http://schemas.microsoft.com/office/drawing/2014/main" id="{1060F860-2E7F-4B29-A10C-74762C4294D2}"/>
+                <a16:creationId xmlns:a16="http://schemas.microsoft.com/office/drawing/2014/main" id="{A130B299-490F-428A-B4BC-B65ABA960582}"/>
               </a:ext>
             </a:extLst>
           </p:cNvPr>
@@ -1869,7 +1869,7 @@
     </p:spTree>
     <p:extLst>
       <p:ext uri="{BB962C8B-B14F-4D97-AF65-F5344CB8AC3E}">
-        <p14:creationId xmlns:p14="http://schemas.microsoft.com/office/powerpoint/2010/main" val="614951011"/>
+        <p14:creationId xmlns:p14="http://schemas.microsoft.com/office/powerpoint/2010/main" val="1404967137"/>
       </p:ext>
     </p:extLst>
   </p:cSld>
@@ -1909,7 +1909,7 @@
           <p:cNvPr id="27" name="object-1">
             <a:extLst>
               <a:ext uri="{FF2B5EF4-FFF2-40B4-BE49-F238E27FC236}">
-                <a16:creationId xmlns:a16="http://schemas.microsoft.com/office/drawing/2014/main" id="{21DDD59E-5EBF-4D2B-9674-03CDC62C2EFD}"/>
+                <a16:creationId xmlns:a16="http://schemas.microsoft.com/office/drawing/2014/main" id="{AA697AC1-7E48-4727-8ABF-9B821B2E5975}"/>
               </a:ext>
             </a:extLst>
           </p:cNvPr>
@@ -1966,7 +1966,7 @@
           <p:cNvPr id="2" name="object-2">
             <a:extLst>
               <a:ext uri="{FF2B5EF4-FFF2-40B4-BE49-F238E27FC236}">
-                <a16:creationId xmlns:a16="http://schemas.microsoft.com/office/drawing/2014/main" id="{F9876A32-50CF-477B-8ACA-49F35E35965E}"/>
+                <a16:creationId xmlns:a16="http://schemas.microsoft.com/office/drawing/2014/main" id="{51D03783-5A7E-42E2-BAA2-CCC7280331F5}"/>
               </a:ext>
             </a:extLst>
           </p:cNvPr>
@@ -2023,7 +2023,7 @@
           <p:cNvPr id="3" name="object-3">
             <a:extLst>
               <a:ext uri="{FF2B5EF4-FFF2-40B4-BE49-F238E27FC236}">
-                <a16:creationId xmlns:a16="http://schemas.microsoft.com/office/drawing/2014/main" id="{C63539BA-D6A8-4A0F-9F07-2124BFE8610A}"/>
+                <a16:creationId xmlns:a16="http://schemas.microsoft.com/office/drawing/2014/main" id="{AE1E3405-1309-490E-A653-1583DD0FB28C}"/>
               </a:ext>
             </a:extLst>
           </p:cNvPr>
@@ -2080,7 +2080,7 @@
           <p:cNvPr id="4" name="object-4">
             <a:extLst>
               <a:ext uri="{FF2B5EF4-FFF2-40B4-BE49-F238E27FC236}">
-                <a16:creationId xmlns:a16="http://schemas.microsoft.com/office/drawing/2014/main" id="{0987553C-7C10-4441-A59C-52F972BD7079}"/>
+                <a16:creationId xmlns:a16="http://schemas.microsoft.com/office/drawing/2014/main" id="{5BD77AD5-6102-4E4E-9584-545132D2FA62}"/>
               </a:ext>
             </a:extLst>
           </p:cNvPr>
@@ -2110,7 +2110,7 @@
           <p:cNvPr id="5" name="object-5">
             <a:extLst>
               <a:ext uri="{FF2B5EF4-FFF2-40B4-BE49-F238E27FC236}">
-                <a16:creationId xmlns:a16="http://schemas.microsoft.com/office/drawing/2014/main" id="{AA6ED594-45D2-498B-87B9-415573572335}"/>
+                <a16:creationId xmlns:a16="http://schemas.microsoft.com/office/drawing/2014/main" id="{F8D4593E-1C09-47E3-9BBD-F20011239BF4}"/>
               </a:ext>
             </a:extLst>
           </p:cNvPr>
@@ -2167,7 +2167,7 @@
           <p:cNvPr id="6" name="object-6">
             <a:extLst>
               <a:ext uri="{FF2B5EF4-FFF2-40B4-BE49-F238E27FC236}">
-                <a16:creationId xmlns:a16="http://schemas.microsoft.com/office/drawing/2014/main" id="{683B3D78-C394-492B-A520-A5EB5FE87137}"/>
+                <a16:creationId xmlns:a16="http://schemas.microsoft.com/office/drawing/2014/main" id="{0FE4A36F-9440-4428-AEAD-954EC8DA7C26}"/>
               </a:ext>
             </a:extLst>
           </p:cNvPr>
@@ -2224,7 +2224,7 @@
           <p:cNvPr id="7" name="object-7">
             <a:extLst>
               <a:ext uri="{FF2B5EF4-FFF2-40B4-BE49-F238E27FC236}">
-                <a16:creationId xmlns:a16="http://schemas.microsoft.com/office/drawing/2014/main" id="{20FFD12B-7106-470F-BD8B-27C63D9F511F}"/>
+                <a16:creationId xmlns:a16="http://schemas.microsoft.com/office/drawing/2014/main" id="{4546D06A-09E2-4F30-BBF3-76E0F2C494FD}"/>
               </a:ext>
             </a:extLst>
           </p:cNvPr>
@@ -2281,7 +2281,7 @@
           <p:cNvPr id="8" name="object-8">
             <a:extLst>
               <a:ext uri="{FF2B5EF4-FFF2-40B4-BE49-F238E27FC236}">
-                <a16:creationId xmlns:a16="http://schemas.microsoft.com/office/drawing/2014/main" id="{C7027190-E7E7-452D-B607-12D9C2167BE6}"/>
+                <a16:creationId xmlns:a16="http://schemas.microsoft.com/office/drawing/2014/main" id="{4A4C445D-32EE-4C15-A287-B585C23D1941}"/>
               </a:ext>
             </a:extLst>
           </p:cNvPr>
@@ -2338,7 +2338,7 @@
           <p:cNvPr id="9" name="object-9">
             <a:extLst>
               <a:ext uri="{FF2B5EF4-FFF2-40B4-BE49-F238E27FC236}">
-                <a16:creationId xmlns:a16="http://schemas.microsoft.com/office/drawing/2014/main" id="{FADD5C01-7C5E-4F73-9CDE-9D7D0C5D3122}"/>
+                <a16:creationId xmlns:a16="http://schemas.microsoft.com/office/drawing/2014/main" id="{E4D98B77-1AB6-4CD1-BCD9-4222D735B641}"/>
               </a:ext>
             </a:extLst>
           </p:cNvPr>
@@ -2395,7 +2395,7 @@
           <p:cNvPr id="10" name="object-10">
             <a:extLst>
               <a:ext uri="{FF2B5EF4-FFF2-40B4-BE49-F238E27FC236}">
-                <a16:creationId xmlns:a16="http://schemas.microsoft.com/office/drawing/2014/main" id="{83319939-0D12-4FF7-84B3-C508396286BE}"/>
+                <a16:creationId xmlns:a16="http://schemas.microsoft.com/office/drawing/2014/main" id="{7B16E363-E417-4353-A033-EA45F0C56827}"/>
               </a:ext>
             </a:extLst>
           </p:cNvPr>
@@ -2452,7 +2452,7 @@
           <p:cNvPr id="11" name="object-11">
             <a:extLst>
               <a:ext uri="{FF2B5EF4-FFF2-40B4-BE49-F238E27FC236}">
-                <a16:creationId xmlns:a16="http://schemas.microsoft.com/office/drawing/2014/main" id="{A2F08A9A-5BD9-47A5-8AA5-118BD5433AFD}"/>
+                <a16:creationId xmlns:a16="http://schemas.microsoft.com/office/drawing/2014/main" id="{F5FF031D-D834-44CB-8D72-1F464DB0DF26}"/>
               </a:ext>
             </a:extLst>
           </p:cNvPr>
@@ -2509,7 +2509,7 @@
           <p:cNvPr id="12" name="object-12">
             <a:extLst>
               <a:ext uri="{FF2B5EF4-FFF2-40B4-BE49-F238E27FC236}">
-                <a16:creationId xmlns:a16="http://schemas.microsoft.com/office/drawing/2014/main" id="{216A390B-EC5D-4500-8D1C-4CC92435A5EB}"/>
+                <a16:creationId xmlns:a16="http://schemas.microsoft.com/office/drawing/2014/main" id="{C099C9E7-6A45-4C01-A30B-D481A5622A71}"/>
               </a:ext>
             </a:extLst>
           </p:cNvPr>
@@ -2566,7 +2566,7 @@
           <p:cNvPr id="13" name="object-13">
             <a:extLst>
               <a:ext uri="{FF2B5EF4-FFF2-40B4-BE49-F238E27FC236}">
-                <a16:creationId xmlns:a16="http://schemas.microsoft.com/office/drawing/2014/main" id="{A28B74CC-8499-4C13-976F-CEFD761767F4}"/>
+                <a16:creationId xmlns:a16="http://schemas.microsoft.com/office/drawing/2014/main" id="{C656BAF2-4F0C-4C06-9CE6-904D32F28A1B}"/>
               </a:ext>
             </a:extLst>
           </p:cNvPr>
@@ -2623,7 +2623,7 @@
           <p:cNvPr id="14" name="object-14">
             <a:extLst>
               <a:ext uri="{FF2B5EF4-FFF2-40B4-BE49-F238E27FC236}">
-                <a16:creationId xmlns:a16="http://schemas.microsoft.com/office/drawing/2014/main" id="{A1C9B858-F9C7-41F3-BE8B-FFD525D0CC5B}"/>
+                <a16:creationId xmlns:a16="http://schemas.microsoft.com/office/drawing/2014/main" id="{0659C6EA-3441-4C4C-B6DE-CBC5841F0F74}"/>
               </a:ext>
             </a:extLst>
           </p:cNvPr>
@@ -2680,7 +2680,7 @@
           <p:cNvPr id="15" name="object-15">
             <a:extLst>
               <a:ext uri="{FF2B5EF4-FFF2-40B4-BE49-F238E27FC236}">
-                <a16:creationId xmlns:a16="http://schemas.microsoft.com/office/drawing/2014/main" id="{451E6C7E-7FB2-41AC-BD6D-63EB3224AB23}"/>
+                <a16:creationId xmlns:a16="http://schemas.microsoft.com/office/drawing/2014/main" id="{7A76AE8F-C021-4151-9772-4DE7B58B76C2}"/>
               </a:ext>
             </a:extLst>
           </p:cNvPr>
@@ -2737,7 +2737,7 @@
           <p:cNvPr id="16" name="object-16">
             <a:extLst>
               <a:ext uri="{FF2B5EF4-FFF2-40B4-BE49-F238E27FC236}">
-                <a16:creationId xmlns:a16="http://schemas.microsoft.com/office/drawing/2014/main" id="{DA9A576A-C980-4C07-9AF8-363B55A611BA}"/>
+                <a16:creationId xmlns:a16="http://schemas.microsoft.com/office/drawing/2014/main" id="{A03A9461-2C43-44EB-A328-B801FDE172C5}"/>
               </a:ext>
             </a:extLst>
           </p:cNvPr>
@@ -2794,7 +2794,7 @@
           <p:cNvPr id="17" name="object-17">
             <a:extLst>
               <a:ext uri="{FF2B5EF4-FFF2-40B4-BE49-F238E27FC236}">
-                <a16:creationId xmlns:a16="http://schemas.microsoft.com/office/drawing/2014/main" id="{701C2C43-42F3-4CF9-BD9F-96335D6D7090}"/>
+                <a16:creationId xmlns:a16="http://schemas.microsoft.com/office/drawing/2014/main" id="{EAD8FCC3-C122-45CE-8C58-D429C7712EF8}"/>
               </a:ext>
             </a:extLst>
           </p:cNvPr>
@@ -2851,7 +2851,7 @@
           <p:cNvPr id="18" name="object-18">
             <a:extLst>
               <a:ext uri="{FF2B5EF4-FFF2-40B4-BE49-F238E27FC236}">
-                <a16:creationId xmlns:a16="http://schemas.microsoft.com/office/drawing/2014/main" id="{10BF0D46-32C6-4680-A23F-6867C4C9A180}"/>
+                <a16:creationId xmlns:a16="http://schemas.microsoft.com/office/drawing/2014/main" id="{44078CB7-E2A9-4164-B10B-AAF5E1002FFF}"/>
               </a:ext>
             </a:extLst>
           </p:cNvPr>
@@ -2908,7 +2908,7 @@
           <p:cNvPr id="19" name="object-19">
             <a:extLst>
               <a:ext uri="{FF2B5EF4-FFF2-40B4-BE49-F238E27FC236}">
-                <a16:creationId xmlns:a16="http://schemas.microsoft.com/office/drawing/2014/main" id="{1449AC12-987D-43C8-BFB0-6A531249EF72}"/>
+                <a16:creationId xmlns:a16="http://schemas.microsoft.com/office/drawing/2014/main" id="{5ED84715-4B0F-4380-AD8B-02688E880D55}"/>
               </a:ext>
             </a:extLst>
           </p:cNvPr>
@@ -2965,7 +2965,7 @@
           <p:cNvPr id="20" name="object-20">
             <a:extLst>
               <a:ext uri="{FF2B5EF4-FFF2-40B4-BE49-F238E27FC236}">
-                <a16:creationId xmlns:a16="http://schemas.microsoft.com/office/drawing/2014/main" id="{DDE5D93D-ABC7-4758-9EE2-B829E3E5B653}"/>
+                <a16:creationId xmlns:a16="http://schemas.microsoft.com/office/drawing/2014/main" id="{3D5E7042-DF90-4560-A417-33257A49507E}"/>
               </a:ext>
             </a:extLst>
           </p:cNvPr>
@@ -3022,7 +3022,7 @@
           <p:cNvPr id="21" name="object-21">
             <a:extLst>
               <a:ext uri="{FF2B5EF4-FFF2-40B4-BE49-F238E27FC236}">
-                <a16:creationId xmlns:a16="http://schemas.microsoft.com/office/drawing/2014/main" id="{71BA237C-6DF7-4F68-B0D5-37AE503EDDFE}"/>
+                <a16:creationId xmlns:a16="http://schemas.microsoft.com/office/drawing/2014/main" id="{9730D976-4D70-41FA-BAB9-2B02EE459D18}"/>
               </a:ext>
             </a:extLst>
           </p:cNvPr>
@@ -3079,7 +3079,7 @@
           <p:cNvPr id="22" name="object-22">
             <a:extLst>
               <a:ext uri="{FF2B5EF4-FFF2-40B4-BE49-F238E27FC236}">
-                <a16:creationId xmlns:a16="http://schemas.microsoft.com/office/drawing/2014/main" id="{95F57C3F-9767-472C-9A79-22DBBFCD1B31}"/>
+                <a16:creationId xmlns:a16="http://schemas.microsoft.com/office/drawing/2014/main" id="{FBB0CCAF-F0E3-4013-B6F6-45015755F287}"/>
               </a:ext>
             </a:extLst>
           </p:cNvPr>
@@ -3136,7 +3136,7 @@
           <p:cNvPr id="23" name="object-23">
             <a:extLst>
               <a:ext uri="{FF2B5EF4-FFF2-40B4-BE49-F238E27FC236}">
-                <a16:creationId xmlns:a16="http://schemas.microsoft.com/office/drawing/2014/main" id="{B26E40C6-D0AC-4968-9D4D-373288F65E89}"/>
+                <a16:creationId xmlns:a16="http://schemas.microsoft.com/office/drawing/2014/main" id="{B32F2FDB-3C93-4949-92FD-EAE6FE4B6D72}"/>
               </a:ext>
             </a:extLst>
           </p:cNvPr>
@@ -3193,7 +3193,7 @@
           <p:cNvPr id="24" name="object-24">
             <a:extLst>
               <a:ext uri="{FF2B5EF4-FFF2-40B4-BE49-F238E27FC236}">
-                <a16:creationId xmlns:a16="http://schemas.microsoft.com/office/drawing/2014/main" id="{18A1EDA1-D845-4566-9A50-0DA8F3C998C1}"/>
+                <a16:creationId xmlns:a16="http://schemas.microsoft.com/office/drawing/2014/main" id="{0A01558B-1FFA-4755-81A3-B23307141693}"/>
               </a:ext>
             </a:extLst>
           </p:cNvPr>
@@ -3250,7 +3250,7 @@
           <p:cNvPr id="25" name="object-25">
             <a:extLst>
               <a:ext uri="{FF2B5EF4-FFF2-40B4-BE49-F238E27FC236}">
-                <a16:creationId xmlns:a16="http://schemas.microsoft.com/office/drawing/2014/main" id="{25B9B8CD-062C-49AB-B7CD-BC88842E72A1}"/>
+                <a16:creationId xmlns:a16="http://schemas.microsoft.com/office/drawing/2014/main" id="{3CCA8114-41BA-459A-845A-F046F0490D5C}"/>
               </a:ext>
             </a:extLst>
           </p:cNvPr>
@@ -3307,7 +3307,7 @@
           <p:cNvPr id="26" name="object-26">
             <a:extLst>
               <a:ext uri="{FF2B5EF4-FFF2-40B4-BE49-F238E27FC236}">
-                <a16:creationId xmlns:a16="http://schemas.microsoft.com/office/drawing/2014/main" id="{4C3A1958-5B4A-4FA1-9C16-CE877D235A54}"/>
+                <a16:creationId xmlns:a16="http://schemas.microsoft.com/office/drawing/2014/main" id="{16C4127C-F161-45EA-BEB4-1644FF41CA67}"/>
               </a:ext>
             </a:extLst>
           </p:cNvPr>
@@ -3362,7 +3362,7 @@
     </p:spTree>
     <p:extLst>
       <p:ext uri="{BB962C8B-B14F-4D97-AF65-F5344CB8AC3E}">
-        <p14:creationId xmlns:p14="http://schemas.microsoft.com/office/powerpoint/2010/main" val="34304482"/>
+        <p14:creationId xmlns:p14="http://schemas.microsoft.com/office/powerpoint/2010/main" val="863919708"/>
       </p:ext>
     </p:extLst>
   </p:cSld>
@@ -3402,7 +3402,7 @@
           <p:cNvPr id="26" name="object-1">
             <a:extLst>
               <a:ext uri="{FF2B5EF4-FFF2-40B4-BE49-F238E27FC236}">
-                <a16:creationId xmlns:a16="http://schemas.microsoft.com/office/drawing/2014/main" id="{72C21344-DE96-4129-889D-4698A6B17E1E}"/>
+                <a16:creationId xmlns:a16="http://schemas.microsoft.com/office/drawing/2014/main" id="{961FD1A1-4DA9-40B4-AD6D-C7E1B2B5DF0E}"/>
               </a:ext>
             </a:extLst>
           </p:cNvPr>
@@ -3459,7 +3459,7 @@
           <p:cNvPr id="2" name="object-2">
             <a:extLst>
               <a:ext uri="{FF2B5EF4-FFF2-40B4-BE49-F238E27FC236}">
-                <a16:creationId xmlns:a16="http://schemas.microsoft.com/office/drawing/2014/main" id="{50DEDA65-5AD0-493D-B756-5002874B36C5}"/>
+                <a16:creationId xmlns:a16="http://schemas.microsoft.com/office/drawing/2014/main" id="{D040212B-CCB7-4D80-89FA-15949EBAD6AD}"/>
               </a:ext>
             </a:extLst>
           </p:cNvPr>
@@ -3516,7 +3516,7 @@
           <p:cNvPr id="3" name="object-3">
             <a:extLst>
               <a:ext uri="{FF2B5EF4-FFF2-40B4-BE49-F238E27FC236}">
-                <a16:creationId xmlns:a16="http://schemas.microsoft.com/office/drawing/2014/main" id="{C547D0D1-3E65-4683-B56C-8BF49248C7AA}"/>
+                <a16:creationId xmlns:a16="http://schemas.microsoft.com/office/drawing/2014/main" id="{57713C29-9B35-4180-918C-3EAD6ECE2199}"/>
               </a:ext>
             </a:extLst>
           </p:cNvPr>
@@ -3546,7 +3546,7 @@
           <p:cNvPr id="4" name="object-4">
             <a:extLst>
               <a:ext uri="{FF2B5EF4-FFF2-40B4-BE49-F238E27FC236}">
-                <a16:creationId xmlns:a16="http://schemas.microsoft.com/office/drawing/2014/main" id="{059AD014-9CBA-457C-8415-E8A3BF6D5DFD}"/>
+                <a16:creationId xmlns:a16="http://schemas.microsoft.com/office/drawing/2014/main" id="{807AAD7A-FBC1-4D52-A3BC-754291D95C02}"/>
               </a:ext>
             </a:extLst>
           </p:cNvPr>
@@ -3603,7 +3603,7 @@
           <p:cNvPr id="5" name="object-5">
             <a:extLst>
               <a:ext uri="{FF2B5EF4-FFF2-40B4-BE49-F238E27FC236}">
-                <a16:creationId xmlns:a16="http://schemas.microsoft.com/office/drawing/2014/main" id="{94A2AA0A-CC1E-4525-95F0-455494014F6C}"/>
+                <a16:creationId xmlns:a16="http://schemas.microsoft.com/office/drawing/2014/main" id="{0C1BB887-9C45-4464-A3C8-E0DA07AF94E7}"/>
               </a:ext>
             </a:extLst>
           </p:cNvPr>
@@ -3660,7 +3660,7 @@
           <p:cNvPr id="6" name="object-6">
             <a:extLst>
               <a:ext uri="{FF2B5EF4-FFF2-40B4-BE49-F238E27FC236}">
-                <a16:creationId xmlns:a16="http://schemas.microsoft.com/office/drawing/2014/main" id="{FF0992F8-8B1C-42F3-B340-ABA280277E8C}"/>
+                <a16:creationId xmlns:a16="http://schemas.microsoft.com/office/drawing/2014/main" id="{D8C27CC6-3C06-4C9F-843E-D804DCB00924}"/>
               </a:ext>
             </a:extLst>
           </p:cNvPr>
@@ -3717,7 +3717,7 @@
           <p:cNvPr id="7" name="object-7">
             <a:extLst>
               <a:ext uri="{FF2B5EF4-FFF2-40B4-BE49-F238E27FC236}">
-                <a16:creationId xmlns:a16="http://schemas.microsoft.com/office/drawing/2014/main" id="{537F4592-4973-4BF2-97D7-885F5EDD3B15}"/>
+                <a16:creationId xmlns:a16="http://schemas.microsoft.com/office/drawing/2014/main" id="{58D96876-4AA5-4774-8464-684F4CC3F323}"/>
               </a:ext>
             </a:extLst>
           </p:cNvPr>
@@ -3774,7 +3774,7 @@
           <p:cNvPr id="8" name="object-8">
             <a:extLst>
               <a:ext uri="{FF2B5EF4-FFF2-40B4-BE49-F238E27FC236}">
-                <a16:creationId xmlns:a16="http://schemas.microsoft.com/office/drawing/2014/main" id="{A5117FC4-AA47-43BD-B344-7B54A4270FEF}"/>
+                <a16:creationId xmlns:a16="http://schemas.microsoft.com/office/drawing/2014/main" id="{0F3F7A61-E21C-4F5A-B6F3-71B3EED24594}"/>
               </a:ext>
             </a:extLst>
           </p:cNvPr>
@@ -3831,7 +3831,7 @@
           <p:cNvPr id="9" name="object-9">
             <a:extLst>
               <a:ext uri="{FF2B5EF4-FFF2-40B4-BE49-F238E27FC236}">
-                <a16:creationId xmlns:a16="http://schemas.microsoft.com/office/drawing/2014/main" id="{A9932207-F91D-487F-9652-F4902B7FBBEF}"/>
+                <a16:creationId xmlns:a16="http://schemas.microsoft.com/office/drawing/2014/main" id="{4F2A0152-FBB7-42AB-A313-F79D6255F2C1}"/>
               </a:ext>
             </a:extLst>
           </p:cNvPr>
@@ -3888,7 +3888,7 @@
           <p:cNvPr id="10" name="object-10">
             <a:extLst>
               <a:ext uri="{FF2B5EF4-FFF2-40B4-BE49-F238E27FC236}">
-                <a16:creationId xmlns:a16="http://schemas.microsoft.com/office/drawing/2014/main" id="{725C0B62-AAF2-4F1B-839C-5A0602B2DA79}"/>
+                <a16:creationId xmlns:a16="http://schemas.microsoft.com/office/drawing/2014/main" id="{4BD7207F-9FDC-443C-B32E-4EF04CE072E1}"/>
               </a:ext>
             </a:extLst>
           </p:cNvPr>
@@ -3945,7 +3945,7 @@
           <p:cNvPr id="11" name="object-11">
             <a:extLst>
               <a:ext uri="{FF2B5EF4-FFF2-40B4-BE49-F238E27FC236}">
-                <a16:creationId xmlns:a16="http://schemas.microsoft.com/office/drawing/2014/main" id="{854D1CC4-3C8D-4A94-BDDF-3CB75089AD3F}"/>
+                <a16:creationId xmlns:a16="http://schemas.microsoft.com/office/drawing/2014/main" id="{A0DE0DA3-6A92-41A1-AC70-51394B42221B}"/>
               </a:ext>
             </a:extLst>
           </p:cNvPr>
@@ -4002,7 +4002,7 @@
           <p:cNvPr id="12" name="object-12">
             <a:extLst>
               <a:ext uri="{FF2B5EF4-FFF2-40B4-BE49-F238E27FC236}">
-                <a16:creationId xmlns:a16="http://schemas.microsoft.com/office/drawing/2014/main" id="{E1632870-928E-4DCA-9309-1A9522F1D434}"/>
+                <a16:creationId xmlns:a16="http://schemas.microsoft.com/office/drawing/2014/main" id="{8E918B3C-6187-401F-86FF-5F22443F09C2}"/>
               </a:ext>
             </a:extLst>
           </p:cNvPr>
@@ -4059,7 +4059,7 @@
           <p:cNvPr id="13" name="object-13">
             <a:extLst>
               <a:ext uri="{FF2B5EF4-FFF2-40B4-BE49-F238E27FC236}">
-                <a16:creationId xmlns:a16="http://schemas.microsoft.com/office/drawing/2014/main" id="{8CE18F04-B9EA-4B07-880E-38466A8D7EA0}"/>
+                <a16:creationId xmlns:a16="http://schemas.microsoft.com/office/drawing/2014/main" id="{F71A6F06-5FD2-418A-A4E7-1C5549DC1672}"/>
               </a:ext>
             </a:extLst>
           </p:cNvPr>
@@ -4116,7 +4116,7 @@
           <p:cNvPr id="14" name="object-14">
             <a:extLst>
               <a:ext uri="{FF2B5EF4-FFF2-40B4-BE49-F238E27FC236}">
-                <a16:creationId xmlns:a16="http://schemas.microsoft.com/office/drawing/2014/main" id="{67AACBFD-8913-4312-9C1E-8BB0323CC991}"/>
+                <a16:creationId xmlns:a16="http://schemas.microsoft.com/office/drawing/2014/main" id="{5E400342-86C1-4EB7-AA5E-9015B4A3BDCC}"/>
               </a:ext>
             </a:extLst>
           </p:cNvPr>
@@ -4173,7 +4173,7 @@
           <p:cNvPr id="15" name="object-15">
             <a:extLst>
               <a:ext uri="{FF2B5EF4-FFF2-40B4-BE49-F238E27FC236}">
-                <a16:creationId xmlns:a16="http://schemas.microsoft.com/office/drawing/2014/main" id="{2FE7270C-37C8-425C-9797-506DFCEBFA31}"/>
+                <a16:creationId xmlns:a16="http://schemas.microsoft.com/office/drawing/2014/main" id="{373A9FD4-7660-4E45-90DE-AA72E0A12D5B}"/>
               </a:ext>
             </a:extLst>
           </p:cNvPr>
@@ -4230,7 +4230,7 @@
           <p:cNvPr id="16" name="object-16">
             <a:extLst>
               <a:ext uri="{FF2B5EF4-FFF2-40B4-BE49-F238E27FC236}">
-                <a16:creationId xmlns:a16="http://schemas.microsoft.com/office/drawing/2014/main" id="{ED9D4149-BEF3-4EDE-8E6E-90C3A6F92E6F}"/>
+                <a16:creationId xmlns:a16="http://schemas.microsoft.com/office/drawing/2014/main" id="{EAF4B70D-D03B-4988-9D74-47BDFF0D3A7C}"/>
               </a:ext>
             </a:extLst>
           </p:cNvPr>
@@ -4287,7 +4287,7 @@
           <p:cNvPr id="17" name="object-17">
             <a:extLst>
               <a:ext uri="{FF2B5EF4-FFF2-40B4-BE49-F238E27FC236}">
-                <a16:creationId xmlns:a16="http://schemas.microsoft.com/office/drawing/2014/main" id="{3B12ED83-DA42-46E0-A8D3-5DBE7CFC3DBF}"/>
+                <a16:creationId xmlns:a16="http://schemas.microsoft.com/office/drawing/2014/main" id="{8B16B767-C42C-4334-8BA6-25ED50212675}"/>
               </a:ext>
             </a:extLst>
           </p:cNvPr>
@@ -4344,7 +4344,7 @@
           <p:cNvPr id="18" name="object-18">
             <a:extLst>
               <a:ext uri="{FF2B5EF4-FFF2-40B4-BE49-F238E27FC236}">
-                <a16:creationId xmlns:a16="http://schemas.microsoft.com/office/drawing/2014/main" id="{6A6C43B9-10F1-4B96-AE8C-1F2CCB9DA602}"/>
+                <a16:creationId xmlns:a16="http://schemas.microsoft.com/office/drawing/2014/main" id="{D2562302-890E-4B14-A628-C0AD5BDF656A}"/>
               </a:ext>
             </a:extLst>
           </p:cNvPr>
@@ -4401,7 +4401,7 @@
           <p:cNvPr id="19" name="object-19">
             <a:extLst>
               <a:ext uri="{FF2B5EF4-FFF2-40B4-BE49-F238E27FC236}">
-                <a16:creationId xmlns:a16="http://schemas.microsoft.com/office/drawing/2014/main" id="{22D94359-D504-4AB9-9261-9B8A9CC88EBD}"/>
+                <a16:creationId xmlns:a16="http://schemas.microsoft.com/office/drawing/2014/main" id="{325FC545-4494-4ECE-A853-5DFCBDC874D0}"/>
               </a:ext>
             </a:extLst>
           </p:cNvPr>
@@ -4458,7 +4458,7 @@
           <p:cNvPr id="20" name="object-20">
             <a:extLst>
               <a:ext uri="{FF2B5EF4-FFF2-40B4-BE49-F238E27FC236}">
-                <a16:creationId xmlns:a16="http://schemas.microsoft.com/office/drawing/2014/main" id="{D544FBCD-7611-4A2C-95F4-863950BADC75}"/>
+                <a16:creationId xmlns:a16="http://schemas.microsoft.com/office/drawing/2014/main" id="{235FB35E-DDD2-4218-BDF2-8A2A9D2739EF}"/>
               </a:ext>
             </a:extLst>
           </p:cNvPr>
@@ -4515,7 +4515,7 @@
           <p:cNvPr id="21" name="object-21">
             <a:extLst>
               <a:ext uri="{FF2B5EF4-FFF2-40B4-BE49-F238E27FC236}">
-                <a16:creationId xmlns:a16="http://schemas.microsoft.com/office/drawing/2014/main" id="{756B585E-33D8-4DBF-BE2B-57795546E927}"/>
+                <a16:creationId xmlns:a16="http://schemas.microsoft.com/office/drawing/2014/main" id="{9ED670FA-4D9E-4818-B061-6702E0BF742B}"/>
               </a:ext>
             </a:extLst>
           </p:cNvPr>
@@ -4572,7 +4572,7 @@
           <p:cNvPr id="22" name="object-22">
             <a:extLst>
               <a:ext uri="{FF2B5EF4-FFF2-40B4-BE49-F238E27FC236}">
-                <a16:creationId xmlns:a16="http://schemas.microsoft.com/office/drawing/2014/main" id="{479A28CA-0395-4533-B66A-E2FC872AC609}"/>
+                <a16:creationId xmlns:a16="http://schemas.microsoft.com/office/drawing/2014/main" id="{9BA1BE68-D35E-47DA-A801-B2C1F9D97E1B}"/>
               </a:ext>
             </a:extLst>
           </p:cNvPr>
@@ -4629,7 +4629,7 @@
           <p:cNvPr id="23" name="object-23">
             <a:extLst>
               <a:ext uri="{FF2B5EF4-FFF2-40B4-BE49-F238E27FC236}">
-                <a16:creationId xmlns:a16="http://schemas.microsoft.com/office/drawing/2014/main" id="{22903893-A624-46E6-A89A-F8BBFEC69AFB}"/>
+                <a16:creationId xmlns:a16="http://schemas.microsoft.com/office/drawing/2014/main" id="{3AD3C794-BE0C-44C0-AB8E-C5B64B2540B6}"/>
               </a:ext>
             </a:extLst>
           </p:cNvPr>
@@ -4686,7 +4686,7 @@
           <p:cNvPr id="24" name="object-24">
             <a:extLst>
               <a:ext uri="{FF2B5EF4-FFF2-40B4-BE49-F238E27FC236}">
-                <a16:creationId xmlns:a16="http://schemas.microsoft.com/office/drawing/2014/main" id="{E2EE7744-A410-48E3-BFF6-DD7F2CE80D3A}"/>
+                <a16:creationId xmlns:a16="http://schemas.microsoft.com/office/drawing/2014/main" id="{8C8ECA26-8BF4-43DC-95AE-91488F4079F4}"/>
               </a:ext>
             </a:extLst>
           </p:cNvPr>
@@ -4743,7 +4743,7 @@
           <p:cNvPr id="25" name="object-25">
             <a:extLst>
               <a:ext uri="{FF2B5EF4-FFF2-40B4-BE49-F238E27FC236}">
-                <a16:creationId xmlns:a16="http://schemas.microsoft.com/office/drawing/2014/main" id="{236FE730-7141-4BE2-B8DE-36A9D04ED70F}"/>
+                <a16:creationId xmlns:a16="http://schemas.microsoft.com/office/drawing/2014/main" id="{A9830A20-259F-4FBC-89F3-D3F3416498FF}"/>
               </a:ext>
             </a:extLst>
           </p:cNvPr>
@@ -4798,7 +4798,7 @@
     </p:spTree>
     <p:extLst>
       <p:ext uri="{BB962C8B-B14F-4D97-AF65-F5344CB8AC3E}">
-        <p14:creationId xmlns:p14="http://schemas.microsoft.com/office/powerpoint/2010/main" val="361442265"/>
+        <p14:creationId xmlns:p14="http://schemas.microsoft.com/office/powerpoint/2010/main" val="1534689649"/>
       </p:ext>
     </p:extLst>
   </p:cSld>
@@ -4838,7 +4838,7 @@
           <p:cNvPr id="12" name="object-1">
             <a:extLst>
               <a:ext uri="{FF2B5EF4-FFF2-40B4-BE49-F238E27FC236}">
-                <a16:creationId xmlns:a16="http://schemas.microsoft.com/office/drawing/2014/main" id="{A92B9B57-1D03-47D5-BACB-F92F39AAE386}"/>
+                <a16:creationId xmlns:a16="http://schemas.microsoft.com/office/drawing/2014/main" id="{887DE91C-169A-4E1F-994E-582E753575C5}"/>
               </a:ext>
             </a:extLst>
           </p:cNvPr>
@@ -4895,7 +4895,7 @@
           <p:cNvPr id="2" name="object-2">
             <a:extLst>
               <a:ext uri="{FF2B5EF4-FFF2-40B4-BE49-F238E27FC236}">
-                <a16:creationId xmlns:a16="http://schemas.microsoft.com/office/drawing/2014/main" id="{B3CC5D53-D04C-40D1-BDCC-D2B2D272ADC4}"/>
+                <a16:creationId xmlns:a16="http://schemas.microsoft.com/office/drawing/2014/main" id="{8253B391-A940-49D6-8A07-979F307FB8DA}"/>
               </a:ext>
             </a:extLst>
           </p:cNvPr>
@@ -4942,7 +4942,7 @@
                 <a:ea typeface="Arial"/>
                 <a:cs typeface="Arial"/>
               </a:rPr>
-              <a:t>Find 15% of 240.</a:t>
+              <a:t>Increase 240 by 15%.</a:t>
             </a:r>
           </a:p>
         </p:txBody>
@@ -4952,7 +4952,7 @@
           <p:cNvPr id="3" name="object-3">
             <a:extLst>
               <a:ext uri="{FF2B5EF4-FFF2-40B4-BE49-F238E27FC236}">
-                <a16:creationId xmlns:a16="http://schemas.microsoft.com/office/drawing/2014/main" id="{CC6EAB8D-7318-477D-A975-D8104B4CEC1B}"/>
+                <a16:creationId xmlns:a16="http://schemas.microsoft.com/office/drawing/2014/main" id="{EB0B3988-6175-4D94-85D9-135CB5FF83FC}"/>
               </a:ext>
             </a:extLst>
           </p:cNvPr>
@@ -4982,7 +4982,7 @@
           <p:cNvPr id="4" name="object-4">
             <a:extLst>
               <a:ext uri="{FF2B5EF4-FFF2-40B4-BE49-F238E27FC236}">
-                <a16:creationId xmlns:a16="http://schemas.microsoft.com/office/drawing/2014/main" id="{D7672BD1-F6E1-4855-B94A-471E1DA08891}"/>
+                <a16:creationId xmlns:a16="http://schemas.microsoft.com/office/drawing/2014/main" id="{BE196BC2-C0AA-4FB5-8626-855E4DE801CF}"/>
               </a:ext>
             </a:extLst>
           </p:cNvPr>
@@ -5039,7 +5039,7 @@
           <p:cNvPr id="5" name="object-5">
             <a:extLst>
               <a:ext uri="{FF2B5EF4-FFF2-40B4-BE49-F238E27FC236}">
-                <a16:creationId xmlns:a16="http://schemas.microsoft.com/office/drawing/2014/main" id="{4C387E4A-1C83-451B-8F8D-026372BDF471}"/>
+                <a16:creationId xmlns:a16="http://schemas.microsoft.com/office/drawing/2014/main" id="{5EF5FE30-0E94-4E4D-9E91-250E1C5E8442}"/>
               </a:ext>
             </a:extLst>
           </p:cNvPr>
@@ -5096,7 +5096,7 @@
           <p:cNvPr id="6" name="object-6">
             <a:extLst>
               <a:ext uri="{FF2B5EF4-FFF2-40B4-BE49-F238E27FC236}">
-                <a16:creationId xmlns:a16="http://schemas.microsoft.com/office/drawing/2014/main" id="{9C40CD6A-F330-4702-B73F-F5D88BCCDAD3}"/>
+                <a16:creationId xmlns:a16="http://schemas.microsoft.com/office/drawing/2014/main" id="{9F8394BE-F47C-47C4-80EA-CCB2D37D0596}"/>
               </a:ext>
             </a:extLst>
           </p:cNvPr>
@@ -5128,7 +5128,7 @@
           <p:cNvPr id="7" name="object-7">
             <a:extLst>
               <a:ext uri="{FF2B5EF4-FFF2-40B4-BE49-F238E27FC236}">
-                <a16:creationId xmlns:a16="http://schemas.microsoft.com/office/drawing/2014/main" id="{36FA854D-D344-4BBF-874E-260B62C06AB4}"/>
+                <a16:creationId xmlns:a16="http://schemas.microsoft.com/office/drawing/2014/main" id="{61345F5E-AB22-420F-BD3D-D25D16E78EEC}"/>
               </a:ext>
             </a:extLst>
           </p:cNvPr>
@@ -5158,7 +5158,7 @@
           <p:cNvPr id="8" name="object-8">
             <a:extLst>
               <a:ext uri="{FF2B5EF4-FFF2-40B4-BE49-F238E27FC236}">
-                <a16:creationId xmlns:a16="http://schemas.microsoft.com/office/drawing/2014/main" id="{8D2708AA-4363-4DFE-9E9E-097A8B956B7F}"/>
+                <a16:creationId xmlns:a16="http://schemas.microsoft.com/office/drawing/2014/main" id="{0374B5BB-9EEC-45F2-9536-8CB6C4F45852}"/>
               </a:ext>
             </a:extLst>
           </p:cNvPr>
@@ -5215,7 +5215,7 @@
           <p:cNvPr id="9" name="object-9">
             <a:extLst>
               <a:ext uri="{FF2B5EF4-FFF2-40B4-BE49-F238E27FC236}">
-                <a16:creationId xmlns:a16="http://schemas.microsoft.com/office/drawing/2014/main" id="{4DA7225D-9851-4B36-9AEB-8BEE9D0CEE02}"/>
+                <a16:creationId xmlns:a16="http://schemas.microsoft.com/office/drawing/2014/main" id="{61BAF0AA-5F78-44A1-B87C-ADFD88993659}"/>
               </a:ext>
             </a:extLst>
           </p:cNvPr>
@@ -5272,7 +5272,7 @@
           <p:cNvPr id="10" name="object-10">
             <a:extLst>
               <a:ext uri="{FF2B5EF4-FFF2-40B4-BE49-F238E27FC236}">
-                <a16:creationId xmlns:a16="http://schemas.microsoft.com/office/drawing/2014/main" id="{9FE84018-9257-4F2B-9B82-EAEFD7CF9BAB}"/>
+                <a16:creationId xmlns:a16="http://schemas.microsoft.com/office/drawing/2014/main" id="{4D2AF716-1AAF-4FB7-A9DD-A6DBE0021D7B}"/>
               </a:ext>
             </a:extLst>
           </p:cNvPr>
@@ -5329,7 +5329,7 @@
           <p:cNvPr id="11" name="object-11">
             <a:extLst>
               <a:ext uri="{FF2B5EF4-FFF2-40B4-BE49-F238E27FC236}">
-                <a16:creationId xmlns:a16="http://schemas.microsoft.com/office/drawing/2014/main" id="{66560EA7-6F24-478E-8133-5E87F857CFFF}"/>
+                <a16:creationId xmlns:a16="http://schemas.microsoft.com/office/drawing/2014/main" id="{953FF6DB-E44B-45E0-8543-E45382083B18}"/>
               </a:ext>
             </a:extLst>
           </p:cNvPr>
@@ -5376,7 +5376,7 @@
                 <a:ea typeface="Arial"/>
                 <a:cs typeface="Arial"/>
               </a:rPr>
-              <a:t>2.4 × 15 = 36</a:t>
+              <a:t>240 + 36 = 276</a:t>
             </a:r>
           </a:p>
         </p:txBody>
@@ -5384,7 +5384,7 @@
     </p:spTree>
     <p:extLst>
       <p:ext uri="{BB962C8B-B14F-4D97-AF65-F5344CB8AC3E}">
-        <p14:creationId xmlns:p14="http://schemas.microsoft.com/office/powerpoint/2010/main" val="210721622"/>
+        <p14:creationId xmlns:p14="http://schemas.microsoft.com/office/powerpoint/2010/main" val="73871863"/>
       </p:ext>
     </p:extLst>
   </p:cSld>
@@ -5621,7 +5621,7 @@
           <p:cNvPr id="12" name="object-1">
             <a:extLst>
               <a:ext uri="{FF2B5EF4-FFF2-40B4-BE49-F238E27FC236}">
-                <a16:creationId xmlns:a16="http://schemas.microsoft.com/office/drawing/2014/main" id="{95B70DA9-F484-4B44-8B88-AF56004914D7}"/>
+                <a16:creationId xmlns:a16="http://schemas.microsoft.com/office/drawing/2014/main" id="{A635C4D8-9B16-4D0E-9D11-A52BF892151A}"/>
               </a:ext>
             </a:extLst>
           </p:cNvPr>
@@ -5678,7 +5678,7 @@
           <p:cNvPr id="2" name="object-2">
             <a:extLst>
               <a:ext uri="{FF2B5EF4-FFF2-40B4-BE49-F238E27FC236}">
-                <a16:creationId xmlns:a16="http://schemas.microsoft.com/office/drawing/2014/main" id="{2A97256E-1286-4CFA-8EC6-42006B71D506}"/>
+                <a16:creationId xmlns:a16="http://schemas.microsoft.com/office/drawing/2014/main" id="{B9826499-8822-43AE-8C2E-F6A1FFED81AE}"/>
               </a:ext>
             </a:extLst>
           </p:cNvPr>
@@ -5735,7 +5735,7 @@
           <p:cNvPr id="3" name="object-3">
             <a:extLst>
               <a:ext uri="{FF2B5EF4-FFF2-40B4-BE49-F238E27FC236}">
-                <a16:creationId xmlns:a16="http://schemas.microsoft.com/office/drawing/2014/main" id="{4530799E-F567-4777-95DC-3305FA4FF320}"/>
+                <a16:creationId xmlns:a16="http://schemas.microsoft.com/office/drawing/2014/main" id="{87AA04F2-16AE-4AC2-BE6F-4457E69B15FE}"/>
               </a:ext>
             </a:extLst>
           </p:cNvPr>
@@ -5765,7 +5765,7 @@
           <p:cNvPr id="4" name="object-4">
             <a:extLst>
               <a:ext uri="{FF2B5EF4-FFF2-40B4-BE49-F238E27FC236}">
-                <a16:creationId xmlns:a16="http://schemas.microsoft.com/office/drawing/2014/main" id="{5AA9FE1D-F0FB-4FBE-92C6-BA518D5D9D57}"/>
+                <a16:creationId xmlns:a16="http://schemas.microsoft.com/office/drawing/2014/main" id="{61BC2FF8-5D25-40CD-A1A1-805B19719907}"/>
               </a:ext>
             </a:extLst>
           </p:cNvPr>
@@ -5822,7 +5822,7 @@
           <p:cNvPr id="5" name="object-5">
             <a:extLst>
               <a:ext uri="{FF2B5EF4-FFF2-40B4-BE49-F238E27FC236}">
-                <a16:creationId xmlns:a16="http://schemas.microsoft.com/office/drawing/2014/main" id="{01A02D1D-AB20-4086-ACFF-201B9D8D13BA}"/>
+                <a16:creationId xmlns:a16="http://schemas.microsoft.com/office/drawing/2014/main" id="{3A8FF4B4-7F28-47A5-ABA1-2C983C777B36}"/>
               </a:ext>
             </a:extLst>
           </p:cNvPr>
@@ -5879,7 +5879,7 @@
           <p:cNvPr id="6" name="object-6">
             <a:extLst>
               <a:ext uri="{FF2B5EF4-FFF2-40B4-BE49-F238E27FC236}">
-                <a16:creationId xmlns:a16="http://schemas.microsoft.com/office/drawing/2014/main" id="{B9D2154A-DDDB-4CC2-A960-A4DD569D45C3}"/>
+                <a16:creationId xmlns:a16="http://schemas.microsoft.com/office/drawing/2014/main" id="{D8E1F58D-542E-49C1-80C9-3B0640170306}"/>
               </a:ext>
             </a:extLst>
           </p:cNvPr>
@@ -5911,7 +5911,7 @@
           <p:cNvPr id="7" name="object-7">
             <a:extLst>
               <a:ext uri="{FF2B5EF4-FFF2-40B4-BE49-F238E27FC236}">
-                <a16:creationId xmlns:a16="http://schemas.microsoft.com/office/drawing/2014/main" id="{7E9F5EAE-75DF-439C-8508-E3F1296D8E2C}"/>
+                <a16:creationId xmlns:a16="http://schemas.microsoft.com/office/drawing/2014/main" id="{88426BBB-6E42-4E43-96B4-125C81561537}"/>
               </a:ext>
             </a:extLst>
           </p:cNvPr>
@@ -5941,7 +5941,7 @@
           <p:cNvPr id="8" name="object-8">
             <a:extLst>
               <a:ext uri="{FF2B5EF4-FFF2-40B4-BE49-F238E27FC236}">
-                <a16:creationId xmlns:a16="http://schemas.microsoft.com/office/drawing/2014/main" id="{02BA35C0-2922-4A0B-A1C2-DCEECBAC9C7E}"/>
+                <a16:creationId xmlns:a16="http://schemas.microsoft.com/office/drawing/2014/main" id="{AE5DE529-821F-4582-90CE-99A652610A9A}"/>
               </a:ext>
             </a:extLst>
           </p:cNvPr>
@@ -5998,7 +5998,7 @@
           <p:cNvPr id="9" name="object-9">
             <a:extLst>
               <a:ext uri="{FF2B5EF4-FFF2-40B4-BE49-F238E27FC236}">
-                <a16:creationId xmlns:a16="http://schemas.microsoft.com/office/drawing/2014/main" id="{D8DEA610-CC31-4DA2-B692-C5C731B05955}"/>
+                <a16:creationId xmlns:a16="http://schemas.microsoft.com/office/drawing/2014/main" id="{F136E7E6-8143-4142-B838-F05F7B844CDE}"/>
               </a:ext>
             </a:extLst>
           </p:cNvPr>
@@ -6055,7 +6055,7 @@
           <p:cNvPr id="10" name="object-10">
             <a:extLst>
               <a:ext uri="{FF2B5EF4-FFF2-40B4-BE49-F238E27FC236}">
-                <a16:creationId xmlns:a16="http://schemas.microsoft.com/office/drawing/2014/main" id="{4C4453B2-5EFB-4EF2-BEBE-69DB3B6ABD6C}"/>
+                <a16:creationId xmlns:a16="http://schemas.microsoft.com/office/drawing/2014/main" id="{35062BA7-BD89-4F3A-BE6E-D2C3EAE2A61F}"/>
               </a:ext>
             </a:extLst>
           </p:cNvPr>
@@ -6112,7 +6112,7 @@
           <p:cNvPr id="11" name="object-11">
             <a:extLst>
               <a:ext uri="{FF2B5EF4-FFF2-40B4-BE49-F238E27FC236}">
-                <a16:creationId xmlns:a16="http://schemas.microsoft.com/office/drawing/2014/main" id="{11A0C414-1B6C-4037-A212-B2E048688ABF}"/>
+                <a16:creationId xmlns:a16="http://schemas.microsoft.com/office/drawing/2014/main" id="{67D6FD10-ABF4-48B7-8469-C5E01D77E4CC}"/>
               </a:ext>
             </a:extLst>
           </p:cNvPr>
@@ -6167,7 +6167,7 @@
     </p:spTree>
     <p:extLst>
       <p:ext uri="{BB962C8B-B14F-4D97-AF65-F5344CB8AC3E}">
-        <p14:creationId xmlns:p14="http://schemas.microsoft.com/office/powerpoint/2010/main" val="376490876"/>
+        <p14:creationId xmlns:p14="http://schemas.microsoft.com/office/powerpoint/2010/main" val="1212521534"/>
       </p:ext>
     </p:extLst>
   </p:cSld>
@@ -6404,7 +6404,7 @@
           <p:cNvPr id="13" name="object-1">
             <a:extLst>
               <a:ext uri="{FF2B5EF4-FFF2-40B4-BE49-F238E27FC236}">
-                <a16:creationId xmlns:a16="http://schemas.microsoft.com/office/drawing/2014/main" id="{8D597C71-5158-4B13-9207-113A34D7B4CF}"/>
+                <a16:creationId xmlns:a16="http://schemas.microsoft.com/office/drawing/2014/main" id="{0B260BD5-D66A-4813-895C-5E5AF938C3BE}"/>
               </a:ext>
             </a:extLst>
           </p:cNvPr>
@@ -6461,7 +6461,7 @@
           <p:cNvPr id="2" name="object-2">
             <a:extLst>
               <a:ext uri="{FF2B5EF4-FFF2-40B4-BE49-F238E27FC236}">
-                <a16:creationId xmlns:a16="http://schemas.microsoft.com/office/drawing/2014/main" id="{133BA349-78A9-4D45-9259-DAD168F2FA4A}"/>
+                <a16:creationId xmlns:a16="http://schemas.microsoft.com/office/drawing/2014/main" id="{27509159-3A08-4D11-89CE-8970D82C43B8}"/>
               </a:ext>
             </a:extLst>
           </p:cNvPr>
@@ -6518,7 +6518,7 @@
           <p:cNvPr id="3" name="object-3">
             <a:extLst>
               <a:ext uri="{FF2B5EF4-FFF2-40B4-BE49-F238E27FC236}">
-                <a16:creationId xmlns:a16="http://schemas.microsoft.com/office/drawing/2014/main" id="{C9637EFD-9DF3-4415-B2F2-9B822A11C900}"/>
+                <a16:creationId xmlns:a16="http://schemas.microsoft.com/office/drawing/2014/main" id="{85AA89FF-D1AF-4DE3-9A62-EA70AAAC0B5C}"/>
               </a:ext>
             </a:extLst>
           </p:cNvPr>
@@ -6565,7 +6565,7 @@
                 <a:ea typeface="Arial"/>
                 <a:cs typeface="Arial"/>
               </a:rPr>
-              <a:t>Find 15% of 340.</a:t>
+              <a:t>Increase 340 by 15%.</a:t>
             </a:r>
           </a:p>
         </p:txBody>
@@ -6575,7 +6575,7 @@
           <p:cNvPr id="4" name="object-4">
             <a:extLst>
               <a:ext uri="{FF2B5EF4-FFF2-40B4-BE49-F238E27FC236}">
-                <a16:creationId xmlns:a16="http://schemas.microsoft.com/office/drawing/2014/main" id="{8DCFF069-F8B3-4C4D-8784-41D957539ED5}"/>
+                <a16:creationId xmlns:a16="http://schemas.microsoft.com/office/drawing/2014/main" id="{63E56DDB-B70A-4545-B9B7-E45589250C3F}"/>
               </a:ext>
             </a:extLst>
           </p:cNvPr>
@@ -6605,7 +6605,7 @@
           <p:cNvPr id="5" name="object-5">
             <a:extLst>
               <a:ext uri="{FF2B5EF4-FFF2-40B4-BE49-F238E27FC236}">
-                <a16:creationId xmlns:a16="http://schemas.microsoft.com/office/drawing/2014/main" id="{C801AED7-7694-4C40-9DD4-EEABA6690281}"/>
+                <a16:creationId xmlns:a16="http://schemas.microsoft.com/office/drawing/2014/main" id="{80D971F0-43A7-4D81-A8A3-59B141D3BAB8}"/>
               </a:ext>
             </a:extLst>
           </p:cNvPr>
@@ -6662,7 +6662,7 @@
           <p:cNvPr id="6" name="object-6">
             <a:extLst>
               <a:ext uri="{FF2B5EF4-FFF2-40B4-BE49-F238E27FC236}">
-                <a16:creationId xmlns:a16="http://schemas.microsoft.com/office/drawing/2014/main" id="{4D55C48D-8D50-4DFE-83AA-A3886F4CC0C6}"/>
+                <a16:creationId xmlns:a16="http://schemas.microsoft.com/office/drawing/2014/main" id="{67DC234C-12A4-4090-879F-1C44867062C6}"/>
               </a:ext>
             </a:extLst>
           </p:cNvPr>
@@ -6719,7 +6719,7 @@
           <p:cNvPr id="7" name="object-7">
             <a:extLst>
               <a:ext uri="{FF2B5EF4-FFF2-40B4-BE49-F238E27FC236}">
-                <a16:creationId xmlns:a16="http://schemas.microsoft.com/office/drawing/2014/main" id="{33A814F5-5DF4-48DE-A730-F70075FAAB50}"/>
+                <a16:creationId xmlns:a16="http://schemas.microsoft.com/office/drawing/2014/main" id="{9ED251B0-C8A6-40B7-BE23-03ABC96A0CD6}"/>
               </a:ext>
             </a:extLst>
           </p:cNvPr>
@@ -6751,7 +6751,7 @@
           <p:cNvPr id="8" name="object-8">
             <a:extLst>
               <a:ext uri="{FF2B5EF4-FFF2-40B4-BE49-F238E27FC236}">
-                <a16:creationId xmlns:a16="http://schemas.microsoft.com/office/drawing/2014/main" id="{53170B26-2517-464A-93C6-A0B6ACFCB7D4}"/>
+                <a16:creationId xmlns:a16="http://schemas.microsoft.com/office/drawing/2014/main" id="{3C1712E6-B483-41AC-A227-0899C0BFF93F}"/>
               </a:ext>
             </a:extLst>
           </p:cNvPr>
@@ -6781,7 +6781,7 @@
           <p:cNvPr id="9" name="object-9">
             <a:extLst>
               <a:ext uri="{FF2B5EF4-FFF2-40B4-BE49-F238E27FC236}">
-                <a16:creationId xmlns:a16="http://schemas.microsoft.com/office/drawing/2014/main" id="{0FFB44C6-029D-4E92-B625-0C387A8935F3}"/>
+                <a16:creationId xmlns:a16="http://schemas.microsoft.com/office/drawing/2014/main" id="{D4A193CC-F80B-4ADA-9C4A-7E1CC74EE47A}"/>
               </a:ext>
             </a:extLst>
           </p:cNvPr>
@@ -6838,7 +6838,7 @@
           <p:cNvPr id="10" name="object-10">
             <a:extLst>
               <a:ext uri="{FF2B5EF4-FFF2-40B4-BE49-F238E27FC236}">
-                <a16:creationId xmlns:a16="http://schemas.microsoft.com/office/drawing/2014/main" id="{20E9399A-EAF7-4DBD-A935-EB5C27FC7941}"/>
+                <a16:creationId xmlns:a16="http://schemas.microsoft.com/office/drawing/2014/main" id="{EA2285B7-1E4E-4A21-B12D-D8F5AC87B21D}"/>
               </a:ext>
             </a:extLst>
           </p:cNvPr>
@@ -6895,7 +6895,7 @@
           <p:cNvPr id="11" name="object-11">
             <a:extLst>
               <a:ext uri="{FF2B5EF4-FFF2-40B4-BE49-F238E27FC236}">
-                <a16:creationId xmlns:a16="http://schemas.microsoft.com/office/drawing/2014/main" id="{3570AB74-8EEC-4CB5-9651-F28ABFFF62C7}"/>
+                <a16:creationId xmlns:a16="http://schemas.microsoft.com/office/drawing/2014/main" id="{20E3DBD1-A2F0-4ABD-9D48-64490CD37D64}"/>
               </a:ext>
             </a:extLst>
           </p:cNvPr>
@@ -6952,7 +6952,7 @@
           <p:cNvPr id="12" name="object-12">
             <a:extLst>
               <a:ext uri="{FF2B5EF4-FFF2-40B4-BE49-F238E27FC236}">
-                <a16:creationId xmlns:a16="http://schemas.microsoft.com/office/drawing/2014/main" id="{6B84672A-E045-465F-89D5-B419374A1C16}"/>
+                <a16:creationId xmlns:a16="http://schemas.microsoft.com/office/drawing/2014/main" id="{23A6140E-156B-44A7-89A4-155FB65F3C03}"/>
               </a:ext>
             </a:extLst>
           </p:cNvPr>
@@ -6999,7 +6999,7 @@
                 <a:ea typeface="Arial"/>
                 <a:cs typeface="Arial"/>
               </a:rPr>
-              <a:t>3.4 × 15 = 51</a:t>
+              <a:t>340 + 51 = 391</a:t>
             </a:r>
           </a:p>
         </p:txBody>
@@ -7007,7 +7007,7 @@
     </p:spTree>
     <p:extLst>
       <p:ext uri="{BB962C8B-B14F-4D97-AF65-F5344CB8AC3E}">
-        <p14:creationId xmlns:p14="http://schemas.microsoft.com/office/powerpoint/2010/main" val="1610502793"/>
+        <p14:creationId xmlns:p14="http://schemas.microsoft.com/office/powerpoint/2010/main" val="968642026"/>
       </p:ext>
     </p:extLst>
   </p:cSld>
@@ -7244,7 +7244,7 @@
           <p:cNvPr id="13" name="object-1">
             <a:extLst>
               <a:ext uri="{FF2B5EF4-FFF2-40B4-BE49-F238E27FC236}">
-                <a16:creationId xmlns:a16="http://schemas.microsoft.com/office/drawing/2014/main" id="{73A03D91-50D2-4AF2-8CFB-E1FCF243ADD1}"/>
+                <a16:creationId xmlns:a16="http://schemas.microsoft.com/office/drawing/2014/main" id="{D8A67735-BEA5-4792-9ED8-5BFFC439D4D7}"/>
               </a:ext>
             </a:extLst>
           </p:cNvPr>
@@ -7301,7 +7301,7 @@
           <p:cNvPr id="2" name="object-2">
             <a:extLst>
               <a:ext uri="{FF2B5EF4-FFF2-40B4-BE49-F238E27FC236}">
-                <a16:creationId xmlns:a16="http://schemas.microsoft.com/office/drawing/2014/main" id="{B3C8DC31-3305-4CB0-9D21-F39636C062AD}"/>
+                <a16:creationId xmlns:a16="http://schemas.microsoft.com/office/drawing/2014/main" id="{D4892E3C-20E4-4BE7-ACD1-32A4CC165E89}"/>
               </a:ext>
             </a:extLst>
           </p:cNvPr>
@@ -7358,7 +7358,7 @@
           <p:cNvPr id="3" name="object-3">
             <a:extLst>
               <a:ext uri="{FF2B5EF4-FFF2-40B4-BE49-F238E27FC236}">
-                <a16:creationId xmlns:a16="http://schemas.microsoft.com/office/drawing/2014/main" id="{5BBCB164-6C9B-4B80-918A-344D8196BEF8}"/>
+                <a16:creationId xmlns:a16="http://schemas.microsoft.com/office/drawing/2014/main" id="{1780FB84-D119-4E80-B96C-637CA0B14AD4}"/>
               </a:ext>
             </a:extLst>
           </p:cNvPr>
@@ -7415,7 +7415,7 @@
           <p:cNvPr id="4" name="object-4">
             <a:extLst>
               <a:ext uri="{FF2B5EF4-FFF2-40B4-BE49-F238E27FC236}">
-                <a16:creationId xmlns:a16="http://schemas.microsoft.com/office/drawing/2014/main" id="{1F0DBC13-CDB2-488F-913E-E8B68D9EF31C}"/>
+                <a16:creationId xmlns:a16="http://schemas.microsoft.com/office/drawing/2014/main" id="{B6F8FDAD-8FB2-43D8-A4A9-BCB88D9C7C45}"/>
               </a:ext>
             </a:extLst>
           </p:cNvPr>
@@ -7445,7 +7445,7 @@
           <p:cNvPr id="5" name="object-5">
             <a:extLst>
               <a:ext uri="{FF2B5EF4-FFF2-40B4-BE49-F238E27FC236}">
-                <a16:creationId xmlns:a16="http://schemas.microsoft.com/office/drawing/2014/main" id="{65ECA1A4-F1E7-461D-9619-BCDDA4DF330C}"/>
+                <a16:creationId xmlns:a16="http://schemas.microsoft.com/office/drawing/2014/main" id="{8A37EFDF-2C6B-43B4-9966-92D8384242D4}"/>
               </a:ext>
             </a:extLst>
           </p:cNvPr>
@@ -7502,7 +7502,7 @@
           <p:cNvPr id="6" name="object-6">
             <a:extLst>
               <a:ext uri="{FF2B5EF4-FFF2-40B4-BE49-F238E27FC236}">
-                <a16:creationId xmlns:a16="http://schemas.microsoft.com/office/drawing/2014/main" id="{C5421A77-D2D6-4603-B14F-C4F17C2E5745}"/>
+                <a16:creationId xmlns:a16="http://schemas.microsoft.com/office/drawing/2014/main" id="{ABBC067B-14C6-45A0-A971-0F5723C1A68C}"/>
               </a:ext>
             </a:extLst>
           </p:cNvPr>
@@ -7559,7 +7559,7 @@
           <p:cNvPr id="7" name="object-7">
             <a:extLst>
               <a:ext uri="{FF2B5EF4-FFF2-40B4-BE49-F238E27FC236}">
-                <a16:creationId xmlns:a16="http://schemas.microsoft.com/office/drawing/2014/main" id="{53CFF351-F6E2-4AE6-AE32-5A31871B167B}"/>
+                <a16:creationId xmlns:a16="http://schemas.microsoft.com/office/drawing/2014/main" id="{104CD231-727B-477B-BE13-297251562A2A}"/>
               </a:ext>
             </a:extLst>
           </p:cNvPr>
@@ -7591,7 +7591,7 @@
           <p:cNvPr id="8" name="object-8">
             <a:extLst>
               <a:ext uri="{FF2B5EF4-FFF2-40B4-BE49-F238E27FC236}">
-                <a16:creationId xmlns:a16="http://schemas.microsoft.com/office/drawing/2014/main" id="{E569C473-3DE6-4D36-BB0D-9F150808EB85}"/>
+                <a16:creationId xmlns:a16="http://schemas.microsoft.com/office/drawing/2014/main" id="{88F33C3F-E7C1-471A-BF2F-2824AEAF0577}"/>
               </a:ext>
             </a:extLst>
           </p:cNvPr>
@@ -7621,7 +7621,7 @@
           <p:cNvPr id="9" name="object-9">
             <a:extLst>
               <a:ext uri="{FF2B5EF4-FFF2-40B4-BE49-F238E27FC236}">
-                <a16:creationId xmlns:a16="http://schemas.microsoft.com/office/drawing/2014/main" id="{ABE7563F-4FAA-4367-8723-0D3C80D67DA7}"/>
+                <a16:creationId xmlns:a16="http://schemas.microsoft.com/office/drawing/2014/main" id="{DD1568CE-981B-4DA1-853D-523DCCD6DB26}"/>
               </a:ext>
             </a:extLst>
           </p:cNvPr>
@@ -7678,7 +7678,7 @@
           <p:cNvPr id="10" name="object-10">
             <a:extLst>
               <a:ext uri="{FF2B5EF4-FFF2-40B4-BE49-F238E27FC236}">
-                <a16:creationId xmlns:a16="http://schemas.microsoft.com/office/drawing/2014/main" id="{A5043327-59BF-48D5-B56C-93B01E9B9898}"/>
+                <a16:creationId xmlns:a16="http://schemas.microsoft.com/office/drawing/2014/main" id="{28E53DB8-48EF-49DE-9466-EA8F9F669001}"/>
               </a:ext>
             </a:extLst>
           </p:cNvPr>
@@ -7735,7 +7735,7 @@
           <p:cNvPr id="11" name="object-11">
             <a:extLst>
               <a:ext uri="{FF2B5EF4-FFF2-40B4-BE49-F238E27FC236}">
-                <a16:creationId xmlns:a16="http://schemas.microsoft.com/office/drawing/2014/main" id="{DD6188D7-8444-419B-B621-1339BA6AE397}"/>
+                <a16:creationId xmlns:a16="http://schemas.microsoft.com/office/drawing/2014/main" id="{DFD5F5CB-692C-482F-913B-5E624BF0174F}"/>
               </a:ext>
             </a:extLst>
           </p:cNvPr>
@@ -7792,7 +7792,7 @@
           <p:cNvPr id="12" name="object-12">
             <a:extLst>
               <a:ext uri="{FF2B5EF4-FFF2-40B4-BE49-F238E27FC236}">
-                <a16:creationId xmlns:a16="http://schemas.microsoft.com/office/drawing/2014/main" id="{2D1159F8-9875-4D21-B707-28DA0A6F3184}"/>
+                <a16:creationId xmlns:a16="http://schemas.microsoft.com/office/drawing/2014/main" id="{32C3E9C7-96A5-4650-98A1-B89E44DDC609}"/>
               </a:ext>
             </a:extLst>
           </p:cNvPr>
@@ -7847,7 +7847,7 @@
     </p:spTree>
     <p:extLst>
       <p:ext uri="{BB962C8B-B14F-4D97-AF65-F5344CB8AC3E}">
-        <p14:creationId xmlns:p14="http://schemas.microsoft.com/office/powerpoint/2010/main" val="1911709040"/>
+        <p14:creationId xmlns:p14="http://schemas.microsoft.com/office/powerpoint/2010/main" val="475288027"/>
       </p:ext>
     </p:extLst>
   </p:cSld>
@@ -8084,7 +8084,7 @@
           <p:cNvPr id="12" name="object-1">
             <a:extLst>
               <a:ext uri="{FF2B5EF4-FFF2-40B4-BE49-F238E27FC236}">
-                <a16:creationId xmlns:a16="http://schemas.microsoft.com/office/drawing/2014/main" id="{DBB85672-FE76-425B-887D-4796264289B0}"/>
+                <a16:creationId xmlns:a16="http://schemas.microsoft.com/office/drawing/2014/main" id="{FC193DEA-AB42-4EFB-BF3F-A685E6DF4C85}"/>
               </a:ext>
             </a:extLst>
           </p:cNvPr>
@@ -8141,7 +8141,7 @@
           <p:cNvPr id="2" name="object-2">
             <a:extLst>
               <a:ext uri="{FF2B5EF4-FFF2-40B4-BE49-F238E27FC236}">
-                <a16:creationId xmlns:a16="http://schemas.microsoft.com/office/drawing/2014/main" id="{F4EAC194-C107-4762-9382-B090DC26E6CD}"/>
+                <a16:creationId xmlns:a16="http://schemas.microsoft.com/office/drawing/2014/main" id="{73C26AA6-3108-4EFC-AFC8-8466946D69CE}"/>
               </a:ext>
             </a:extLst>
           </p:cNvPr>
@@ -8188,7 +8188,7 @@
                 <a:ea typeface="Arial"/>
                 <a:cs typeface="Arial"/>
               </a:rPr>
-              <a:t>Find 15% of 440.</a:t>
+              <a:t>Increase 440 by 15%.</a:t>
             </a:r>
           </a:p>
         </p:txBody>
@@ -8198,7 +8198,7 @@
           <p:cNvPr id="3" name="object-3">
             <a:extLst>
               <a:ext uri="{FF2B5EF4-FFF2-40B4-BE49-F238E27FC236}">
-                <a16:creationId xmlns:a16="http://schemas.microsoft.com/office/drawing/2014/main" id="{B796B30F-F7DD-4D15-B5E0-E0D30340DE63}"/>
+                <a16:creationId xmlns:a16="http://schemas.microsoft.com/office/drawing/2014/main" id="{B919D1BC-BE9D-40B0-862C-1395E68DAE7D}"/>
               </a:ext>
             </a:extLst>
           </p:cNvPr>
@@ -8228,7 +8228,7 @@
           <p:cNvPr id="4" name="object-4">
             <a:extLst>
               <a:ext uri="{FF2B5EF4-FFF2-40B4-BE49-F238E27FC236}">
-                <a16:creationId xmlns:a16="http://schemas.microsoft.com/office/drawing/2014/main" id="{1DF3754D-9D9A-478D-A2F8-190099820F15}"/>
+                <a16:creationId xmlns:a16="http://schemas.microsoft.com/office/drawing/2014/main" id="{E65F10F3-9CD4-4D37-9232-7A94B9D7B27C}"/>
               </a:ext>
             </a:extLst>
           </p:cNvPr>
@@ -8285,7 +8285,7 @@
           <p:cNvPr id="5" name="object-5">
             <a:extLst>
               <a:ext uri="{FF2B5EF4-FFF2-40B4-BE49-F238E27FC236}">
-                <a16:creationId xmlns:a16="http://schemas.microsoft.com/office/drawing/2014/main" id="{066B59A0-9F18-4256-BDB2-016AE077740A}"/>
+                <a16:creationId xmlns:a16="http://schemas.microsoft.com/office/drawing/2014/main" id="{80371D43-7571-42DF-8072-55DDA20C8ACE}"/>
               </a:ext>
             </a:extLst>
           </p:cNvPr>
@@ -8342,7 +8342,7 @@
           <p:cNvPr id="6" name="object-6">
             <a:extLst>
               <a:ext uri="{FF2B5EF4-FFF2-40B4-BE49-F238E27FC236}">
-                <a16:creationId xmlns:a16="http://schemas.microsoft.com/office/drawing/2014/main" id="{0E1A15B2-2637-4765-A803-D96463C9708D}"/>
+                <a16:creationId xmlns:a16="http://schemas.microsoft.com/office/drawing/2014/main" id="{035174D6-A772-41EF-887C-059E8834CC22}"/>
               </a:ext>
             </a:extLst>
           </p:cNvPr>
@@ -8374,7 +8374,7 @@
           <p:cNvPr id="7" name="object-7">
             <a:extLst>
               <a:ext uri="{FF2B5EF4-FFF2-40B4-BE49-F238E27FC236}">
-                <a16:creationId xmlns:a16="http://schemas.microsoft.com/office/drawing/2014/main" id="{7F172F68-FF35-4844-8246-0A199637870B}"/>
+                <a16:creationId xmlns:a16="http://schemas.microsoft.com/office/drawing/2014/main" id="{2A7535A8-5DB5-4F61-AF6A-0134045E5032}"/>
               </a:ext>
             </a:extLst>
           </p:cNvPr>
@@ -8404,7 +8404,7 @@
           <p:cNvPr id="8" name="object-8">
             <a:extLst>
               <a:ext uri="{FF2B5EF4-FFF2-40B4-BE49-F238E27FC236}">
-                <a16:creationId xmlns:a16="http://schemas.microsoft.com/office/drawing/2014/main" id="{0CDAC5D5-82B1-4B01-AAB9-02A8E144DC6D}"/>
+                <a16:creationId xmlns:a16="http://schemas.microsoft.com/office/drawing/2014/main" id="{D8A01B5F-D3A8-47B7-8D96-659E38B25463}"/>
               </a:ext>
             </a:extLst>
           </p:cNvPr>
@@ -8461,7 +8461,7 @@
           <p:cNvPr id="9" name="object-9">
             <a:extLst>
               <a:ext uri="{FF2B5EF4-FFF2-40B4-BE49-F238E27FC236}">
-                <a16:creationId xmlns:a16="http://schemas.microsoft.com/office/drawing/2014/main" id="{A0EA54C0-AF88-4E2C-8351-75C60AFB21CD}"/>
+                <a16:creationId xmlns:a16="http://schemas.microsoft.com/office/drawing/2014/main" id="{DCCB1301-B1F6-4783-9424-E8E2EFAB2B66}"/>
               </a:ext>
             </a:extLst>
           </p:cNvPr>
@@ -8518,7 +8518,7 @@
           <p:cNvPr id="10" name="object-10">
             <a:extLst>
               <a:ext uri="{FF2B5EF4-FFF2-40B4-BE49-F238E27FC236}">
-                <a16:creationId xmlns:a16="http://schemas.microsoft.com/office/drawing/2014/main" id="{80841BD5-6DEA-4CDC-8E6E-5DB3EAC97105}"/>
+                <a16:creationId xmlns:a16="http://schemas.microsoft.com/office/drawing/2014/main" id="{B624669F-6635-4A1F-A8B7-E39611843598}"/>
               </a:ext>
             </a:extLst>
           </p:cNvPr>
@@ -8575,7 +8575,7 @@
           <p:cNvPr id="11" name="object-11">
             <a:extLst>
               <a:ext uri="{FF2B5EF4-FFF2-40B4-BE49-F238E27FC236}">
-                <a16:creationId xmlns:a16="http://schemas.microsoft.com/office/drawing/2014/main" id="{DC555858-1DB9-4FAF-A463-00E3E9075687}"/>
+                <a16:creationId xmlns:a16="http://schemas.microsoft.com/office/drawing/2014/main" id="{9AA437D6-ABC2-4A2F-9595-65A9A8C59365}"/>
               </a:ext>
             </a:extLst>
           </p:cNvPr>
@@ -8622,7 +8622,7 @@
                 <a:ea typeface="Arial"/>
                 <a:cs typeface="Arial"/>
               </a:rPr>
-              <a:t>4.4 × 15 = 66</a:t>
+              <a:t>440 + 66 = 506</a:t>
             </a:r>
           </a:p>
         </p:txBody>
@@ -8630,7 +8630,7 @@
     </p:spTree>
     <p:extLst>
       <p:ext uri="{BB962C8B-B14F-4D97-AF65-F5344CB8AC3E}">
-        <p14:creationId xmlns:p14="http://schemas.microsoft.com/office/powerpoint/2010/main" val="1577796831"/>
+        <p14:creationId xmlns:p14="http://schemas.microsoft.com/office/powerpoint/2010/main" val="1503324920"/>
       </p:ext>
     </p:extLst>
   </p:cSld>
@@ -8867,7 +8867,7 @@
           <p:cNvPr id="12" name="object-1">
             <a:extLst>
               <a:ext uri="{FF2B5EF4-FFF2-40B4-BE49-F238E27FC236}">
-                <a16:creationId xmlns:a16="http://schemas.microsoft.com/office/drawing/2014/main" id="{BEFF2B09-D03F-40E5-8822-7EAC196C2E32}"/>
+                <a16:creationId xmlns:a16="http://schemas.microsoft.com/office/drawing/2014/main" id="{78FE2838-5E5E-42DA-B911-456A32D21573}"/>
               </a:ext>
             </a:extLst>
           </p:cNvPr>
@@ -8924,7 +8924,7 @@
           <p:cNvPr id="2" name="object-2">
             <a:extLst>
               <a:ext uri="{FF2B5EF4-FFF2-40B4-BE49-F238E27FC236}">
-                <a16:creationId xmlns:a16="http://schemas.microsoft.com/office/drawing/2014/main" id="{A1107D1C-1164-4D12-B796-4B422B87EB80}"/>
+                <a16:creationId xmlns:a16="http://schemas.microsoft.com/office/drawing/2014/main" id="{BC238E35-2510-4ABD-BD89-54BF7407D04E}"/>
               </a:ext>
             </a:extLst>
           </p:cNvPr>
@@ -8981,7 +8981,7 @@
           <p:cNvPr id="3" name="object-3">
             <a:extLst>
               <a:ext uri="{FF2B5EF4-FFF2-40B4-BE49-F238E27FC236}">
-                <a16:creationId xmlns:a16="http://schemas.microsoft.com/office/drawing/2014/main" id="{D1937255-3C1F-4483-8B63-1FEA64FDE7D5}"/>
+                <a16:creationId xmlns:a16="http://schemas.microsoft.com/office/drawing/2014/main" id="{2B35469C-0814-4385-92FE-59F7AAA40B23}"/>
               </a:ext>
             </a:extLst>
           </p:cNvPr>
@@ -9011,7 +9011,7 @@
           <p:cNvPr id="4" name="object-4">
             <a:extLst>
               <a:ext uri="{FF2B5EF4-FFF2-40B4-BE49-F238E27FC236}">
-                <a16:creationId xmlns:a16="http://schemas.microsoft.com/office/drawing/2014/main" id="{3AF2CFE9-005B-4C83-8341-D5CB8220C69F}"/>
+                <a16:creationId xmlns:a16="http://schemas.microsoft.com/office/drawing/2014/main" id="{D18B85C7-96CD-4EC6-B5F5-310ABFC9E018}"/>
               </a:ext>
             </a:extLst>
           </p:cNvPr>
@@ -9068,7 +9068,7 @@
           <p:cNvPr id="5" name="object-5">
             <a:extLst>
               <a:ext uri="{FF2B5EF4-FFF2-40B4-BE49-F238E27FC236}">
-                <a16:creationId xmlns:a16="http://schemas.microsoft.com/office/drawing/2014/main" id="{E81747E5-414D-45F0-8F4E-97A01213B8BE}"/>
+                <a16:creationId xmlns:a16="http://schemas.microsoft.com/office/drawing/2014/main" id="{2FCCC1AC-A46F-4EFB-8109-937A4E6CFDF3}"/>
               </a:ext>
             </a:extLst>
           </p:cNvPr>
@@ -9125,7 +9125,7 @@
           <p:cNvPr id="6" name="object-6">
             <a:extLst>
               <a:ext uri="{FF2B5EF4-FFF2-40B4-BE49-F238E27FC236}">
-                <a16:creationId xmlns:a16="http://schemas.microsoft.com/office/drawing/2014/main" id="{71892637-F355-4309-8478-7F9775A7888E}"/>
+                <a16:creationId xmlns:a16="http://schemas.microsoft.com/office/drawing/2014/main" id="{EE39BA06-C169-416A-A41F-CAB4801CE8D7}"/>
               </a:ext>
             </a:extLst>
           </p:cNvPr>
@@ -9157,7 +9157,7 @@
           <p:cNvPr id="7" name="object-7">
             <a:extLst>
               <a:ext uri="{FF2B5EF4-FFF2-40B4-BE49-F238E27FC236}">
-                <a16:creationId xmlns:a16="http://schemas.microsoft.com/office/drawing/2014/main" id="{9042FCB0-F057-45A2-BFF0-95AD569B5A90}"/>
+                <a16:creationId xmlns:a16="http://schemas.microsoft.com/office/drawing/2014/main" id="{773D5670-D9B7-4C6B-A375-DA1975EC3A6A}"/>
               </a:ext>
             </a:extLst>
           </p:cNvPr>
@@ -9187,7 +9187,7 @@
           <p:cNvPr id="8" name="object-8">
             <a:extLst>
               <a:ext uri="{FF2B5EF4-FFF2-40B4-BE49-F238E27FC236}">
-                <a16:creationId xmlns:a16="http://schemas.microsoft.com/office/drawing/2014/main" id="{FFBB3376-ECA1-4326-A048-EDFE22511017}"/>
+                <a16:creationId xmlns:a16="http://schemas.microsoft.com/office/drawing/2014/main" id="{1F615C49-9994-4AAE-A762-FFD716C81B20}"/>
               </a:ext>
             </a:extLst>
           </p:cNvPr>
@@ -9244,7 +9244,7 @@
           <p:cNvPr id="9" name="object-9">
             <a:extLst>
               <a:ext uri="{FF2B5EF4-FFF2-40B4-BE49-F238E27FC236}">
-                <a16:creationId xmlns:a16="http://schemas.microsoft.com/office/drawing/2014/main" id="{25EE7C77-8082-4576-9A70-29A119E6BE90}"/>
+                <a16:creationId xmlns:a16="http://schemas.microsoft.com/office/drawing/2014/main" id="{75329A86-69A9-4945-96E7-CFE17230F913}"/>
               </a:ext>
             </a:extLst>
           </p:cNvPr>
@@ -9301,7 +9301,7 @@
           <p:cNvPr id="10" name="object-10">
             <a:extLst>
               <a:ext uri="{FF2B5EF4-FFF2-40B4-BE49-F238E27FC236}">
-                <a16:creationId xmlns:a16="http://schemas.microsoft.com/office/drawing/2014/main" id="{961CDB72-080B-413C-BD51-A175387C0A94}"/>
+                <a16:creationId xmlns:a16="http://schemas.microsoft.com/office/drawing/2014/main" id="{6299D257-735B-44E3-A1DB-19BBD032EB1B}"/>
               </a:ext>
             </a:extLst>
           </p:cNvPr>
@@ -9358,7 +9358,7 @@
           <p:cNvPr id="11" name="object-11">
             <a:extLst>
               <a:ext uri="{FF2B5EF4-FFF2-40B4-BE49-F238E27FC236}">
-                <a16:creationId xmlns:a16="http://schemas.microsoft.com/office/drawing/2014/main" id="{20C3BB3F-FCA7-4625-8FA3-BE8DA80F05F5}"/>
+                <a16:creationId xmlns:a16="http://schemas.microsoft.com/office/drawing/2014/main" id="{35C59A1B-9912-4546-8D0E-7FE9F3340969}"/>
               </a:ext>
             </a:extLst>
           </p:cNvPr>
@@ -9413,7 +9413,7 @@
     </p:spTree>
     <p:extLst>
       <p:ext uri="{BB962C8B-B14F-4D97-AF65-F5344CB8AC3E}">
-        <p14:creationId xmlns:p14="http://schemas.microsoft.com/office/powerpoint/2010/main" val="157639757"/>
+        <p14:creationId xmlns:p14="http://schemas.microsoft.com/office/powerpoint/2010/main" val="851274990"/>
       </p:ext>
     </p:extLst>
   </p:cSld>
@@ -9650,7 +9650,7 @@
           <p:cNvPr id="13" name="object-1">
             <a:extLst>
               <a:ext uri="{FF2B5EF4-FFF2-40B4-BE49-F238E27FC236}">
-                <a16:creationId xmlns:a16="http://schemas.microsoft.com/office/drawing/2014/main" id="{F7EB7BE1-7E2E-4A00-BA6E-B943D4F5A336}"/>
+                <a16:creationId xmlns:a16="http://schemas.microsoft.com/office/drawing/2014/main" id="{8E283C6A-2B5F-4C73-8447-0A9F75514F36}"/>
               </a:ext>
             </a:extLst>
           </p:cNvPr>
@@ -9707,7 +9707,7 @@
           <p:cNvPr id="2" name="object-2">
             <a:extLst>
               <a:ext uri="{FF2B5EF4-FFF2-40B4-BE49-F238E27FC236}">
-                <a16:creationId xmlns:a16="http://schemas.microsoft.com/office/drawing/2014/main" id="{0536EC77-ED87-42C1-8740-42DDBE0A3609}"/>
+                <a16:creationId xmlns:a16="http://schemas.microsoft.com/office/drawing/2014/main" id="{7B8A42B2-C03F-4568-911B-8A5C41AFF95E}"/>
               </a:ext>
             </a:extLst>
           </p:cNvPr>
@@ -9764,7 +9764,7 @@
           <p:cNvPr id="3" name="object-3">
             <a:extLst>
               <a:ext uri="{FF2B5EF4-FFF2-40B4-BE49-F238E27FC236}">
-                <a16:creationId xmlns:a16="http://schemas.microsoft.com/office/drawing/2014/main" id="{F7787F1A-3F18-4816-B172-758C3D37D4C3}"/>
+                <a16:creationId xmlns:a16="http://schemas.microsoft.com/office/drawing/2014/main" id="{AD2571BD-0CFE-47EA-99A0-E7C8A2F5EE50}"/>
               </a:ext>
             </a:extLst>
           </p:cNvPr>
@@ -9811,7 +9811,7 @@
                 <a:ea typeface="Arial"/>
                 <a:cs typeface="Arial"/>
               </a:rPr>
-              <a:t>Find 15% of 540.</a:t>
+              <a:t>Increase 540 by 15%.</a:t>
             </a:r>
           </a:p>
         </p:txBody>
@@ -9821,7 +9821,7 @@
           <p:cNvPr id="4" name="object-4">
             <a:extLst>
               <a:ext uri="{FF2B5EF4-FFF2-40B4-BE49-F238E27FC236}">
-                <a16:creationId xmlns:a16="http://schemas.microsoft.com/office/drawing/2014/main" id="{FFDA1138-58F0-465F-B0A2-C4BACA0AB90F}"/>
+                <a16:creationId xmlns:a16="http://schemas.microsoft.com/office/drawing/2014/main" id="{B4F242B2-2087-435C-B911-B84D3D52B096}"/>
               </a:ext>
             </a:extLst>
           </p:cNvPr>
@@ -9851,7 +9851,7 @@
           <p:cNvPr id="5" name="object-5">
             <a:extLst>
               <a:ext uri="{FF2B5EF4-FFF2-40B4-BE49-F238E27FC236}">
-                <a16:creationId xmlns:a16="http://schemas.microsoft.com/office/drawing/2014/main" id="{8F1FC112-1A20-4ACE-B37E-D55998981827}"/>
+                <a16:creationId xmlns:a16="http://schemas.microsoft.com/office/drawing/2014/main" id="{D2CA1C60-FCE5-40D5-84FC-862597EDF668}"/>
               </a:ext>
             </a:extLst>
           </p:cNvPr>
@@ -9908,7 +9908,7 @@
           <p:cNvPr id="6" name="object-6">
             <a:extLst>
               <a:ext uri="{FF2B5EF4-FFF2-40B4-BE49-F238E27FC236}">
-                <a16:creationId xmlns:a16="http://schemas.microsoft.com/office/drawing/2014/main" id="{3E8947F9-891B-44E0-9EEC-75002438D2CE}"/>
+                <a16:creationId xmlns:a16="http://schemas.microsoft.com/office/drawing/2014/main" id="{169AF306-1716-4953-B924-26B297C4BDDD}"/>
               </a:ext>
             </a:extLst>
           </p:cNvPr>
@@ -9965,7 +9965,7 @@
           <p:cNvPr id="7" name="object-7">
             <a:extLst>
               <a:ext uri="{FF2B5EF4-FFF2-40B4-BE49-F238E27FC236}">
-                <a16:creationId xmlns:a16="http://schemas.microsoft.com/office/drawing/2014/main" id="{A7EDE3C9-2492-4DFB-93DC-E3102E1ADBA2}"/>
+                <a16:creationId xmlns:a16="http://schemas.microsoft.com/office/drawing/2014/main" id="{D02FD49F-F224-4886-8525-659D8446B810}"/>
               </a:ext>
             </a:extLst>
           </p:cNvPr>
@@ -9997,7 +9997,7 @@
           <p:cNvPr id="8" name="object-8">
             <a:extLst>
               <a:ext uri="{FF2B5EF4-FFF2-40B4-BE49-F238E27FC236}">
-                <a16:creationId xmlns:a16="http://schemas.microsoft.com/office/drawing/2014/main" id="{E18B48FE-1790-4A13-BDAD-E8326466EED6}"/>
+                <a16:creationId xmlns:a16="http://schemas.microsoft.com/office/drawing/2014/main" id="{6543E8C6-6ED0-4E4A-AFB2-781172AE479F}"/>
               </a:ext>
             </a:extLst>
           </p:cNvPr>
@@ -10027,7 +10027,7 @@
           <p:cNvPr id="9" name="object-9">
             <a:extLst>
               <a:ext uri="{FF2B5EF4-FFF2-40B4-BE49-F238E27FC236}">
-                <a16:creationId xmlns:a16="http://schemas.microsoft.com/office/drawing/2014/main" id="{F9547ECE-D125-4D68-9B3C-28D96A5792E7}"/>
+                <a16:creationId xmlns:a16="http://schemas.microsoft.com/office/drawing/2014/main" id="{09B0C9F1-20F1-4B9B-9C51-7296973BA33B}"/>
               </a:ext>
             </a:extLst>
           </p:cNvPr>
@@ -10084,7 +10084,7 @@
           <p:cNvPr id="10" name="object-10">
             <a:extLst>
               <a:ext uri="{FF2B5EF4-FFF2-40B4-BE49-F238E27FC236}">
-                <a16:creationId xmlns:a16="http://schemas.microsoft.com/office/drawing/2014/main" id="{66B95A93-03D4-4804-83D8-97BB2F1B5694}"/>
+                <a16:creationId xmlns:a16="http://schemas.microsoft.com/office/drawing/2014/main" id="{D140CE13-46F2-4AD6-9F19-3EB44FB45FDB}"/>
               </a:ext>
             </a:extLst>
           </p:cNvPr>
@@ -10141,7 +10141,7 @@
           <p:cNvPr id="11" name="object-11">
             <a:extLst>
               <a:ext uri="{FF2B5EF4-FFF2-40B4-BE49-F238E27FC236}">
-                <a16:creationId xmlns:a16="http://schemas.microsoft.com/office/drawing/2014/main" id="{CA85A09D-535E-4D10-B86E-F1837D62D3B4}"/>
+                <a16:creationId xmlns:a16="http://schemas.microsoft.com/office/drawing/2014/main" id="{962DC73A-1A1E-4A30-83B5-4BE35847A27A}"/>
               </a:ext>
             </a:extLst>
           </p:cNvPr>
@@ -10198,7 +10198,7 @@
           <p:cNvPr id="12" name="object-12">
             <a:extLst>
               <a:ext uri="{FF2B5EF4-FFF2-40B4-BE49-F238E27FC236}">
-                <a16:creationId xmlns:a16="http://schemas.microsoft.com/office/drawing/2014/main" id="{269EAF29-86D2-4BE3-A9AC-1F0557A27B2A}"/>
+                <a16:creationId xmlns:a16="http://schemas.microsoft.com/office/drawing/2014/main" id="{13CE282C-A4CC-4FB2-A05A-52150C06B99B}"/>
               </a:ext>
             </a:extLst>
           </p:cNvPr>
@@ -10245,7 +10245,7 @@
                 <a:ea typeface="Arial"/>
                 <a:cs typeface="Arial"/>
               </a:rPr>
-              <a:t>5.4 × 15 = 81</a:t>
+              <a:t>540 + 81 = 621</a:t>
             </a:r>
           </a:p>
         </p:txBody>
@@ -10253,7 +10253,7 @@
     </p:spTree>
     <p:extLst>
       <p:ext uri="{BB962C8B-B14F-4D97-AF65-F5344CB8AC3E}">
-        <p14:creationId xmlns:p14="http://schemas.microsoft.com/office/powerpoint/2010/main" val="167303101"/>
+        <p14:creationId xmlns:p14="http://schemas.microsoft.com/office/powerpoint/2010/main" val="1276448077"/>
       </p:ext>
     </p:extLst>
   </p:cSld>
@@ -10490,7 +10490,7 @@
           <p:cNvPr id="13" name="object-1">
             <a:extLst>
               <a:ext uri="{FF2B5EF4-FFF2-40B4-BE49-F238E27FC236}">
-                <a16:creationId xmlns:a16="http://schemas.microsoft.com/office/drawing/2014/main" id="{47FDC605-CD23-421A-AF69-B1FCC571A723}"/>
+                <a16:creationId xmlns:a16="http://schemas.microsoft.com/office/drawing/2014/main" id="{CCC8F7D9-E125-4CA3-BC08-3C087110C351}"/>
               </a:ext>
             </a:extLst>
           </p:cNvPr>
@@ -10547,7 +10547,7 @@
           <p:cNvPr id="2" name="object-2">
             <a:extLst>
               <a:ext uri="{FF2B5EF4-FFF2-40B4-BE49-F238E27FC236}">
-                <a16:creationId xmlns:a16="http://schemas.microsoft.com/office/drawing/2014/main" id="{5E6F46CD-2368-49FD-94A9-D674820061BD}"/>
+                <a16:creationId xmlns:a16="http://schemas.microsoft.com/office/drawing/2014/main" id="{47EFD3CE-4E5B-4F90-81A7-EECE6B7EF28D}"/>
               </a:ext>
             </a:extLst>
           </p:cNvPr>
@@ -10604,7 +10604,7 @@
           <p:cNvPr id="3" name="object-3">
             <a:extLst>
               <a:ext uri="{FF2B5EF4-FFF2-40B4-BE49-F238E27FC236}">
-                <a16:creationId xmlns:a16="http://schemas.microsoft.com/office/drawing/2014/main" id="{5AC10F61-E655-48F4-A861-EAD1646B3268}"/>
+                <a16:creationId xmlns:a16="http://schemas.microsoft.com/office/drawing/2014/main" id="{1A60E475-BD60-4347-BA64-B96957A6C6F4}"/>
               </a:ext>
             </a:extLst>
           </p:cNvPr>
@@ -10661,7 +10661,7 @@
           <p:cNvPr id="4" name="object-4">
             <a:extLst>
               <a:ext uri="{FF2B5EF4-FFF2-40B4-BE49-F238E27FC236}">
-                <a16:creationId xmlns:a16="http://schemas.microsoft.com/office/drawing/2014/main" id="{E240139A-6CFF-441A-A55F-B48BB3E56098}"/>
+                <a16:creationId xmlns:a16="http://schemas.microsoft.com/office/drawing/2014/main" id="{01C65EC2-8BAF-45C8-BB32-83CF3B7F4B73}"/>
               </a:ext>
             </a:extLst>
           </p:cNvPr>
@@ -10691,7 +10691,7 @@
           <p:cNvPr id="5" name="object-5">
             <a:extLst>
               <a:ext uri="{FF2B5EF4-FFF2-40B4-BE49-F238E27FC236}">
-                <a16:creationId xmlns:a16="http://schemas.microsoft.com/office/drawing/2014/main" id="{62F6021C-A8BF-4552-9B19-C8A9A90DD05F}"/>
+                <a16:creationId xmlns:a16="http://schemas.microsoft.com/office/drawing/2014/main" id="{C710509B-7077-4FEC-8060-58F6C1F718D6}"/>
               </a:ext>
             </a:extLst>
           </p:cNvPr>
@@ -10748,7 +10748,7 @@
           <p:cNvPr id="6" name="object-6">
             <a:extLst>
               <a:ext uri="{FF2B5EF4-FFF2-40B4-BE49-F238E27FC236}">
-                <a16:creationId xmlns:a16="http://schemas.microsoft.com/office/drawing/2014/main" id="{105453A0-A9E3-410F-BCA0-2717D88170D7}"/>
+                <a16:creationId xmlns:a16="http://schemas.microsoft.com/office/drawing/2014/main" id="{09EA2BA5-0ED6-4ECC-B9BF-07AD2F61F3DD}"/>
               </a:ext>
             </a:extLst>
           </p:cNvPr>
@@ -10805,7 +10805,7 @@
           <p:cNvPr id="7" name="object-7">
             <a:extLst>
               <a:ext uri="{FF2B5EF4-FFF2-40B4-BE49-F238E27FC236}">
-                <a16:creationId xmlns:a16="http://schemas.microsoft.com/office/drawing/2014/main" id="{07514BDF-BB88-4B4A-95CD-9154CC13AE96}"/>
+                <a16:creationId xmlns:a16="http://schemas.microsoft.com/office/drawing/2014/main" id="{66F54131-1591-4863-963C-31087729BE9D}"/>
               </a:ext>
             </a:extLst>
           </p:cNvPr>
@@ -10837,7 +10837,7 @@
           <p:cNvPr id="8" name="object-8">
             <a:extLst>
               <a:ext uri="{FF2B5EF4-FFF2-40B4-BE49-F238E27FC236}">
-                <a16:creationId xmlns:a16="http://schemas.microsoft.com/office/drawing/2014/main" id="{F9461F50-D0D5-4AD3-A94C-3EE8D6C6DD68}"/>
+                <a16:creationId xmlns:a16="http://schemas.microsoft.com/office/drawing/2014/main" id="{1259F3D7-1B58-4BD9-948F-FE99BC443665}"/>
               </a:ext>
             </a:extLst>
           </p:cNvPr>
@@ -10867,7 +10867,7 @@
           <p:cNvPr id="9" name="object-9">
             <a:extLst>
               <a:ext uri="{FF2B5EF4-FFF2-40B4-BE49-F238E27FC236}">
-                <a16:creationId xmlns:a16="http://schemas.microsoft.com/office/drawing/2014/main" id="{9D5B31D5-820D-41FE-9652-1D70B5312C4A}"/>
+                <a16:creationId xmlns:a16="http://schemas.microsoft.com/office/drawing/2014/main" id="{96637885-2CF1-4043-9379-58D698B1A98F}"/>
               </a:ext>
             </a:extLst>
           </p:cNvPr>
@@ -10924,7 +10924,7 @@
           <p:cNvPr id="10" name="object-10">
             <a:extLst>
               <a:ext uri="{FF2B5EF4-FFF2-40B4-BE49-F238E27FC236}">
-                <a16:creationId xmlns:a16="http://schemas.microsoft.com/office/drawing/2014/main" id="{70C6A267-7313-4B2C-A43A-45648A26D308}"/>
+                <a16:creationId xmlns:a16="http://schemas.microsoft.com/office/drawing/2014/main" id="{8786E65A-97D6-4F45-B4AB-6ACAADC3D4A1}"/>
               </a:ext>
             </a:extLst>
           </p:cNvPr>
@@ -10981,7 +10981,7 @@
           <p:cNvPr id="11" name="object-11">
             <a:extLst>
               <a:ext uri="{FF2B5EF4-FFF2-40B4-BE49-F238E27FC236}">
-                <a16:creationId xmlns:a16="http://schemas.microsoft.com/office/drawing/2014/main" id="{6467BC1A-3857-4C70-92E5-3C4E19320047}"/>
+                <a16:creationId xmlns:a16="http://schemas.microsoft.com/office/drawing/2014/main" id="{54E173D1-B4DD-45D0-A620-C881405CCCBA}"/>
               </a:ext>
             </a:extLst>
           </p:cNvPr>
@@ -11038,7 +11038,7 @@
           <p:cNvPr id="12" name="object-12">
             <a:extLst>
               <a:ext uri="{FF2B5EF4-FFF2-40B4-BE49-F238E27FC236}">
-                <a16:creationId xmlns:a16="http://schemas.microsoft.com/office/drawing/2014/main" id="{F93057AE-C8A8-4D33-BBCE-509E92B92E03}"/>
+                <a16:creationId xmlns:a16="http://schemas.microsoft.com/office/drawing/2014/main" id="{56D2130C-C785-406C-9E47-ACE6B2DF7434}"/>
               </a:ext>
             </a:extLst>
           </p:cNvPr>
@@ -11093,7 +11093,7 @@
     </p:spTree>
     <p:extLst>
       <p:ext uri="{BB962C8B-B14F-4D97-AF65-F5344CB8AC3E}">
-        <p14:creationId xmlns:p14="http://schemas.microsoft.com/office/powerpoint/2010/main" val="2055229683"/>
+        <p14:creationId xmlns:p14="http://schemas.microsoft.com/office/powerpoint/2010/main" val="1363135838"/>
       </p:ext>
     </p:extLst>
   </p:cSld>
